--- a/w6_ppt.pptx
+++ b/w6_ppt.pptx
@@ -4,6 +4,9 @@
   <p:sldMasterIdLst>
     <p:sldMasterId id="2147483648" r:id="rId1"/>
   </p:sldMasterIdLst>
+  <p:notesMasterIdLst>
+    <p:notesMasterId r:id="rId10"/>
+  </p:notesMasterIdLst>
   <p:sldIdLst>
     <p:sldId id="256" r:id="rId2"/>
     <p:sldId id="257" r:id="rId3"/>
@@ -12,22 +15,126 @@
     <p:sldId id="260" r:id="rId6"/>
     <p:sldId id="261" r:id="rId7"/>
     <p:sldId id="262" r:id="rId8"/>
+    <p:sldId id="263" r:id="rId9"/>
   </p:sldIdLst>
-  <p:notesMasterIdLst>
-    <p:notesMasterId r:id="rId9"/>
-  </p:notesMasterIdLst>
   <p:sldSz cx="12192000" cy="6858000"/>
   <p:notesSz cx="6858000" cy="12192000"/>
   <p:embeddedFontLst>
     <p:embeddedFont>
-      <p:font typeface="Quattrocento Sans" charset="-122" pitchFamily="34"/>
-      <p:regular r:id="rId14"/>
+      <p:font typeface="微软雅黑" panose="020B0503020204020204" pitchFamily="34" charset="-122"/>
+      <p:regular r:id="rId11"/>
+      <p:bold r:id="rId12"/>
     </p:embeddedFont>
     <p:embeddedFont>
-      <p:font typeface="Liter" charset="-122" pitchFamily="34"/>
-      <p:regular r:id="rId15"/>
+      <p:font typeface="Liter" panose="020B0604020202020204" charset="0"/>
+      <p:regular r:id="rId13"/>
+    </p:embeddedFont>
+    <p:embeddedFont>
+      <p:font typeface="Quattrocento Sans" panose="020B0502050000020003" pitchFamily="34" charset="0"/>
+      <p:regular r:id="rId14"/>
+      <p:bold r:id="rId15"/>
     </p:embeddedFont>
   </p:embeddedFontLst>
+  <p:defaultTextStyle>
+    <a:defPPr>
+      <a:defRPr lang="zh-CN"/>
+    </a:defPPr>
+    <a:lvl1pPr marL="0" algn="l" defTabSz="914400" rtl="0" eaLnBrk="1" latinLnBrk="0" hangingPunct="1">
+      <a:defRPr sz="1800" kern="1200">
+        <a:solidFill>
+          <a:schemeClr val="tx1"/>
+        </a:solidFill>
+        <a:latin typeface="+mn-lt"/>
+        <a:ea typeface="+mn-ea"/>
+        <a:cs typeface="+mn-cs"/>
+      </a:defRPr>
+    </a:lvl1pPr>
+    <a:lvl2pPr marL="457200" algn="l" defTabSz="914400" rtl="0" eaLnBrk="1" latinLnBrk="0" hangingPunct="1">
+      <a:defRPr sz="1800" kern="1200">
+        <a:solidFill>
+          <a:schemeClr val="tx1"/>
+        </a:solidFill>
+        <a:latin typeface="+mn-lt"/>
+        <a:ea typeface="+mn-ea"/>
+        <a:cs typeface="+mn-cs"/>
+      </a:defRPr>
+    </a:lvl2pPr>
+    <a:lvl3pPr marL="914400" algn="l" defTabSz="914400" rtl="0" eaLnBrk="1" latinLnBrk="0" hangingPunct="1">
+      <a:defRPr sz="1800" kern="1200">
+        <a:solidFill>
+          <a:schemeClr val="tx1"/>
+        </a:solidFill>
+        <a:latin typeface="+mn-lt"/>
+        <a:ea typeface="+mn-ea"/>
+        <a:cs typeface="+mn-cs"/>
+      </a:defRPr>
+    </a:lvl3pPr>
+    <a:lvl4pPr marL="1371600" algn="l" defTabSz="914400" rtl="0" eaLnBrk="1" latinLnBrk="0" hangingPunct="1">
+      <a:defRPr sz="1800" kern="1200">
+        <a:solidFill>
+          <a:schemeClr val="tx1"/>
+        </a:solidFill>
+        <a:latin typeface="+mn-lt"/>
+        <a:ea typeface="+mn-ea"/>
+        <a:cs typeface="+mn-cs"/>
+      </a:defRPr>
+    </a:lvl4pPr>
+    <a:lvl5pPr marL="1828800" algn="l" defTabSz="914400" rtl="0" eaLnBrk="1" latinLnBrk="0" hangingPunct="1">
+      <a:defRPr sz="1800" kern="1200">
+        <a:solidFill>
+          <a:schemeClr val="tx1"/>
+        </a:solidFill>
+        <a:latin typeface="+mn-lt"/>
+        <a:ea typeface="+mn-ea"/>
+        <a:cs typeface="+mn-cs"/>
+      </a:defRPr>
+    </a:lvl5pPr>
+    <a:lvl6pPr marL="2286000" algn="l" defTabSz="914400" rtl="0" eaLnBrk="1" latinLnBrk="0" hangingPunct="1">
+      <a:defRPr sz="1800" kern="1200">
+        <a:solidFill>
+          <a:schemeClr val="tx1"/>
+        </a:solidFill>
+        <a:latin typeface="+mn-lt"/>
+        <a:ea typeface="+mn-ea"/>
+        <a:cs typeface="+mn-cs"/>
+      </a:defRPr>
+    </a:lvl6pPr>
+    <a:lvl7pPr marL="2743200" algn="l" defTabSz="914400" rtl="0" eaLnBrk="1" latinLnBrk="0" hangingPunct="1">
+      <a:defRPr sz="1800" kern="1200">
+        <a:solidFill>
+          <a:schemeClr val="tx1"/>
+        </a:solidFill>
+        <a:latin typeface="+mn-lt"/>
+        <a:ea typeface="+mn-ea"/>
+        <a:cs typeface="+mn-cs"/>
+      </a:defRPr>
+    </a:lvl7pPr>
+    <a:lvl8pPr marL="3200400" algn="l" defTabSz="914400" rtl="0" eaLnBrk="1" latinLnBrk="0" hangingPunct="1">
+      <a:defRPr sz="1800" kern="1200">
+        <a:solidFill>
+          <a:schemeClr val="tx1"/>
+        </a:solidFill>
+        <a:latin typeface="+mn-lt"/>
+        <a:ea typeface="+mn-ea"/>
+        <a:cs typeface="+mn-cs"/>
+      </a:defRPr>
+    </a:lvl8pPr>
+    <a:lvl9pPr marL="3657600" algn="l" defTabSz="914400" rtl="0" eaLnBrk="1" latinLnBrk="0" hangingPunct="1">
+      <a:defRPr sz="1800" kern="1200">
+        <a:solidFill>
+          <a:schemeClr val="tx1"/>
+        </a:solidFill>
+        <a:latin typeface="+mn-lt"/>
+        <a:ea typeface="+mn-ea"/>
+        <a:cs typeface="+mn-cs"/>
+      </a:defRPr>
+    </a:lvl9pPr>
+  </p:defaultTextStyle>
+  <p:extLst>
+    <p:ext uri="{EFAFB233-063F-42B5-8137-9DF3F51BA10A}">
+      <p15:sldGuideLst xmlns:p15="http://schemas.microsoft.com/office/powerpoint/2012/main"/>
+    </p:ext>
+  </p:extLst>
 </p:presentation>
 </file>
 
@@ -53,234 +160,10 @@
           <a:chExt cx="0" cy="0"/>
         </a:xfrm>
       </p:grpSpPr>
-      <p:sp>
-        <p:nvSpPr>
-          <p:cNvPr id="2" name="Header Placeholder 1"/>
-          <p:cNvSpPr>
-            <a:spLocks noGrp="1"/>
-          </p:cNvSpPr>
-          <p:nvPr>
-            <p:ph type="hdr" sz="quarter"/>
-          </p:nvPr>
-        </p:nvSpPr>
-        <p:spPr>
-          <a:xfrm>
-            <a:off x="0" y="0"/>
-            <a:ext cx="2971800" cy="458788"/>
-          </a:xfrm>
-          <a:prstGeom prst="rect">
-            <a:avLst/>
-          </a:prstGeom>
-        </p:spPr>
-        <p:txBody>
-          <a:bodyPr vert="horz" lIns="91440" tIns="45720" rIns="91440" bIns="45720" rtlCol="0"/>
-          <a:lstStyle>
-            <a:lvl1pPr algn="l">
-              <a:defRPr sz="1200"/>
-            </a:lvl1pPr>
-          </a:lstStyle>
-          <a:p>
-            <a:endParaRPr lang="en-US"/>
-          </a:p>
-        </p:txBody>
-      </p:sp>
-      <p:sp>
-        <p:nvSpPr>
-          <p:cNvPr id="3" name="Date Placeholder 2"/>
-          <p:cNvSpPr>
-            <a:spLocks noGrp="1"/>
-          </p:cNvSpPr>
-          <p:nvPr>
-            <p:ph type="dt" idx="1"/>
-          </p:nvPr>
-        </p:nvSpPr>
-        <p:spPr>
-          <a:xfrm>
-            <a:off x="3884613" y="0"/>
-            <a:ext cx="2971800" cy="458788"/>
-          </a:xfrm>
-          <a:prstGeom prst="rect">
-            <a:avLst/>
-          </a:prstGeom>
-        </p:spPr>
-        <p:txBody>
-          <a:bodyPr vert="horz" lIns="91440" tIns="45720" rIns="91440" bIns="45720" rtlCol="0"/>
-          <a:lstStyle>
-            <a:lvl1pPr algn="r">
-              <a:defRPr sz="1200"/>
-            </a:lvl1pPr>
-          </a:lstStyle>
-          <a:p>
-            <a:fld id="{5282F153-3F37-0F45-9E97-73ACFA13230C}" type="datetimeFigureOut">
-              <a:rPr lang="en-US"/>
-              <a:t>7/23/19</a:t>
-            </a:fld>
-            <a:endParaRPr lang="en-US"/>
-          </a:p>
-        </p:txBody>
-      </p:sp>
-      <p:sp>
-        <p:nvSpPr>
-          <p:cNvPr id="4" name="Slide Image Placeholder 3"/>
-          <p:cNvSpPr>
-            <a:spLocks noGrp="1" noRot="1" noChangeAspect="1"/>
-          </p:cNvSpPr>
-          <p:nvPr>
-            <p:ph type="sldImg" idx="2"/>
-          </p:nvPr>
-        </p:nvSpPr>
-        <p:spPr>
-          <a:xfrm>
-            <a:off x="685800" y="1143000"/>
-            <a:ext cx="5486400" cy="3086100"/>
-          </a:xfrm>
-          <a:prstGeom prst="rect">
-            <a:avLst/>
-          </a:prstGeom>
-          <a:noFill/>
-          <a:ln w="12700">
-            <a:solidFill>
-              <a:prstClr val="black"/>
-            </a:solidFill>
-          </a:ln>
-        </p:spPr>
-        <p:txBody>
-          <a:bodyPr vert="horz" lIns="91440" tIns="45720" rIns="91440" bIns="45720" rtlCol="0" anchor="ctr"/>
-          <a:lstStyle/>
-          <a:p>
-            <a:endParaRPr lang="en-US"/>
-          </a:p>
-        </p:txBody>
-      </p:sp>
-      <p:sp>
-        <p:nvSpPr>
-          <p:cNvPr id="5" name="Notes Placeholder 4"/>
-          <p:cNvSpPr>
-            <a:spLocks noGrp="1"/>
-          </p:cNvSpPr>
-          <p:nvPr>
-            <p:ph type="body" sz="quarter" idx="3"/>
-          </p:nvPr>
-        </p:nvSpPr>
-        <p:spPr>
-          <a:xfrm>
-            <a:off x="685800" y="4400550"/>
-            <a:ext cx="5486400" cy="3600450"/>
-          </a:xfrm>
-          <a:prstGeom prst="rect">
-            <a:avLst/>
-          </a:prstGeom>
-        </p:spPr>
-        <p:txBody>
-          <a:bodyPr vert="horz" lIns="91440" tIns="45720" rIns="91440" bIns="45720" rtlCol="0"/>
-          <a:lstStyle/>
-          <a:p>
-            <a:pPr lvl="0"/>
-            <a:r>
-              <a:rPr lang="en-US"/>
-              <a:t>Click to edit Master text styles</a:t>
-            </a:r>
-          </a:p>
-          <a:p>
-            <a:pPr lvl="1"/>
-            <a:r>
-              <a:rPr lang="en-US"/>
-              <a:t>Second level</a:t>
-            </a:r>
-          </a:p>
-          <a:p>
-            <a:pPr lvl="2"/>
-            <a:r>
-              <a:rPr lang="en-US"/>
-              <a:t>Third level</a:t>
-            </a:r>
-          </a:p>
-          <a:p>
-            <a:pPr lvl="3"/>
-            <a:r>
-              <a:rPr lang="en-US"/>
-              <a:t>Fourth level</a:t>
-            </a:r>
-          </a:p>
-          <a:p>
-            <a:pPr lvl="4"/>
-            <a:r>
-              <a:rPr lang="en-US"/>
-              <a:t>Fifth level</a:t>
-            </a:r>
-          </a:p>
-        </p:txBody>
-      </p:sp>
-      <p:sp>
-        <p:nvSpPr>
-          <p:cNvPr id="6" name="Footer Placeholder 5"/>
-          <p:cNvSpPr>
-            <a:spLocks noGrp="1"/>
-          </p:cNvSpPr>
-          <p:nvPr>
-            <p:ph type="ftr" sz="quarter" idx="4"/>
-          </p:nvPr>
-        </p:nvSpPr>
-        <p:spPr>
-          <a:xfrm>
-            <a:off x="0" y="8685213"/>
-            <a:ext cx="2971800" cy="458787"/>
-          </a:xfrm>
-          <a:prstGeom prst="rect">
-            <a:avLst/>
-          </a:prstGeom>
-        </p:spPr>
-        <p:txBody>
-          <a:bodyPr vert="horz" lIns="91440" tIns="45720" rIns="91440" bIns="45720" rtlCol="0" anchor="b"/>
-          <a:lstStyle>
-            <a:lvl1pPr algn="l">
-              <a:defRPr sz="1200"/>
-            </a:lvl1pPr>
-          </a:lstStyle>
-          <a:p>
-            <a:endParaRPr lang="en-US"/>
-          </a:p>
-        </p:txBody>
-      </p:sp>
-      <p:sp>
-        <p:nvSpPr>
-          <p:cNvPr id="7" name="Slide Number Placeholder 6"/>
-          <p:cNvSpPr>
-            <a:spLocks noGrp="1"/>
-          </p:cNvSpPr>
-          <p:nvPr>
-            <p:ph type="sldNum" sz="quarter" idx="5"/>
-          </p:nvPr>
-        </p:nvSpPr>
-        <p:spPr>
-          <a:xfrm>
-            <a:off x="3884613" y="8685213"/>
-            <a:ext cx="2971800" cy="458787"/>
-          </a:xfrm>
-          <a:prstGeom prst="rect">
-            <a:avLst/>
-          </a:prstGeom>
-        </p:spPr>
-        <p:txBody>
-          <a:bodyPr vert="horz" lIns="91440" tIns="45720" rIns="91440" bIns="45720" rtlCol="0" anchor="b"/>
-          <a:lstStyle>
-            <a:lvl1pPr algn="r">
-              <a:defRPr sz="1200"/>
-            </a:lvl1pPr>
-          </a:lstStyle>
-          <a:p>
-            <a:fld id="{CE5E9CC1-C706-0F49-92D6-E571CC5EEA8F}" type="slidenum">
-              <a:rPr lang="en-US"/>
-              <a:t>‹#›</a:t>
-            </a:fld>
-            <a:endParaRPr lang="en-US"/>
-          </a:p>
-        </p:txBody>
-      </p:sp>
     </p:spTree>
     <p:extLst>
       <p:ext uri="{BB962C8B-B14F-4D97-AF65-F5344CB8AC3E}">
-        <p14:creationId xmlns:p14="http://schemas.microsoft.com/office/powerpoint/2010/main" val="1024086991"/>
+        <p14:creationId xmlns:p14="http://schemas.microsoft.com/office/powerpoint/2010/main" val="3292889438"/>
       </p:ext>
     </p:extLst>
   </p:cSld>
@@ -424,10 +307,6 @@
           <a:bodyPr/>
           <a:lstStyle/>
           <a:p>
-            <a:r>
-              <a:rPr lang="en-US" dirty="0"/>
-              <a:t/>
-            </a:r>
             <a:endParaRPr lang="en-US" dirty="0"/>
           </a:p>
         </p:txBody>
@@ -512,10 +391,6 @@
           <a:bodyPr/>
           <a:lstStyle/>
           <a:p>
-            <a:r>
-              <a:rPr lang="en-US" dirty="0"/>
-              <a:t/>
-            </a:r>
             <a:endParaRPr lang="en-US" dirty="0"/>
           </a:p>
         </p:txBody>
@@ -600,10 +475,6 @@
           <a:bodyPr/>
           <a:lstStyle/>
           <a:p>
-            <a:r>
-              <a:rPr lang="en-US" dirty="0"/>
-              <a:t/>
-            </a:r>
             <a:endParaRPr lang="en-US" dirty="0"/>
           </a:p>
         </p:txBody>
@@ -688,10 +559,6 @@
           <a:bodyPr/>
           <a:lstStyle/>
           <a:p>
-            <a:r>
-              <a:rPr lang="en-US" dirty="0"/>
-              <a:t/>
-            </a:r>
             <a:endParaRPr lang="en-US" dirty="0"/>
           </a:p>
         </p:txBody>
@@ -776,10 +643,6 @@
           <a:bodyPr/>
           <a:lstStyle/>
           <a:p>
-            <a:r>
-              <a:rPr lang="en-US" dirty="0"/>
-              <a:t/>
-            </a:r>
             <a:endParaRPr lang="en-US" dirty="0"/>
           </a:p>
         </p:txBody>
@@ -864,10 +727,6 @@
           <a:bodyPr/>
           <a:lstStyle/>
           <a:p>
-            <a:r>
-              <a:rPr lang="en-US" dirty="0"/>
-              <a:t/>
-            </a:r>
             <a:endParaRPr lang="en-US" dirty="0"/>
           </a:p>
         </p:txBody>
@@ -952,10 +811,6 @@
           <a:bodyPr/>
           <a:lstStyle/>
           <a:p>
-            <a:r>
-              <a:rPr lang="en-US" dirty="0"/>
-              <a:t/>
-            </a:r>
             <a:endParaRPr lang="en-US" dirty="0"/>
           </a:p>
         </p:txBody>
@@ -987,6 +842,114 @@
     <p:extLst>
       <p:ext uri="{BB962C8B-B14F-4D97-AF65-F5344CB8AC3E}">
         <p14:creationId xmlns:p14="http://schemas.microsoft.com/office/powerpoint/2010/main" val="1024086991"/>
+      </p:ext>
+    </p:extLst>
+  </p:cSld>
+  <p:clrMapOvr>
+    <a:masterClrMapping/>
+  </p:clrMapOvr>
+</p:notes>
+</file>
+
+<file path=ppt/notesSlides/notesSlide8.xml><?xml version="1.0" encoding="utf-8"?>
+<p:notes xmlns:a="http://schemas.openxmlformats.org/drawingml/2006/main" xmlns:r="http://schemas.openxmlformats.org/officeDocument/2006/relationships" xmlns:p="http://schemas.openxmlformats.org/presentationml/2006/main">
+  <p:cSld>
+    <p:spTree>
+      <p:nvGrpSpPr>
+        <p:cNvPr id="1" name="">
+          <a:extLst>
+            <a:ext uri="{FF2B5EF4-FFF2-40B4-BE49-F238E27FC236}">
+              <a16:creationId xmlns:a16="http://schemas.microsoft.com/office/drawing/2014/main" id="{4FF27DB5-76B5-C03A-074C-4C40CC5FC90F}"/>
+            </a:ext>
+          </a:extLst>
+        </p:cNvPr>
+        <p:cNvGrpSpPr/>
+        <p:nvPr/>
+      </p:nvGrpSpPr>
+      <p:grpSpPr>
+        <a:xfrm>
+          <a:off x="0" y="0"/>
+          <a:ext cx="0" cy="0"/>
+          <a:chOff x="0" y="0"/>
+          <a:chExt cx="0" cy="0"/>
+        </a:xfrm>
+      </p:grpSpPr>
+      <p:sp>
+        <p:nvSpPr>
+          <p:cNvPr id="2" name="Slide Image Placeholder 1">
+            <a:extLst>
+              <a:ext uri="{FF2B5EF4-FFF2-40B4-BE49-F238E27FC236}">
+                <a16:creationId xmlns:a16="http://schemas.microsoft.com/office/drawing/2014/main" id="{BE1AE173-C602-B3F1-7071-BFD33404C9B3}"/>
+              </a:ext>
+            </a:extLst>
+          </p:cNvPr>
+          <p:cNvSpPr>
+            <a:spLocks noGrp="1" noRot="1" noChangeAspect="1"/>
+          </p:cNvSpPr>
+          <p:nvPr>
+            <p:ph type="sldImg"/>
+          </p:nvPr>
+        </p:nvSpPr>
+        <p:spPr/>
+      </p:sp>
+      <p:sp>
+        <p:nvSpPr>
+          <p:cNvPr id="3" name="Notes Placeholder 2">
+            <a:extLst>
+              <a:ext uri="{FF2B5EF4-FFF2-40B4-BE49-F238E27FC236}">
+                <a16:creationId xmlns:a16="http://schemas.microsoft.com/office/drawing/2014/main" id="{553A492D-781E-4194-3911-922618138663}"/>
+              </a:ext>
+            </a:extLst>
+          </p:cNvPr>
+          <p:cNvSpPr>
+            <a:spLocks noGrp="1"/>
+          </p:cNvSpPr>
+          <p:nvPr>
+            <p:ph type="body" idx="1"/>
+          </p:nvPr>
+        </p:nvSpPr>
+        <p:spPr/>
+        <p:txBody>
+          <a:bodyPr/>
+          <a:lstStyle/>
+          <a:p>
+            <a:endParaRPr lang="en-US" dirty="0"/>
+          </a:p>
+        </p:txBody>
+      </p:sp>
+      <p:sp>
+        <p:nvSpPr>
+          <p:cNvPr id="4" name="Slide Number Placeholder 3">
+            <a:extLst>
+              <a:ext uri="{FF2B5EF4-FFF2-40B4-BE49-F238E27FC236}">
+                <a16:creationId xmlns:a16="http://schemas.microsoft.com/office/drawing/2014/main" id="{E4C23C79-E9CC-B699-92A7-C1A61A7A7236}"/>
+              </a:ext>
+            </a:extLst>
+          </p:cNvPr>
+          <p:cNvSpPr>
+            <a:spLocks noGrp="1"/>
+          </p:cNvSpPr>
+          <p:nvPr>
+            <p:ph type="sldNum" sz="quarter" idx="10"/>
+          </p:nvPr>
+        </p:nvSpPr>
+        <p:spPr/>
+        <p:txBody>
+          <a:bodyPr/>
+          <a:lstStyle/>
+          <a:p>
+            <a:fld id="{F7021451-1387-4CA6-816F-3879F97B5CBC}" type="slidenum">
+              <a:rPr lang="en-US"/>
+              <a:t>8</a:t>
+            </a:fld>
+            <a:endParaRPr lang="en-US"/>
+          </a:p>
+        </p:txBody>
+      </p:sp>
+    </p:spTree>
+    <p:extLst>
+      <p:ext uri="{BB962C8B-B14F-4D97-AF65-F5344CB8AC3E}">
+        <p14:creationId xmlns:p14="http://schemas.microsoft.com/office/powerpoint/2010/main" val="1072744512"/>
       </p:ext>
     </p:extLst>
   </p:cSld>
@@ -1034,6 +997,7 @@
         <a:solidFill>
           <a:srgbClr val="FFFFFF"/>
         </a:solidFill>
+        <a:effectLst/>
       </p:bgPr>
     </p:bg>
     <p:spTree>
@@ -1061,6 +1025,11 @@
 <file path=ppt/slideMasters/slideMaster1.xml><?xml version="1.0" encoding="utf-8"?>
 <p:sldMaster xmlns:a="http://schemas.openxmlformats.org/drawingml/2006/main" xmlns:r="http://schemas.openxmlformats.org/officeDocument/2006/relationships" xmlns:p="http://schemas.openxmlformats.org/presentationml/2006/main">
   <p:cSld>
+    <p:bg>
+      <p:bgRef idx="1001">
+        <a:schemeClr val="bg1"/>
+      </p:bgRef>
+    </p:bg>
     <p:spTree>
       <p:nvGrpSpPr>
         <p:cNvPr id="1" name=""/>
@@ -1344,6 +1313,7 @@
         <a:solidFill>
           <a:srgbClr val="F7F5F3"/>
         </a:solidFill>
+        <a:effectLst/>
       </p:bgPr>
     </p:bg>
     <p:spTree>
@@ -1362,17 +1332,17 @@
       </p:grpSpPr>
       <p:pic>
         <p:nvPicPr>
-          <p:cNvPr id="2" name="Image 0" descr="https://kimi-web-img.moonshot.cn/img/www.greenply.com:5001/eb216478dd37f010967c61f9194a6f25ebb8005d.jpg">    </p:cNvPr>
+          <p:cNvPr id="2" name="Image 0" descr="https://kimi-web-img.moonshot.cn/img/www.greenply.com:5001/eb216478dd37f010967c61f9194a6f25ebb8005d.jpg"/>
           <p:cNvPicPr>
             <a:picLocks noChangeAspect="1"/>
           </p:cNvPicPr>
           <p:nvPr/>
         </p:nvPicPr>
         <p:blipFill>
-          <a:blip r:embed="rId1">
+          <a:blip r:embed="rId3">
             <a:alphaModFix amt="30000"/>
           </a:blip>
-          <a:srcRect l="3333" r="3333" t="0" b="0"/>
+          <a:srcRect l="3333" r="3333"/>
           <a:stretch/>
         </p:blipFill>
         <p:spPr>
@@ -1432,6 +1402,13 @@
           </a:solidFill>
           <a:ln/>
         </p:spPr>
+        <p:txBody>
+          <a:bodyPr/>
+          <a:lstStyle/>
+          <a:p>
+            <a:endParaRPr lang="zh-CN" altLang="en-US"/>
+          </a:p>
+        </p:txBody>
       </p:sp>
       <p:sp>
         <p:nvSpPr>
@@ -1476,6 +1453,13 @@
           </a:solidFill>
           <a:ln/>
         </p:spPr>
+        <p:txBody>
+          <a:bodyPr/>
+          <a:lstStyle/>
+          <a:p>
+            <a:endParaRPr lang="zh-CN" altLang="en-US"/>
+          </a:p>
+        </p:txBody>
       </p:sp>
       <p:sp>
         <p:nvSpPr>
@@ -1504,7 +1488,7 @@
               </a:lnSpc>
             </a:pPr>
             <a:r>
-              <a:rPr lang="en-US" sz="1200" b="1" spc="120" kern="0" dirty="0">
+              <a:rPr lang="en-US" sz="1200" b="1" kern="0" spc="120" dirty="0">
                 <a:solidFill>
                   <a:srgbClr val="F7F5F3"/>
                 </a:solidFill>
@@ -1666,6 +1650,13 @@
           </a:solidFill>
           <a:ln/>
         </p:spPr>
+        <p:txBody>
+          <a:bodyPr/>
+          <a:lstStyle/>
+          <a:p>
+            <a:endParaRPr lang="zh-CN" altLang="en-US"/>
+          </a:p>
+        </p:txBody>
       </p:sp>
       <p:sp>
         <p:nvSpPr>
@@ -1710,6 +1701,13 @@
           </a:solidFill>
           <a:ln/>
         </p:spPr>
+        <p:txBody>
+          <a:bodyPr/>
+          <a:lstStyle/>
+          <a:p>
+            <a:endParaRPr lang="zh-CN" altLang="en-US"/>
+          </a:p>
+        </p:txBody>
       </p:sp>
       <p:sp>
         <p:nvSpPr>
@@ -1840,6 +1838,13 @@
           </a:solidFill>
           <a:ln/>
         </p:spPr>
+        <p:txBody>
+          <a:bodyPr/>
+          <a:lstStyle/>
+          <a:p>
+            <a:endParaRPr lang="zh-CN" altLang="en-US"/>
+          </a:p>
+        </p:txBody>
       </p:sp>
       <p:sp>
         <p:nvSpPr>
@@ -2012,7 +2017,6 @@
   </p:clrMapOvr>
   <p:transition>
     <p:fade/>
-    <p:spd val="med"/>
   </p:transition>
 </p:sld>
 </file>
@@ -2025,6 +2029,7 @@
         <a:solidFill>
           <a:srgbClr val="F7F5F3"/>
         </a:solidFill>
+        <a:effectLst/>
       </p:bgPr>
     </p:bg>
     <p:spTree>
@@ -2104,6 +2109,13 @@
           </a:solidFill>
           <a:ln/>
         </p:spPr>
+        <p:txBody>
+          <a:bodyPr/>
+          <a:lstStyle/>
+          <a:p>
+            <a:endParaRPr lang="zh-CN" altLang="en-US"/>
+          </a:p>
+        </p:txBody>
       </p:sp>
       <p:sp>
         <p:nvSpPr>
@@ -2250,13 +2262,20 @@
           </a:solidFill>
           <a:ln/>
           <a:effectLst>
-            <a:outerShdw sx="100000" sy="100000" kx="0" ky="0" algn="bl" rotWithShape="0" blurRad="27255" dist="9085" dir="5400000">
+            <a:outerShdw blurRad="27255" dist="9085" dir="5400000" algn="bl" rotWithShape="0">
               <a:srgbClr val="000000">
                 <a:alpha val="10196"/>
               </a:srgbClr>
             </a:outerShdw>
           </a:effectLst>
         </p:spPr>
+        <p:txBody>
+          <a:bodyPr/>
+          <a:lstStyle/>
+          <a:p>
+            <a:endParaRPr lang="zh-CN" altLang="en-US"/>
+          </a:p>
+        </p:txBody>
       </p:sp>
       <p:sp>
         <p:nvSpPr>
@@ -2311,6 +2330,13 @@
           </a:solidFill>
           <a:ln/>
         </p:spPr>
+        <p:txBody>
+          <a:bodyPr/>
+          <a:lstStyle/>
+          <a:p>
+            <a:endParaRPr lang="zh-CN" altLang="en-US"/>
+          </a:p>
+        </p:txBody>
       </p:sp>
       <p:sp>
         <p:nvSpPr>
@@ -2457,6 +2483,13 @@
           </a:solidFill>
           <a:ln/>
         </p:spPr>
+        <p:txBody>
+          <a:bodyPr/>
+          <a:lstStyle/>
+          <a:p>
+            <a:endParaRPr lang="zh-CN" altLang="en-US"/>
+          </a:p>
+        </p:txBody>
       </p:sp>
       <p:sp>
         <p:nvSpPr>
@@ -2562,6 +2595,13 @@
           </a:solidFill>
           <a:ln/>
         </p:spPr>
+        <p:txBody>
+          <a:bodyPr/>
+          <a:lstStyle/>
+          <a:p>
+            <a:endParaRPr lang="zh-CN" altLang="en-US"/>
+          </a:p>
+        </p:txBody>
       </p:sp>
       <p:sp>
         <p:nvSpPr>
@@ -2602,11 +2642,6 @@
               </a:rPr>
               <a:t>Real-world topic:</a:t>
             </a:r>
-            <a:pPr>
-              <a:lnSpc>
-                <a:spcPct val="140000"/>
-              </a:lnSpc>
-            </a:pPr>
             <a:r>
               <a:rPr lang="en-US" sz="1145" dirty="0">
                 <a:solidFill>
@@ -2687,6 +2722,13 @@
           </a:solidFill>
           <a:ln/>
         </p:spPr>
+        <p:txBody>
+          <a:bodyPr/>
+          <a:lstStyle/>
+          <a:p>
+            <a:endParaRPr lang="zh-CN" altLang="en-US"/>
+          </a:p>
+        </p:txBody>
       </p:sp>
       <p:sp>
         <p:nvSpPr>
@@ -2727,11 +2769,6 @@
               </a:rPr>
               <a:t>Suitable for both</a:t>
             </a:r>
-            <a:pPr>
-              <a:lnSpc>
-                <a:spcPct val="140000"/>
-              </a:lnSpc>
-            </a:pPr>
             <a:r>
               <a:rPr lang="en-US" sz="1145" dirty="0">
                 <a:solidFill>
@@ -2812,13 +2849,20 @@
           </a:solidFill>
           <a:ln/>
           <a:effectLst>
-            <a:outerShdw sx="100000" sy="100000" kx="0" ky="0" algn="bl" rotWithShape="0" blurRad="27255" dist="9085" dir="5400000">
+            <a:outerShdw blurRad="27255" dist="9085" dir="5400000" algn="bl" rotWithShape="0">
               <a:srgbClr val="000000">
                 <a:alpha val="10196"/>
               </a:srgbClr>
             </a:outerShdw>
           </a:effectLst>
         </p:spPr>
+        <p:txBody>
+          <a:bodyPr/>
+          <a:lstStyle/>
+          <a:p>
+            <a:endParaRPr lang="zh-CN" altLang="en-US"/>
+          </a:p>
+        </p:txBody>
       </p:sp>
       <p:sp>
         <p:nvSpPr>
@@ -2873,6 +2917,13 @@
           </a:solidFill>
           <a:ln/>
         </p:spPr>
+        <p:txBody>
+          <a:bodyPr/>
+          <a:lstStyle/>
+          <a:p>
+            <a:endParaRPr lang="zh-CN" altLang="en-US"/>
+          </a:p>
+        </p:txBody>
       </p:sp>
       <p:sp>
         <p:nvSpPr>
@@ -3015,6 +3066,13 @@
           </a:solidFill>
           <a:ln/>
         </p:spPr>
+        <p:txBody>
+          <a:bodyPr/>
+          <a:lstStyle/>
+          <a:p>
+            <a:endParaRPr lang="zh-CN" altLang="en-US"/>
+          </a:p>
+        </p:txBody>
       </p:sp>
       <p:sp>
         <p:nvSpPr>
@@ -3120,6 +3178,13 @@
           </a:solidFill>
           <a:ln/>
         </p:spPr>
+        <p:txBody>
+          <a:bodyPr/>
+          <a:lstStyle/>
+          <a:p>
+            <a:endParaRPr lang="zh-CN" altLang="en-US"/>
+          </a:p>
+        </p:txBody>
       </p:sp>
       <p:sp>
         <p:nvSpPr>
@@ -3227,6 +3292,13 @@
           </a:solidFill>
           <a:ln/>
         </p:spPr>
+        <p:txBody>
+          <a:bodyPr/>
+          <a:lstStyle/>
+          <a:p>
+            <a:endParaRPr lang="zh-CN" altLang="en-US"/>
+          </a:p>
+        </p:txBody>
       </p:sp>
       <p:sp>
         <p:nvSpPr>
@@ -3334,6 +3406,13 @@
           </a:solidFill>
           <a:ln/>
         </p:spPr>
+        <p:txBody>
+          <a:bodyPr/>
+          <a:lstStyle/>
+          <a:p>
+            <a:endParaRPr lang="zh-CN" altLang="en-US"/>
+          </a:p>
+        </p:txBody>
       </p:sp>
       <p:sp>
         <p:nvSpPr>
@@ -3441,13 +3520,20 @@
           </a:solidFill>
           <a:ln/>
           <a:effectLst>
-            <a:outerShdw sx="100000" sy="100000" kx="0" ky="0" algn="bl" rotWithShape="0" blurRad="27255" dist="9085" dir="5400000">
+            <a:outerShdw blurRad="27255" dist="9085" dir="5400000" algn="bl" rotWithShape="0">
               <a:srgbClr val="000000">
                 <a:alpha val="10196"/>
               </a:srgbClr>
             </a:outerShdw>
           </a:effectLst>
         </p:spPr>
+        <p:txBody>
+          <a:bodyPr/>
+          <a:lstStyle/>
+          <a:p>
+            <a:endParaRPr lang="zh-CN" altLang="en-US"/>
+          </a:p>
+        </p:txBody>
       </p:sp>
       <p:sp>
         <p:nvSpPr>
@@ -3502,6 +3588,13 @@
           </a:solidFill>
           <a:ln/>
         </p:spPr>
+        <p:txBody>
+          <a:bodyPr/>
+          <a:lstStyle/>
+          <a:p>
+            <a:endParaRPr lang="zh-CN" altLang="en-US"/>
+          </a:p>
+        </p:txBody>
       </p:sp>
       <p:sp>
         <p:nvSpPr>
@@ -3599,6 +3692,13 @@
           </a:solidFill>
           <a:ln/>
         </p:spPr>
+        <p:txBody>
+          <a:bodyPr/>
+          <a:lstStyle/>
+          <a:p>
+            <a:endParaRPr lang="zh-CN" altLang="en-US"/>
+          </a:p>
+        </p:txBody>
       </p:sp>
       <p:sp>
         <p:nvSpPr>
@@ -3704,6 +3804,13 @@
           </a:solidFill>
           <a:ln/>
         </p:spPr>
+        <p:txBody>
+          <a:bodyPr/>
+          <a:lstStyle/>
+          <a:p>
+            <a:endParaRPr lang="zh-CN" altLang="en-US"/>
+          </a:p>
+        </p:txBody>
       </p:sp>
       <p:sp>
         <p:nvSpPr>
@@ -3811,6 +3918,13 @@
           </a:solidFill>
           <a:ln/>
         </p:spPr>
+        <p:txBody>
+          <a:bodyPr/>
+          <a:lstStyle/>
+          <a:p>
+            <a:endParaRPr lang="zh-CN" altLang="en-US"/>
+          </a:p>
+        </p:txBody>
       </p:sp>
       <p:sp>
         <p:nvSpPr>
@@ -3918,6 +4032,13 @@
           </a:solidFill>
           <a:ln/>
         </p:spPr>
+        <p:txBody>
+          <a:bodyPr/>
+          <a:lstStyle/>
+          <a:p>
+            <a:endParaRPr lang="zh-CN" altLang="en-US"/>
+          </a:p>
+        </p:txBody>
       </p:sp>
       <p:sp>
         <p:nvSpPr>
@@ -4027,6 +4148,13 @@
           </a:solidFill>
           <a:ln/>
         </p:spPr>
+        <p:txBody>
+          <a:bodyPr/>
+          <a:lstStyle/>
+          <a:p>
+            <a:endParaRPr lang="zh-CN" altLang="en-US"/>
+          </a:p>
+        </p:txBody>
       </p:sp>
       <p:sp>
         <p:nvSpPr>
@@ -4132,13 +4260,20 @@
           </a:solidFill>
           <a:ln/>
           <a:effectLst>
-            <a:outerShdw sx="100000" sy="100000" kx="0" ky="0" algn="bl" rotWithShape="0" blurRad="27255" dist="9085" dir="5400000">
+            <a:outerShdw blurRad="27255" dist="9085" dir="5400000" algn="bl" rotWithShape="0">
               <a:srgbClr val="000000">
                 <a:alpha val="10196"/>
               </a:srgbClr>
             </a:outerShdw>
           </a:effectLst>
         </p:spPr>
+        <p:txBody>
+          <a:bodyPr/>
+          <a:lstStyle/>
+          <a:p>
+            <a:endParaRPr lang="zh-CN" altLang="en-US"/>
+          </a:p>
+        </p:txBody>
       </p:sp>
       <p:sp>
         <p:nvSpPr>
@@ -4205,6 +4340,13 @@
           </a:solidFill>
           <a:ln/>
         </p:spPr>
+        <p:txBody>
+          <a:bodyPr/>
+          <a:lstStyle/>
+          <a:p>
+            <a:endParaRPr lang="zh-CN" altLang="en-US"/>
+          </a:p>
+        </p:txBody>
       </p:sp>
       <p:sp>
         <p:nvSpPr>
@@ -4353,6 +4495,13 @@
           </a:solidFill>
           <a:ln/>
         </p:spPr>
+        <p:txBody>
+          <a:bodyPr/>
+          <a:lstStyle/>
+          <a:p>
+            <a:endParaRPr lang="zh-CN" altLang="en-US"/>
+          </a:p>
+        </p:txBody>
       </p:sp>
       <p:sp>
         <p:nvSpPr>
@@ -4481,6 +4630,13 @@
           </a:solidFill>
           <a:ln/>
         </p:spPr>
+        <p:txBody>
+          <a:bodyPr/>
+          <a:lstStyle/>
+          <a:p>
+            <a:endParaRPr lang="zh-CN" altLang="en-US"/>
+          </a:p>
+        </p:txBody>
       </p:sp>
       <p:sp>
         <p:nvSpPr>
@@ -4609,6 +4765,13 @@
           </a:solidFill>
           <a:ln/>
         </p:spPr>
+        <p:txBody>
+          <a:bodyPr/>
+          <a:lstStyle/>
+          <a:p>
+            <a:endParaRPr lang="zh-CN" altLang="en-US"/>
+          </a:p>
+        </p:txBody>
       </p:sp>
       <p:sp>
         <p:nvSpPr>
@@ -4737,6 +4900,13 @@
           </a:solidFill>
           <a:ln/>
         </p:spPr>
+        <p:txBody>
+          <a:bodyPr/>
+          <a:lstStyle/>
+          <a:p>
+            <a:endParaRPr lang="zh-CN" altLang="en-US"/>
+          </a:p>
+        </p:txBody>
       </p:sp>
       <p:sp>
         <p:nvSpPr>
@@ -5008,6 +5178,13 @@
           </a:solidFill>
           <a:ln/>
         </p:spPr>
+        <p:txBody>
+          <a:bodyPr/>
+          <a:lstStyle/>
+          <a:p>
+            <a:endParaRPr lang="zh-CN" altLang="en-US"/>
+          </a:p>
+        </p:txBody>
       </p:sp>
       <p:sp>
         <p:nvSpPr>
@@ -5062,6 +5239,13 @@
           </a:solidFill>
           <a:ln/>
         </p:spPr>
+        <p:txBody>
+          <a:bodyPr/>
+          <a:lstStyle/>
+          <a:p>
+            <a:endParaRPr lang="zh-CN" altLang="en-US"/>
+          </a:p>
+        </p:txBody>
       </p:sp>
       <p:sp>
         <p:nvSpPr>
@@ -5187,6 +5371,13 @@
           </a:solidFill>
           <a:ln/>
         </p:spPr>
+        <p:txBody>
+          <a:bodyPr/>
+          <a:lstStyle/>
+          <a:p>
+            <a:endParaRPr lang="zh-CN" altLang="en-US"/>
+          </a:p>
+        </p:txBody>
       </p:sp>
       <p:sp>
         <p:nvSpPr>
@@ -5268,11 +5459,6 @@
               </a:rPr>
               <a:t>EDA suggested that </a:t>
             </a:r>
-            <a:pPr>
-              <a:lnSpc>
-                <a:spcPct val="140000"/>
-              </a:lnSpc>
-            </a:pPr>
             <a:r>
               <a:rPr lang="en-US" sz="1145" b="1" dirty="0">
                 <a:solidFill>
@@ -5286,11 +5472,6 @@
               </a:rPr>
               <a:t>some behavioural factors may relate to productivity</a:t>
             </a:r>
-            <a:pPr>
-              <a:lnSpc>
-                <a:spcPct val="140000"/>
-              </a:lnSpc>
-            </a:pPr>
             <a:r>
               <a:rPr lang="en-US" sz="1145" dirty="0">
                 <a:solidFill>
@@ -5304,11 +5485,6 @@
               </a:rPr>
               <a:t>, but the relationships were </a:t>
             </a:r>
-            <a:pPr>
-              <a:lnSpc>
-                <a:spcPct val="140000"/>
-              </a:lnSpc>
-            </a:pPr>
             <a:r>
               <a:rPr lang="en-US" sz="1145" b="1" dirty="0">
                 <a:solidFill>
@@ -5322,11 +5498,6 @@
               </a:rPr>
               <a:t>not simple or strong enough</a:t>
             </a:r>
-            <a:pPr>
-              <a:lnSpc>
-                <a:spcPct val="140000"/>
-              </a:lnSpc>
-            </a:pPr>
             <a:r>
               <a:rPr lang="en-US" sz="1145" dirty="0">
                 <a:solidFill>
@@ -5351,7 +5522,6 @@
   </p:clrMapOvr>
   <p:transition>
     <p:fade/>
-    <p:spd val="med"/>
   </p:transition>
 </p:sld>
 </file>
@@ -5364,6 +5534,7 @@
         <a:solidFill>
           <a:srgbClr val="F7F5F3"/>
         </a:solidFill>
+        <a:effectLst/>
       </p:bgPr>
     </p:bg>
     <p:spTree>
@@ -5443,6 +5614,13 @@
           </a:solidFill>
           <a:ln/>
         </p:spPr>
+        <p:txBody>
+          <a:bodyPr/>
+          <a:lstStyle/>
+          <a:p>
+            <a:endParaRPr lang="zh-CN" altLang="en-US"/>
+          </a:p>
+        </p:txBody>
       </p:sp>
       <p:sp>
         <p:nvSpPr>
@@ -5589,13 +5767,20 @@
           </a:solidFill>
           <a:ln/>
           <a:effectLst>
-            <a:outerShdw sx="100000" sy="100000" kx="0" ky="0" algn="bl" rotWithShape="0" blurRad="23813" dist="7938" dir="5400000">
+            <a:outerShdw blurRad="23813" dist="7938" dir="5400000" algn="bl" rotWithShape="0">
               <a:srgbClr val="000000">
                 <a:alpha val="10196"/>
               </a:srgbClr>
             </a:outerShdw>
           </a:effectLst>
         </p:spPr>
+        <p:txBody>
+          <a:bodyPr/>
+          <a:lstStyle/>
+          <a:p>
+            <a:endParaRPr lang="zh-CN" altLang="en-US"/>
+          </a:p>
+        </p:txBody>
       </p:sp>
       <p:sp>
         <p:nvSpPr>
@@ -5703,6 +5888,13 @@
           </a:solidFill>
           <a:ln/>
         </p:spPr>
+        <p:txBody>
+          <a:bodyPr/>
+          <a:lstStyle/>
+          <a:p>
+            <a:endParaRPr lang="zh-CN" altLang="en-US"/>
+          </a:p>
+        </p:txBody>
       </p:sp>
       <p:sp>
         <p:nvSpPr>
@@ -5902,6 +6094,13 @@
           </a:solidFill>
           <a:ln/>
         </p:spPr>
+        <p:txBody>
+          <a:bodyPr/>
+          <a:lstStyle/>
+          <a:p>
+            <a:endParaRPr lang="zh-CN" altLang="en-US"/>
+          </a:p>
+        </p:txBody>
       </p:sp>
       <p:sp>
         <p:nvSpPr>
@@ -6091,13 +6290,20 @@
           </a:solidFill>
           <a:ln/>
           <a:effectLst>
-            <a:outerShdw sx="100000" sy="100000" kx="0" ky="0" algn="bl" rotWithShape="0" blurRad="23813" dist="7938" dir="5400000">
+            <a:outerShdw blurRad="23813" dist="7938" dir="5400000" algn="bl" rotWithShape="0">
               <a:srgbClr val="000000">
                 <a:alpha val="10196"/>
               </a:srgbClr>
             </a:outerShdw>
           </a:effectLst>
         </p:spPr>
+        <p:txBody>
+          <a:bodyPr/>
+          <a:lstStyle/>
+          <a:p>
+            <a:endParaRPr lang="zh-CN" altLang="en-US"/>
+          </a:p>
+        </p:txBody>
       </p:sp>
       <p:sp>
         <p:nvSpPr>
@@ -6152,6 +6358,13 @@
           </a:solidFill>
           <a:ln/>
         </p:spPr>
+        <p:txBody>
+          <a:bodyPr/>
+          <a:lstStyle/>
+          <a:p>
+            <a:endParaRPr lang="zh-CN" altLang="en-US"/>
+          </a:p>
+        </p:txBody>
       </p:sp>
       <p:sp>
         <p:nvSpPr>
@@ -6297,6 +6510,13 @@
           </a:solidFill>
           <a:ln/>
         </p:spPr>
+        <p:txBody>
+          <a:bodyPr/>
+          <a:lstStyle/>
+          <a:p>
+            <a:endParaRPr lang="zh-CN" altLang="en-US"/>
+          </a:p>
+        </p:txBody>
       </p:sp>
       <p:sp>
         <p:nvSpPr>
@@ -6402,6 +6622,13 @@
           </a:solidFill>
           <a:ln/>
         </p:spPr>
+        <p:txBody>
+          <a:bodyPr/>
+          <a:lstStyle/>
+          <a:p>
+            <a:endParaRPr lang="zh-CN" altLang="en-US"/>
+          </a:p>
+        </p:txBody>
       </p:sp>
       <p:sp>
         <p:nvSpPr>
@@ -6442,11 +6669,6 @@
               </a:rPr>
               <a:t>Some variables showed </a:t>
             </a:r>
-            <a:pPr>
-              <a:lnSpc>
-                <a:spcPct val="140000"/>
-              </a:lnSpc>
-            </a:pPr>
             <a:r>
               <a:rPr lang="en-US" sz="1000" b="1" dirty="0">
                 <a:solidFill>
@@ -6460,11 +6682,6 @@
               </a:rPr>
               <a:t>weak to moderate relationships</a:t>
             </a:r>
-            <a:pPr>
-              <a:lnSpc>
-                <a:spcPct val="140000"/>
-              </a:lnSpc>
-            </a:pPr>
             <a:r>
               <a:rPr lang="en-US" sz="1000" dirty="0">
                 <a:solidFill>
@@ -6545,6 +6762,13 @@
           </a:solidFill>
           <a:ln/>
         </p:spPr>
+        <p:txBody>
+          <a:bodyPr/>
+          <a:lstStyle/>
+          <a:p>
+            <a:endParaRPr lang="zh-CN" altLang="en-US"/>
+          </a:p>
+        </p:txBody>
       </p:sp>
       <p:sp>
         <p:nvSpPr>
@@ -6585,11 +6809,6 @@
               </a:rPr>
               <a:t>Some predictors were also </a:t>
             </a:r>
-            <a:pPr>
-              <a:lnSpc>
-                <a:spcPct val="140000"/>
-              </a:lnSpc>
-            </a:pPr>
             <a:r>
               <a:rPr lang="en-US" sz="1000" b="1" dirty="0">
                 <a:solidFill>
@@ -6670,6 +6889,13 @@
           </a:solidFill>
           <a:ln/>
         </p:spPr>
+        <p:txBody>
+          <a:bodyPr/>
+          <a:lstStyle/>
+          <a:p>
+            <a:endParaRPr lang="zh-CN" altLang="en-US"/>
+          </a:p>
+        </p:txBody>
       </p:sp>
       <p:sp>
         <p:nvSpPr>
@@ -6710,11 +6936,6 @@
               </a:rPr>
               <a:t>Apparent trends in plots did </a:t>
             </a:r>
-            <a:pPr>
-              <a:lnSpc>
-                <a:spcPct val="140000"/>
-              </a:lnSpc>
-            </a:pPr>
             <a:r>
               <a:rPr lang="en-US" sz="1000" b="1" dirty="0">
                 <a:solidFill>
@@ -6795,13 +7016,20 @@
           </a:solidFill>
           <a:ln/>
           <a:effectLst>
-            <a:outerShdw sx="100000" sy="100000" kx="0" ky="0" algn="bl" rotWithShape="0" blurRad="23813" dist="7938" dir="5400000">
+            <a:outerShdw blurRad="23813" dist="7938" dir="5400000" algn="bl" rotWithShape="0">
               <a:srgbClr val="000000">
                 <a:alpha val="10196"/>
               </a:srgbClr>
             </a:outerShdw>
           </a:effectLst>
         </p:spPr>
+        <p:txBody>
+          <a:bodyPr/>
+          <a:lstStyle/>
+          <a:p>
+            <a:endParaRPr lang="zh-CN" altLang="en-US"/>
+          </a:p>
+        </p:txBody>
       </p:sp>
       <p:sp>
         <p:nvSpPr>
@@ -6856,6 +7084,13 @@
           </a:solidFill>
           <a:ln/>
         </p:spPr>
+        <p:txBody>
+          <a:bodyPr/>
+          <a:lstStyle/>
+          <a:p>
+            <a:endParaRPr lang="zh-CN" altLang="en-US"/>
+          </a:p>
+        </p:txBody>
       </p:sp>
       <p:sp>
         <p:nvSpPr>
@@ -6991,6 +7226,13 @@
           </a:solidFill>
           <a:ln/>
         </p:spPr>
+        <p:txBody>
+          <a:bodyPr/>
+          <a:lstStyle/>
+          <a:p>
+            <a:endParaRPr lang="zh-CN" altLang="en-US"/>
+          </a:p>
+        </p:txBody>
       </p:sp>
       <p:sp>
         <p:nvSpPr>
@@ -7096,6 +7338,13 @@
           </a:solidFill>
           <a:ln/>
         </p:spPr>
+        <p:txBody>
+          <a:bodyPr/>
+          <a:lstStyle/>
+          <a:p>
+            <a:endParaRPr lang="zh-CN" altLang="en-US"/>
+          </a:p>
+        </p:txBody>
       </p:sp>
       <p:sp>
         <p:nvSpPr>
@@ -7203,6 +7452,13 @@
           </a:solidFill>
           <a:ln/>
         </p:spPr>
+        <p:txBody>
+          <a:bodyPr/>
+          <a:lstStyle/>
+          <a:p>
+            <a:endParaRPr lang="zh-CN" altLang="en-US"/>
+          </a:p>
+        </p:txBody>
       </p:sp>
       <p:sp>
         <p:nvSpPr>
@@ -7243,11 +7499,6 @@
               </a:rPr>
               <a:t>Correlation plots showed trends, but </a:t>
             </a:r>
-            <a:pPr>
-              <a:lnSpc>
-                <a:spcPct val="140000"/>
-              </a:lnSpc>
-            </a:pPr>
             <a:r>
               <a:rPr lang="en-US" sz="1000" b="1" dirty="0">
                 <a:solidFill>
@@ -7328,6 +7579,13 @@
           </a:solidFill>
           <a:ln/>
         </p:spPr>
+        <p:txBody>
+          <a:bodyPr/>
+          <a:lstStyle/>
+          <a:p>
+            <a:endParaRPr lang="zh-CN" altLang="en-US"/>
+          </a:p>
+        </p:txBody>
       </p:sp>
       <p:sp>
         <p:nvSpPr>
@@ -7368,11 +7626,6 @@
               </a:rPr>
               <a:t>Some variables looked useful visually, but </a:t>
             </a:r>
-            <a:pPr>
-              <a:lnSpc>
-                <a:spcPct val="140000"/>
-              </a:lnSpc>
-            </a:pPr>
             <a:r>
               <a:rPr lang="en-US" sz="1000" b="1" dirty="0">
                 <a:solidFill>
@@ -7455,6 +7708,13 @@
           </a:solidFill>
           <a:ln/>
         </p:spPr>
+        <p:txBody>
+          <a:bodyPr/>
+          <a:lstStyle/>
+          <a:p>
+            <a:endParaRPr lang="zh-CN" altLang="en-US"/>
+          </a:p>
+        </p:txBody>
       </p:sp>
       <p:sp>
         <p:nvSpPr>
@@ -7509,6 +7769,13 @@
           </a:solidFill>
           <a:ln/>
         </p:spPr>
+        <p:txBody>
+          <a:bodyPr/>
+          <a:lstStyle/>
+          <a:p>
+            <a:endParaRPr lang="zh-CN" altLang="en-US"/>
+          </a:p>
+        </p:txBody>
       </p:sp>
       <p:sp>
         <p:nvSpPr>
@@ -7657,6 +7924,13 @@
           </a:solidFill>
           <a:ln/>
         </p:spPr>
+        <p:txBody>
+          <a:bodyPr/>
+          <a:lstStyle/>
+          <a:p>
+            <a:endParaRPr lang="zh-CN" altLang="en-US"/>
+          </a:p>
+        </p:txBody>
       </p:sp>
       <p:sp>
         <p:nvSpPr>
@@ -7738,11 +8012,6 @@
               </a:rPr>
               <a:t>Move from visual patterns to </a:t>
             </a:r>
-            <a:pPr>
-              <a:lnSpc>
-                <a:spcPct val="140000"/>
-              </a:lnSpc>
-            </a:pPr>
             <a:r>
               <a:rPr lang="en-US" sz="1000" b="1" dirty="0">
                 <a:solidFill>
@@ -7756,11 +8025,6 @@
               </a:rPr>
               <a:t>predictive modelling</a:t>
             </a:r>
-            <a:pPr>
-              <a:lnSpc>
-                <a:spcPct val="140000"/>
-              </a:lnSpc>
-            </a:pPr>
             <a:r>
               <a:rPr lang="en-US" sz="1000" dirty="0">
                 <a:solidFill>
@@ -7774,11 +8038,6 @@
               </a:rPr>
               <a:t> to test whether one factor alone is enough, or whether productivity is </a:t>
             </a:r>
-            <a:pPr>
-              <a:lnSpc>
-                <a:spcPct val="140000"/>
-              </a:lnSpc>
-            </a:pPr>
             <a:r>
               <a:rPr lang="en-US" sz="1000" b="1" dirty="0">
                 <a:solidFill>
@@ -7792,11 +8051,6 @@
               </a:rPr>
               <a:t>multi-factorial</a:t>
             </a:r>
-            <a:pPr>
-              <a:lnSpc>
-                <a:spcPct val="140000"/>
-              </a:lnSpc>
-            </a:pPr>
             <a:r>
               <a:rPr lang="en-US" sz="1000" dirty="0">
                 <a:solidFill>
@@ -7879,6 +8133,13 @@
           </a:solidFill>
           <a:ln/>
         </p:spPr>
+        <p:txBody>
+          <a:bodyPr/>
+          <a:lstStyle/>
+          <a:p>
+            <a:endParaRPr lang="zh-CN" altLang="en-US"/>
+          </a:p>
+        </p:txBody>
       </p:sp>
       <p:sp>
         <p:nvSpPr>
@@ -7933,6 +8194,13 @@
           </a:solidFill>
           <a:ln/>
         </p:spPr>
+        <p:txBody>
+          <a:bodyPr/>
+          <a:lstStyle/>
+          <a:p>
+            <a:endParaRPr lang="zh-CN" altLang="en-US"/>
+          </a:p>
+        </p:txBody>
       </p:sp>
       <p:sp>
         <p:nvSpPr>
@@ -8018,6 +8286,13 @@
           </a:solidFill>
           <a:ln/>
         </p:spPr>
+        <p:txBody>
+          <a:bodyPr/>
+          <a:lstStyle/>
+          <a:p>
+            <a:endParaRPr lang="zh-CN" altLang="en-US"/>
+          </a:p>
+        </p:txBody>
       </p:sp>
       <p:sp>
         <p:nvSpPr>
@@ -8056,11 +8331,6 @@
               </a:rPr>
               <a:t>Core Insight:</a:t>
             </a:r>
-            <a:pPr>
-              <a:lnSpc>
-                <a:spcPct val="140000"/>
-              </a:lnSpc>
-            </a:pPr>
             <a:r>
               <a:rPr lang="en-US" sz="1000" dirty="0">
                 <a:solidFill>
@@ -8072,11 +8342,6 @@
               </a:rPr>
               <a:t> This led us to test productivity in </a:t>
             </a:r>
-            <a:pPr>
-              <a:lnSpc>
-                <a:spcPct val="140000"/>
-              </a:lnSpc>
-            </a:pPr>
             <a:r>
               <a:rPr lang="en-US" sz="1000" b="1" dirty="0">
                 <a:solidFill>
@@ -8088,11 +8353,6 @@
               </a:rPr>
               <a:t>two ways</a:t>
             </a:r>
-            <a:pPr>
-              <a:lnSpc>
-                <a:spcPct val="140000"/>
-              </a:lnSpc>
-            </a:pPr>
             <a:r>
               <a:rPr lang="en-US" sz="1000" dirty="0">
                 <a:solidFill>
@@ -8115,7 +8375,6 @@
   </p:clrMapOvr>
   <p:transition>
     <p:fade/>
-    <p:spd val="med"/>
   </p:transition>
 </p:sld>
 </file>
@@ -8128,6 +8387,7 @@
         <a:solidFill>
           <a:srgbClr val="F7F5F3"/>
         </a:solidFill>
+        <a:effectLst/>
       </p:bgPr>
     </p:bg>
     <p:spTree>
@@ -8207,6 +8467,13 @@
           </a:solidFill>
           <a:ln/>
         </p:spPr>
+        <p:txBody>
+          <a:bodyPr/>
+          <a:lstStyle/>
+          <a:p>
+            <a:endParaRPr lang="zh-CN" altLang="en-US"/>
+          </a:p>
+        </p:txBody>
       </p:sp>
       <p:sp>
         <p:nvSpPr>
@@ -8353,13 +8620,20 @@
           </a:solidFill>
           <a:ln/>
           <a:effectLst>
-            <a:outerShdw sx="100000" sy="100000" kx="0" ky="0" algn="bl" rotWithShape="0" blurRad="24287" dist="8096" dir="5400000">
+            <a:outerShdw blurRad="24287" dist="8096" dir="5400000" algn="bl" rotWithShape="0">
               <a:srgbClr val="000000">
                 <a:alpha val="10196"/>
               </a:srgbClr>
             </a:outerShdw>
           </a:effectLst>
         </p:spPr>
+        <p:txBody>
+          <a:bodyPr/>
+          <a:lstStyle/>
+          <a:p>
+            <a:endParaRPr lang="zh-CN" altLang="en-US"/>
+          </a:p>
+        </p:txBody>
       </p:sp>
       <p:sp>
         <p:nvSpPr>
@@ -8414,6 +8688,13 @@
           </a:solidFill>
           <a:ln/>
         </p:spPr>
+        <p:txBody>
+          <a:bodyPr/>
+          <a:lstStyle/>
+          <a:p>
+            <a:endParaRPr lang="zh-CN" altLang="en-US"/>
+          </a:p>
+        </p:txBody>
       </p:sp>
       <p:sp>
         <p:nvSpPr>
@@ -8540,6 +8821,13 @@
           </a:solidFill>
           <a:ln/>
         </p:spPr>
+        <p:txBody>
+          <a:bodyPr/>
+          <a:lstStyle/>
+          <a:p>
+            <a:endParaRPr lang="zh-CN" altLang="en-US"/>
+          </a:p>
+        </p:txBody>
       </p:sp>
       <p:sp>
         <p:nvSpPr>
@@ -8645,6 +8933,13 @@
           </a:solidFill>
           <a:ln/>
         </p:spPr>
+        <p:txBody>
+          <a:bodyPr/>
+          <a:lstStyle/>
+          <a:p>
+            <a:endParaRPr lang="zh-CN" altLang="en-US"/>
+          </a:p>
+        </p:txBody>
       </p:sp>
       <p:sp>
         <p:nvSpPr>
@@ -8685,11 +8980,6 @@
               </a:rPr>
               <a:t>Gives a </a:t>
             </a:r>
-            <a:pPr>
-              <a:lnSpc>
-                <a:spcPct val="140000"/>
-              </a:lnSpc>
-            </a:pPr>
             <a:r>
               <a:rPr lang="en-US" sz="1020" b="1" dirty="0">
                 <a:solidFill>
@@ -8703,11 +8993,6 @@
               </a:rPr>
               <a:t>simple baseline</a:t>
             </a:r>
-            <a:pPr>
-              <a:lnSpc>
-                <a:spcPct val="140000"/>
-              </a:lnSpc>
-            </a:pPr>
             <a:r>
               <a:rPr lang="en-US" sz="1020" dirty="0">
                 <a:solidFill>
@@ -8788,6 +9073,13 @@
           </a:solidFill>
           <a:ln/>
         </p:spPr>
+        <p:txBody>
+          <a:bodyPr/>
+          <a:lstStyle/>
+          <a:p>
+            <a:endParaRPr lang="zh-CN" altLang="en-US"/>
+          </a:p>
+        </p:txBody>
       </p:sp>
       <p:sp>
         <p:nvSpPr>
@@ -8828,11 +9120,6 @@
               </a:rPr>
               <a:t>Helps us understand </a:t>
             </a:r>
-            <a:pPr>
-              <a:lnSpc>
-                <a:spcPct val="140000"/>
-              </a:lnSpc>
-            </a:pPr>
             <a:r>
               <a:rPr lang="en-US" sz="1020" b="1" dirty="0">
                 <a:solidFill>
@@ -8913,6 +9200,13 @@
           </a:solidFill>
           <a:ln/>
         </p:spPr>
+        <p:txBody>
+          <a:bodyPr/>
+          <a:lstStyle/>
+          <a:p>
+            <a:endParaRPr lang="zh-CN" altLang="en-US"/>
+          </a:p>
+        </p:txBody>
       </p:sp>
       <p:sp>
         <p:nvSpPr>
@@ -8953,11 +9247,6 @@
               </a:rPr>
               <a:t>Tests whether </a:t>
             </a:r>
-            <a:pPr>
-              <a:lnSpc>
-                <a:spcPct val="140000"/>
-              </a:lnSpc>
-            </a:pPr>
             <a:r>
               <a:rPr lang="en-US" sz="1020" b="1" dirty="0">
                 <a:solidFill>
@@ -8971,11 +9260,6 @@
               </a:rPr>
               <a:t>one behaviour alone</a:t>
             </a:r>
-            <a:pPr>
-              <a:lnSpc>
-                <a:spcPct val="140000"/>
-              </a:lnSpc>
-            </a:pPr>
             <a:r>
               <a:rPr lang="en-US" sz="1020" dirty="0">
                 <a:solidFill>
@@ -9056,13 +9340,20 @@
           </a:solidFill>
           <a:ln/>
           <a:effectLst>
-            <a:outerShdw sx="100000" sy="100000" kx="0" ky="0" algn="bl" rotWithShape="0" blurRad="24287" dist="8096" dir="5400000">
+            <a:outerShdw blurRad="24287" dist="8096" dir="5400000" algn="bl" rotWithShape="0">
               <a:srgbClr val="000000">
                 <a:alpha val="10196"/>
               </a:srgbClr>
             </a:outerShdw>
           </a:effectLst>
         </p:spPr>
+        <p:txBody>
+          <a:bodyPr/>
+          <a:lstStyle/>
+          <a:p>
+            <a:endParaRPr lang="zh-CN" altLang="en-US"/>
+          </a:p>
+        </p:txBody>
       </p:sp>
       <p:sp>
         <p:nvSpPr>
@@ -9117,6 +9408,13 @@
           </a:solidFill>
           <a:ln/>
         </p:spPr>
+        <p:txBody>
+          <a:bodyPr/>
+          <a:lstStyle/>
+          <a:p>
+            <a:endParaRPr lang="zh-CN" altLang="en-US"/>
+          </a:p>
+        </p:txBody>
       </p:sp>
       <p:sp>
         <p:nvSpPr>
@@ -9295,6 +9593,13 @@
           </a:solidFill>
           <a:ln/>
         </p:spPr>
+        <p:txBody>
+          <a:bodyPr/>
+          <a:lstStyle/>
+          <a:p>
+            <a:endParaRPr lang="zh-CN" altLang="en-US"/>
+          </a:p>
+        </p:txBody>
       </p:sp>
       <p:sp>
         <p:nvSpPr>
@@ -9400,6 +9705,13 @@
           </a:solidFill>
           <a:ln/>
         </p:spPr>
+        <p:txBody>
+          <a:bodyPr/>
+          <a:lstStyle/>
+          <a:p>
+            <a:endParaRPr lang="zh-CN" altLang="en-US"/>
+          </a:p>
+        </p:txBody>
       </p:sp>
       <p:sp>
         <p:nvSpPr>
@@ -9440,11 +9752,6 @@
               </a:rPr>
               <a:t>Productivity is </a:t>
             </a:r>
-            <a:pPr>
-              <a:lnSpc>
-                <a:spcPct val="140000"/>
-              </a:lnSpc>
-            </a:pPr>
             <a:r>
               <a:rPr lang="en-US" sz="1020" b="1" dirty="0">
                 <a:solidFill>
@@ -9525,6 +9832,13 @@
           </a:solidFill>
           <a:ln/>
         </p:spPr>
+        <p:txBody>
+          <a:bodyPr/>
+          <a:lstStyle/>
+          <a:p>
+            <a:endParaRPr lang="zh-CN" altLang="en-US"/>
+          </a:p>
+        </p:txBody>
       </p:sp>
       <p:sp>
         <p:nvSpPr>
@@ -9565,11 +9879,6 @@
               </a:rPr>
               <a:t>Multiple regression gives a </a:t>
             </a:r>
-            <a:pPr>
-              <a:lnSpc>
-                <a:spcPct val="140000"/>
-              </a:lnSpc>
-            </a:pPr>
             <a:r>
               <a:rPr lang="en-US" sz="1020" b="1" dirty="0">
                 <a:solidFill>
@@ -9650,6 +9959,13 @@
           </a:solidFill>
           <a:ln/>
         </p:spPr>
+        <p:txBody>
+          <a:bodyPr/>
+          <a:lstStyle/>
+          <a:p>
+            <a:endParaRPr lang="zh-CN" altLang="en-US"/>
+          </a:p>
+        </p:txBody>
       </p:sp>
       <p:sp>
         <p:nvSpPr>
@@ -9690,11 +10006,6 @@
               </a:rPr>
               <a:t>Allows us to </a:t>
             </a:r>
-            <a:pPr>
-              <a:lnSpc>
-                <a:spcPct val="140000"/>
-              </a:lnSpc>
-            </a:pPr>
             <a:r>
               <a:rPr lang="en-US" sz="1020" b="1" dirty="0">
                 <a:solidFill>
@@ -9708,11 +10019,6 @@
               </a:rPr>
               <a:t>compare variables</a:t>
             </a:r>
-            <a:pPr>
-              <a:lnSpc>
-                <a:spcPct val="140000"/>
-              </a:lnSpc>
-            </a:pPr>
             <a:r>
               <a:rPr lang="en-US" sz="1020" dirty="0">
                 <a:solidFill>
@@ -9793,13 +10099,20 @@
           </a:solidFill>
           <a:ln/>
           <a:effectLst>
-            <a:outerShdw sx="100000" sy="100000" kx="0" ky="0" algn="bl" rotWithShape="0" blurRad="24287" dist="8096" dir="5400000">
+            <a:outerShdw blurRad="24287" dist="8096" dir="5400000" algn="bl" rotWithShape="0">
               <a:srgbClr val="000000">
                 <a:alpha val="10196"/>
               </a:srgbClr>
             </a:outerShdw>
           </a:effectLst>
         </p:spPr>
+        <p:txBody>
+          <a:bodyPr/>
+          <a:lstStyle/>
+          <a:p>
+            <a:endParaRPr lang="zh-CN" altLang="en-US"/>
+          </a:p>
+        </p:txBody>
       </p:sp>
       <p:sp>
         <p:nvSpPr>
@@ -9854,6 +10167,13 @@
           </a:solidFill>
           <a:ln/>
         </p:spPr>
+        <p:txBody>
+          <a:bodyPr/>
+          <a:lstStyle/>
+          <a:p>
+            <a:endParaRPr lang="zh-CN" altLang="en-US"/>
+          </a:p>
+        </p:txBody>
       </p:sp>
       <p:sp>
         <p:nvSpPr>
@@ -9995,6 +10315,13 @@
           </a:solidFill>
           <a:ln/>
         </p:spPr>
+        <p:txBody>
+          <a:bodyPr/>
+          <a:lstStyle/>
+          <a:p>
+            <a:endParaRPr lang="zh-CN" altLang="en-US"/>
+          </a:p>
+        </p:txBody>
       </p:sp>
       <p:sp>
         <p:nvSpPr>
@@ -10100,6 +10427,13 @@
           </a:solidFill>
           <a:ln/>
         </p:spPr>
+        <p:txBody>
+          <a:bodyPr/>
+          <a:lstStyle/>
+          <a:p>
+            <a:endParaRPr lang="zh-CN" altLang="en-US"/>
+          </a:p>
+        </p:txBody>
       </p:sp>
       <p:sp>
         <p:nvSpPr>
@@ -10140,11 +10474,6 @@
               </a:rPr>
               <a:t>Some predictors appeared </a:t>
             </a:r>
-            <a:pPr>
-              <a:lnSpc>
-                <a:spcPct val="140000"/>
-              </a:lnSpc>
-            </a:pPr>
             <a:r>
               <a:rPr lang="en-US" sz="1020" b="1" dirty="0">
                 <a:solidFill>
@@ -10225,6 +10554,13 @@
           </a:solidFill>
           <a:ln/>
         </p:spPr>
+        <p:txBody>
+          <a:bodyPr/>
+          <a:lstStyle/>
+          <a:p>
+            <a:endParaRPr lang="zh-CN" altLang="en-US"/>
+          </a:p>
+        </p:txBody>
       </p:sp>
       <p:sp>
         <p:nvSpPr>
@@ -10265,11 +10601,6 @@
               </a:rPr>
               <a:t>Some became </a:t>
             </a:r>
-            <a:pPr>
-              <a:lnSpc>
-                <a:spcPct val="140000"/>
-              </a:lnSpc>
-            </a:pPr>
             <a:r>
               <a:rPr lang="en-US" sz="1020" b="1" dirty="0">
                 <a:solidFill>
@@ -10350,6 +10681,13 @@
           </a:solidFill>
           <a:ln/>
         </p:spPr>
+        <p:txBody>
+          <a:bodyPr/>
+          <a:lstStyle/>
+          <a:p>
+            <a:endParaRPr lang="zh-CN" altLang="en-US"/>
+          </a:p>
+        </p:txBody>
       </p:sp>
       <p:sp>
         <p:nvSpPr>
@@ -10390,11 +10728,6 @@
               </a:rPr>
               <a:t>This suggests </a:t>
             </a:r>
-            <a:pPr>
-              <a:lnSpc>
-                <a:spcPct val="140000"/>
-              </a:lnSpc>
-            </a:pPr>
             <a:r>
               <a:rPr lang="en-US" sz="1020" b="1" dirty="0">
                 <a:solidFill>
@@ -10408,11 +10741,6 @@
               </a:rPr>
               <a:t>overlapping information</a:t>
             </a:r>
-            <a:pPr>
-              <a:lnSpc>
-                <a:spcPct val="140000"/>
-              </a:lnSpc>
-            </a:pPr>
             <a:r>
               <a:rPr lang="en-US" sz="1020" dirty="0">
                 <a:solidFill>
@@ -10493,13 +10821,20 @@
           </a:solidFill>
           <a:ln/>
           <a:effectLst>
-            <a:outerShdw sx="100000" sy="100000" kx="0" ky="0" algn="bl" rotWithShape="0" blurRad="24287" dist="8096" dir="5400000">
+            <a:outerShdw blurRad="24287" dist="8096" dir="5400000" algn="bl" rotWithShape="0">
               <a:srgbClr val="000000">
                 <a:alpha val="10196"/>
               </a:srgbClr>
             </a:outerShdw>
           </a:effectLst>
         </p:spPr>
+        <p:txBody>
+          <a:bodyPr/>
+          <a:lstStyle/>
+          <a:p>
+            <a:endParaRPr lang="zh-CN" altLang="en-US"/>
+          </a:p>
+        </p:txBody>
       </p:sp>
       <p:sp>
         <p:nvSpPr>
@@ -10607,6 +10942,13 @@
           </a:solidFill>
           <a:ln/>
         </p:spPr>
+        <p:txBody>
+          <a:bodyPr/>
+          <a:lstStyle/>
+          <a:p>
+            <a:endParaRPr lang="zh-CN" altLang="en-US"/>
+          </a:p>
+        </p:txBody>
       </p:sp>
       <p:sp>
         <p:nvSpPr>
@@ -10806,6 +11148,13 @@
           </a:solidFill>
           <a:ln/>
         </p:spPr>
+        <p:txBody>
+          <a:bodyPr/>
+          <a:lstStyle/>
+          <a:p>
+            <a:endParaRPr lang="zh-CN" altLang="en-US"/>
+          </a:p>
+        </p:txBody>
       </p:sp>
       <p:sp>
         <p:nvSpPr>
@@ -10995,13 +11344,20 @@
           </a:solidFill>
           <a:ln/>
           <a:effectLst>
-            <a:outerShdw sx="100000" sy="100000" kx="0" ky="0" algn="bl" rotWithShape="0" blurRad="24287" dist="8096" dir="5400000">
+            <a:outerShdw blurRad="24287" dist="8096" dir="5400000" algn="bl" rotWithShape="0">
               <a:srgbClr val="000000">
                 <a:alpha val="10196"/>
               </a:srgbClr>
             </a:outerShdw>
           </a:effectLst>
         </p:spPr>
+        <p:txBody>
+          <a:bodyPr/>
+          <a:lstStyle/>
+          <a:p>
+            <a:endParaRPr lang="zh-CN" altLang="en-US"/>
+          </a:p>
+        </p:txBody>
       </p:sp>
       <p:sp>
         <p:nvSpPr>
@@ -11109,10 +11465,17 @@
           </a:solidFill>
           <a:ln/>
         </p:spPr>
+        <p:txBody>
+          <a:bodyPr/>
+          <a:lstStyle/>
+          <a:p>
+            <a:endParaRPr lang="zh-CN" altLang="en-US"/>
+          </a:p>
+        </p:txBody>
       </p:sp>
       <p:graphicFrame>
         <p:nvGraphicFramePr>
-          <p:cNvPr id="5" name="Table 0"/>
+          <p:cNvPr id="45" name="Table 0"/>
           <p:cNvGraphicFramePr>
             <a:graphicFrameLocks noGrp="1"/>
           </p:cNvGraphicFramePr>
@@ -11126,16 +11489,34 @@
         </p:nvGraphicFramePr>
         <p:xfrm>
           <a:off x="6483578" y="4209721"/>
-          <a:ext cx="5092143" cy="1497689"/>
+          <a:ext cx="5092143" cy="1497690"/>
         </p:xfrm>
         <a:graphic>
           <a:graphicData uri="http://schemas.openxmlformats.org/drawingml/2006/table">
             <a:tbl>
               <a:tblPr/>
               <a:tblGrid>
-                <a:gridCol w="2112956"/>
-                <a:gridCol w="1716271"/>
-                <a:gridCol w="1262916"/>
+                <a:gridCol w="2112956">
+                  <a:extLst>
+                    <a:ext uri="{9D8B030D-6E8A-4147-A177-3AD203B41FA5}">
+                      <a16:colId xmlns:a16="http://schemas.microsoft.com/office/drawing/2014/main" val="20000"/>
+                    </a:ext>
+                  </a:extLst>
+                </a:gridCol>
+                <a:gridCol w="1716271">
+                  <a:extLst>
+                    <a:ext uri="{9D8B030D-6E8A-4147-A177-3AD203B41FA5}">
+                      <a16:colId xmlns:a16="http://schemas.microsoft.com/office/drawing/2014/main" val="20001"/>
+                    </a:ext>
+                  </a:extLst>
+                </a:gridCol>
+                <a:gridCol w="1262916">
+                  <a:extLst>
+                    <a:ext uri="{9D8B030D-6E8A-4147-A177-3AD203B41FA5}">
+                      <a16:colId xmlns:a16="http://schemas.microsoft.com/office/drawing/2014/main" val="20002"/>
+                    </a:ext>
+                  </a:extLst>
+                </a:gridCol>
               </a:tblGrid>
               <a:tr h="299538">
                 <a:tc>
@@ -11288,6 +11669,11 @@
                     </a:solidFill>
                   </a:tcPr>
                 </a:tc>
+                <a:extLst>
+                  <a:ext uri="{0D108BD9-81ED-4DB2-BD59-A6C34878D82A}">
+                    <a16:rowId xmlns:a16="http://schemas.microsoft.com/office/drawing/2014/main" val="10000"/>
+                  </a:ext>
+                </a:extLst>
               </a:tr>
               <a:tr h="299538">
                 <a:tc>
@@ -11320,8 +11706,14 @@
                     <a:lnR w="0" cap="flat" cmpd="sng" algn="ctr">
                       <a:noFill/>
                     </a:lnR>
-                    <a:lnT w="0" cap="flat" cmpd="sng" algn="ctr">
-                      <a:noFill/>
+                    <a:lnT w="25400" cap="flat" cmpd="sng" algn="ctr">
+                      <a:solidFill>
+                        <a:srgbClr val="9B8E7D"/>
+                      </a:solidFill>
+                      <a:prstDash val="solid"/>
+                      <a:round/>
+                      <a:headEnd type="none" w="med" len="med"/>
+                      <a:tailEnd type="none" w="med" len="med"/>
                     </a:lnT>
                     <a:lnB w="12700" cap="flat" cmpd="sng" algn="ctr">
                       <a:solidFill>
@@ -11370,8 +11762,14 @@
                     <a:lnR w="0" cap="flat" cmpd="sng" algn="ctr">
                       <a:noFill/>
                     </a:lnR>
-                    <a:lnT w="0" cap="flat" cmpd="sng" algn="ctr">
-                      <a:noFill/>
+                    <a:lnT w="25400" cap="flat" cmpd="sng" algn="ctr">
+                      <a:solidFill>
+                        <a:srgbClr val="9B8E7D"/>
+                      </a:solidFill>
+                      <a:prstDash val="solid"/>
+                      <a:round/>
+                      <a:headEnd type="none" w="med" len="med"/>
+                      <a:tailEnd type="none" w="med" len="med"/>
                     </a:lnT>
                     <a:lnB w="12700" cap="flat" cmpd="sng" algn="ctr">
                       <a:solidFill>
@@ -11420,8 +11818,14 @@
                     <a:lnR w="0" cap="flat" cmpd="sng" algn="ctr">
                       <a:noFill/>
                     </a:lnR>
-                    <a:lnT w="0" cap="flat" cmpd="sng" algn="ctr">
-                      <a:noFill/>
+                    <a:lnT w="25400" cap="flat" cmpd="sng" algn="ctr">
+                      <a:solidFill>
+                        <a:srgbClr val="9B8E7D"/>
+                      </a:solidFill>
+                      <a:prstDash val="solid"/>
+                      <a:round/>
+                      <a:headEnd type="none" w="med" len="med"/>
+                      <a:tailEnd type="none" w="med" len="med"/>
                     </a:lnT>
                     <a:lnB w="12700" cap="flat" cmpd="sng" algn="ctr">
                       <a:solidFill>
@@ -11439,6 +11843,11 @@
                     </a:solidFill>
                   </a:tcPr>
                 </a:tc>
+                <a:extLst>
+                  <a:ext uri="{0D108BD9-81ED-4DB2-BD59-A6C34878D82A}">
+                    <a16:rowId xmlns:a16="http://schemas.microsoft.com/office/drawing/2014/main" val="10001"/>
+                  </a:ext>
+                </a:extLst>
               </a:tr>
               <a:tr h="299538">
                 <a:tc>
@@ -11471,8 +11880,14 @@
                     <a:lnR w="0" cap="flat" cmpd="sng" algn="ctr">
                       <a:noFill/>
                     </a:lnR>
-                    <a:lnT w="0" cap="flat" cmpd="sng" algn="ctr">
-                      <a:noFill/>
+                    <a:lnT w="12700" cap="flat" cmpd="sng" algn="ctr">
+                      <a:solidFill>
+                        <a:srgbClr val="000000"/>
+                      </a:solidFill>
+                      <a:prstDash val="solid"/>
+                      <a:round/>
+                      <a:headEnd type="none" w="med" len="med"/>
+                      <a:tailEnd type="none" w="med" len="med"/>
                     </a:lnT>
                     <a:lnB w="12700" cap="flat" cmpd="sng" algn="ctr">
                       <a:solidFill>
@@ -11521,8 +11936,14 @@
                     <a:lnR w="0" cap="flat" cmpd="sng" algn="ctr">
                       <a:noFill/>
                     </a:lnR>
-                    <a:lnT w="0" cap="flat" cmpd="sng" algn="ctr">
-                      <a:noFill/>
+                    <a:lnT w="12700" cap="flat" cmpd="sng" algn="ctr">
+                      <a:solidFill>
+                        <a:srgbClr val="000000"/>
+                      </a:solidFill>
+                      <a:prstDash val="solid"/>
+                      <a:round/>
+                      <a:headEnd type="none" w="med" len="med"/>
+                      <a:tailEnd type="none" w="med" len="med"/>
                     </a:lnT>
                     <a:lnB w="12700" cap="flat" cmpd="sng" algn="ctr">
                       <a:solidFill>
@@ -11571,8 +11992,14 @@
                     <a:lnR w="0" cap="flat" cmpd="sng" algn="ctr">
                       <a:noFill/>
                     </a:lnR>
-                    <a:lnT w="0" cap="flat" cmpd="sng" algn="ctr">
-                      <a:noFill/>
+                    <a:lnT w="12700" cap="flat" cmpd="sng" algn="ctr">
+                      <a:solidFill>
+                        <a:srgbClr val="000000"/>
+                      </a:solidFill>
+                      <a:prstDash val="solid"/>
+                      <a:round/>
+                      <a:headEnd type="none" w="med" len="med"/>
+                      <a:tailEnd type="none" w="med" len="med"/>
                     </a:lnT>
                     <a:lnB w="12700" cap="flat" cmpd="sng" algn="ctr">
                       <a:solidFill>
@@ -11590,6 +12017,11 @@
                     </a:solidFill>
                   </a:tcPr>
                 </a:tc>
+                <a:extLst>
+                  <a:ext uri="{0D108BD9-81ED-4DB2-BD59-A6C34878D82A}">
+                    <a16:rowId xmlns:a16="http://schemas.microsoft.com/office/drawing/2014/main" val="10002"/>
+                  </a:ext>
+                </a:extLst>
               </a:tr>
               <a:tr h="299538">
                 <a:tc>
@@ -11622,8 +12054,14 @@
                     <a:lnR w="0" cap="flat" cmpd="sng" algn="ctr">
                       <a:noFill/>
                     </a:lnR>
-                    <a:lnT w="0" cap="flat" cmpd="sng" algn="ctr">
-                      <a:noFill/>
+                    <a:lnT w="12700" cap="flat" cmpd="sng" algn="ctr">
+                      <a:solidFill>
+                        <a:srgbClr val="000000"/>
+                      </a:solidFill>
+                      <a:prstDash val="solid"/>
+                      <a:round/>
+                      <a:headEnd type="none" w="med" len="med"/>
+                      <a:tailEnd type="none" w="med" len="med"/>
                     </a:lnT>
                     <a:lnB w="12700" cap="flat" cmpd="sng" algn="ctr">
                       <a:solidFill>
@@ -11672,8 +12110,14 @@
                     <a:lnR w="0" cap="flat" cmpd="sng" algn="ctr">
                       <a:noFill/>
                     </a:lnR>
-                    <a:lnT w="0" cap="flat" cmpd="sng" algn="ctr">
-                      <a:noFill/>
+                    <a:lnT w="12700" cap="flat" cmpd="sng" algn="ctr">
+                      <a:solidFill>
+                        <a:srgbClr val="000000"/>
+                      </a:solidFill>
+                      <a:prstDash val="solid"/>
+                      <a:round/>
+                      <a:headEnd type="none" w="med" len="med"/>
+                      <a:tailEnd type="none" w="med" len="med"/>
                     </a:lnT>
                     <a:lnB w="12700" cap="flat" cmpd="sng" algn="ctr">
                       <a:solidFill>
@@ -11722,8 +12166,14 @@
                     <a:lnR w="0" cap="flat" cmpd="sng" algn="ctr">
                       <a:noFill/>
                     </a:lnR>
-                    <a:lnT w="0" cap="flat" cmpd="sng" algn="ctr">
-                      <a:noFill/>
+                    <a:lnT w="12700" cap="flat" cmpd="sng" algn="ctr">
+                      <a:solidFill>
+                        <a:srgbClr val="000000"/>
+                      </a:solidFill>
+                      <a:prstDash val="solid"/>
+                      <a:round/>
+                      <a:headEnd type="none" w="med" len="med"/>
+                      <a:tailEnd type="none" w="med" len="med"/>
                     </a:lnT>
                     <a:lnB w="12700" cap="flat" cmpd="sng" algn="ctr">
                       <a:solidFill>
@@ -11741,6 +12191,11 @@
                     </a:solidFill>
                   </a:tcPr>
                 </a:tc>
+                <a:extLst>
+                  <a:ext uri="{0D108BD9-81ED-4DB2-BD59-A6C34878D82A}">
+                    <a16:rowId xmlns:a16="http://schemas.microsoft.com/office/drawing/2014/main" val="10003"/>
+                  </a:ext>
+                </a:extLst>
               </a:tr>
               <a:tr h="299538">
                 <a:tc>
@@ -11773,8 +12228,14 @@
                     <a:lnR w="0" cap="flat" cmpd="sng" algn="ctr">
                       <a:noFill/>
                     </a:lnR>
-                    <a:lnT w="0" cap="flat" cmpd="sng" algn="ctr">
-                      <a:noFill/>
+                    <a:lnT w="12700" cap="flat" cmpd="sng" algn="ctr">
+                      <a:solidFill>
+                        <a:srgbClr val="000000"/>
+                      </a:solidFill>
+                      <a:prstDash val="solid"/>
+                      <a:round/>
+                      <a:headEnd type="none" w="med" len="med"/>
+                      <a:tailEnd type="none" w="med" len="med"/>
                     </a:lnT>
                     <a:lnB w="0" cap="flat" cmpd="sng" algn="ctr">
                       <a:noFill/>
@@ -11817,8 +12278,14 @@
                     <a:lnR w="0" cap="flat" cmpd="sng" algn="ctr">
                       <a:noFill/>
                     </a:lnR>
-                    <a:lnT w="0" cap="flat" cmpd="sng" algn="ctr">
-                      <a:noFill/>
+                    <a:lnT w="12700" cap="flat" cmpd="sng" algn="ctr">
+                      <a:solidFill>
+                        <a:srgbClr val="000000"/>
+                      </a:solidFill>
+                      <a:prstDash val="solid"/>
+                      <a:round/>
+                      <a:headEnd type="none" w="med" len="med"/>
+                      <a:tailEnd type="none" w="med" len="med"/>
                     </a:lnT>
                     <a:lnB w="0" cap="flat" cmpd="sng" algn="ctr">
                       <a:noFill/>
@@ -11831,8 +12298,20 @@
                   </a:tcPr>
                 </a:tc>
                 <a:tc hMerge="1">
+                  <a:txBody>
+                    <a:bodyPr/>
+                    <a:lstStyle/>
+                    <a:p>
+                      <a:endParaRPr lang="zh-CN"/>
+                    </a:p>
+                  </a:txBody>
                   <a:tcPr/>
                 </a:tc>
+                <a:extLst>
+                  <a:ext uri="{0D108BD9-81ED-4DB2-BD59-A6C34878D82A}">
+                    <a16:rowId xmlns:a16="http://schemas.microsoft.com/office/drawing/2014/main" val="10004"/>
+                  </a:ext>
+                </a:extLst>
               </a:tr>
             </a:tbl>
           </a:graphicData>
@@ -11944,6 +12423,13 @@
           </a:solidFill>
           <a:ln/>
         </p:spPr>
+        <p:txBody>
+          <a:bodyPr/>
+          <a:lstStyle/>
+          <a:p>
+            <a:endParaRPr lang="zh-CN" altLang="en-US"/>
+          </a:p>
+        </p:txBody>
       </p:sp>
       <p:sp>
         <p:nvSpPr>
@@ -11998,6 +12484,13 @@
           </a:solidFill>
           <a:ln/>
         </p:spPr>
+        <p:txBody>
+          <a:bodyPr/>
+          <a:lstStyle/>
+          <a:p>
+            <a:endParaRPr lang="zh-CN" altLang="en-US"/>
+          </a:p>
+        </p:txBody>
       </p:sp>
       <p:sp>
         <p:nvSpPr>
@@ -12110,6 +12603,13 @@
           </a:solidFill>
           <a:ln/>
         </p:spPr>
+        <p:txBody>
+          <a:bodyPr/>
+          <a:lstStyle/>
+          <a:p>
+            <a:endParaRPr lang="zh-CN" altLang="en-US"/>
+          </a:p>
+        </p:txBody>
       </p:sp>
       <p:sp>
         <p:nvSpPr>
@@ -12148,11 +12648,6 @@
               </a:rPr>
               <a:t>Key Takeaway:</a:t>
             </a:r>
-            <a:pPr>
-              <a:lnSpc>
-                <a:spcPct val="140000"/>
-              </a:lnSpc>
-            </a:pPr>
             <a:r>
               <a:rPr lang="en-US" sz="1020" dirty="0">
                 <a:solidFill>
@@ -12164,11 +12659,6 @@
               </a:rPr>
               <a:t> A single factor was </a:t>
             </a:r>
-            <a:pPr>
-              <a:lnSpc>
-                <a:spcPct val="140000"/>
-              </a:lnSpc>
-            </a:pPr>
             <a:r>
               <a:rPr lang="en-US" sz="1020" b="1" dirty="0">
                 <a:solidFill>
@@ -12180,11 +12670,6 @@
               </a:rPr>
               <a:t>not enough</a:t>
             </a:r>
-            <a:pPr>
-              <a:lnSpc>
-                <a:spcPct val="140000"/>
-              </a:lnSpc>
-            </a:pPr>
             <a:r>
               <a:rPr lang="en-US" sz="1020" dirty="0">
                 <a:solidFill>
@@ -12196,11 +12681,6 @@
               </a:rPr>
               <a:t> to explain productivity well; the multiple regression model provided a </a:t>
             </a:r>
-            <a:pPr>
-              <a:lnSpc>
-                <a:spcPct val="140000"/>
-              </a:lnSpc>
-            </a:pPr>
             <a:r>
               <a:rPr lang="en-US" sz="1020" b="1" dirty="0">
                 <a:solidFill>
@@ -12212,11 +12692,6 @@
               </a:rPr>
               <a:t>more meaningful interpretation</a:t>
             </a:r>
-            <a:pPr>
-              <a:lnSpc>
-                <a:spcPct val="140000"/>
-              </a:lnSpc>
-            </a:pPr>
             <a:r>
               <a:rPr lang="en-US" sz="1020" dirty="0">
                 <a:solidFill>
@@ -12239,7 +12714,6 @@
   </p:clrMapOvr>
   <p:transition>
     <p:fade/>
-    <p:spd val="med"/>
   </p:transition>
 </p:sld>
 </file>
@@ -12252,6 +12726,7 @@
         <a:solidFill>
           <a:srgbClr val="F7F5F3"/>
         </a:solidFill>
+        <a:effectLst/>
       </p:bgPr>
     </p:bg>
     <p:spTree>
@@ -12331,6 +12806,13 @@
           </a:solidFill>
           <a:ln/>
         </p:spPr>
+        <p:txBody>
+          <a:bodyPr/>
+          <a:lstStyle/>
+          <a:p>
+            <a:endParaRPr lang="zh-CN" altLang="en-US"/>
+          </a:p>
+        </p:txBody>
       </p:sp>
       <p:sp>
         <p:nvSpPr>
@@ -12477,13 +12959,20 @@
           </a:solidFill>
           <a:ln/>
           <a:effectLst>
-            <a:outerShdw sx="100000" sy="100000" kx="0" ky="0" algn="bl" rotWithShape="0" blurRad="28575" dist="9525" dir="5400000">
+            <a:outerShdw blurRad="28575" dist="9525" dir="5400000" algn="bl" rotWithShape="0">
               <a:srgbClr val="000000">
                 <a:alpha val="10196"/>
               </a:srgbClr>
             </a:outerShdw>
           </a:effectLst>
         </p:spPr>
+        <p:txBody>
+          <a:bodyPr/>
+          <a:lstStyle/>
+          <a:p>
+            <a:endParaRPr lang="zh-CN" altLang="en-US"/>
+          </a:p>
+        </p:txBody>
       </p:sp>
       <p:sp>
         <p:nvSpPr>
@@ -12538,6 +13027,13 @@
           </a:solidFill>
           <a:ln/>
         </p:spPr>
+        <p:txBody>
+          <a:bodyPr/>
+          <a:lstStyle/>
+          <a:p>
+            <a:endParaRPr lang="zh-CN" altLang="en-US"/>
+          </a:p>
+        </p:txBody>
       </p:sp>
       <p:sp>
         <p:nvSpPr>
@@ -12668,6 +13164,13 @@
           </a:solidFill>
           <a:ln/>
         </p:spPr>
+        <p:txBody>
+          <a:bodyPr/>
+          <a:lstStyle/>
+          <a:p>
+            <a:endParaRPr lang="zh-CN" altLang="en-US"/>
+          </a:p>
+        </p:txBody>
       </p:sp>
       <p:sp>
         <p:nvSpPr>
@@ -12773,6 +13276,13 @@
           </a:solidFill>
           <a:ln/>
         </p:spPr>
+        <p:txBody>
+          <a:bodyPr/>
+          <a:lstStyle/>
+          <a:p>
+            <a:endParaRPr lang="zh-CN" altLang="en-US"/>
+          </a:p>
+        </p:txBody>
       </p:sp>
       <p:sp>
         <p:nvSpPr>
@@ -12854,11 +13364,6 @@
               </a:rPr>
               <a:t>Behaviour matters, but </a:t>
             </a:r>
-            <a:pPr>
-              <a:lnSpc>
-                <a:spcPct val="140000"/>
-              </a:lnSpc>
-            </a:pPr>
             <a:r>
               <a:rPr lang="en-US" sz="1350" b="1" dirty="0">
                 <a:solidFill>
@@ -12939,6 +13444,13 @@
           </a:solidFill>
           <a:ln/>
         </p:spPr>
+        <p:txBody>
+          <a:bodyPr/>
+          <a:lstStyle/>
+          <a:p>
+            <a:endParaRPr lang="zh-CN" altLang="en-US"/>
+          </a:p>
+        </p:txBody>
       </p:sp>
       <p:sp>
         <p:nvSpPr>
@@ -13020,11 +13532,6 @@
               </a:rPr>
               <a:t>Some effects </a:t>
             </a:r>
-            <a:pPr>
-              <a:lnSpc>
-                <a:spcPct val="140000"/>
-              </a:lnSpc>
-            </a:pPr>
             <a:r>
               <a:rPr lang="en-US" sz="1350" b="1" dirty="0">
                 <a:solidFill>
@@ -13038,11 +13545,6 @@
               </a:rPr>
               <a:t>weakened after accounting</a:t>
             </a:r>
-            <a:pPr>
-              <a:lnSpc>
-                <a:spcPct val="140000"/>
-              </a:lnSpc>
-            </a:pPr>
             <a:r>
               <a:rPr lang="en-US" sz="1350" dirty="0">
                 <a:solidFill>
@@ -13123,6 +13625,13 @@
           </a:solidFill>
           <a:ln/>
         </p:spPr>
+        <p:txBody>
+          <a:bodyPr/>
+          <a:lstStyle/>
+          <a:p>
+            <a:endParaRPr lang="zh-CN" altLang="en-US"/>
+          </a:p>
+        </p:txBody>
       </p:sp>
       <p:sp>
         <p:nvSpPr>
@@ -13204,11 +13713,6 @@
               </a:rPr>
               <a:t>Interpretation should be cautious: </a:t>
             </a:r>
-            <a:pPr>
-              <a:lnSpc>
-                <a:spcPct val="140000"/>
-              </a:lnSpc>
-            </a:pPr>
             <a:r>
               <a:rPr lang="en-US" sz="1350" b="1" dirty="0">
                 <a:solidFill>
@@ -13289,13 +13793,20 @@
           </a:solidFill>
           <a:ln/>
           <a:effectLst>
-            <a:outerShdw sx="100000" sy="100000" kx="0" ky="0" algn="bl" rotWithShape="0" blurRad="28575" dist="9525" dir="5400000">
+            <a:outerShdw blurRad="28575" dist="9525" dir="5400000" algn="bl" rotWithShape="0">
               <a:srgbClr val="000000">
                 <a:alpha val="10196"/>
               </a:srgbClr>
             </a:outerShdw>
           </a:effectLst>
         </p:spPr>
+        <p:txBody>
+          <a:bodyPr/>
+          <a:lstStyle/>
+          <a:p>
+            <a:endParaRPr lang="zh-CN" altLang="en-US"/>
+          </a:p>
+        </p:txBody>
       </p:sp>
       <p:sp>
         <p:nvSpPr>
@@ -13350,6 +13861,13 @@
           </a:solidFill>
           <a:ln/>
         </p:spPr>
+        <p:txBody>
+          <a:bodyPr/>
+          <a:lstStyle/>
+          <a:p>
+            <a:endParaRPr lang="zh-CN" altLang="en-US"/>
+          </a:p>
+        </p:txBody>
       </p:sp>
       <p:sp>
         <p:nvSpPr>
@@ -13520,6 +14038,13 @@
           </a:solidFill>
           <a:ln/>
         </p:spPr>
+        <p:txBody>
+          <a:bodyPr/>
+          <a:lstStyle/>
+          <a:p>
+            <a:endParaRPr lang="zh-CN" altLang="en-US"/>
+          </a:p>
+        </p:txBody>
       </p:sp>
       <p:sp>
         <p:nvSpPr>
@@ -13625,6 +14150,13 @@
           </a:solidFill>
           <a:ln/>
         </p:spPr>
+        <p:txBody>
+          <a:bodyPr/>
+          <a:lstStyle/>
+          <a:p>
+            <a:endParaRPr lang="zh-CN" altLang="en-US"/>
+          </a:p>
+        </p:txBody>
       </p:sp>
       <p:sp>
         <p:nvSpPr>
@@ -13665,11 +14197,6 @@
               </a:rPr>
               <a:t>Visual trends alone</a:t>
             </a:r>
-            <a:pPr>
-              <a:lnSpc>
-                <a:spcPct val="140000"/>
-              </a:lnSpc>
-            </a:pPr>
             <a:r>
               <a:rPr lang="en-US" sz="1350" dirty="0">
                 <a:solidFill>
@@ -13750,6 +14277,13 @@
           </a:solidFill>
           <a:ln/>
         </p:spPr>
+        <p:txBody>
+          <a:bodyPr/>
+          <a:lstStyle/>
+          <a:p>
+            <a:endParaRPr lang="zh-CN" altLang="en-US"/>
+          </a:p>
+        </p:txBody>
       </p:sp>
       <p:sp>
         <p:nvSpPr>
@@ -13790,11 +14324,6 @@
               </a:rPr>
               <a:t>Simple models</a:t>
             </a:r>
-            <a:pPr>
-              <a:lnSpc>
-                <a:spcPct val="140000"/>
-              </a:lnSpc>
-            </a:pPr>
             <a:r>
               <a:rPr lang="en-US" sz="1350" dirty="0">
                 <a:solidFill>
@@ -13875,6 +14404,13 @@
           </a:solidFill>
           <a:ln/>
         </p:spPr>
+        <p:txBody>
+          <a:bodyPr/>
+          <a:lstStyle/>
+          <a:p>
+            <a:endParaRPr lang="zh-CN" altLang="en-US"/>
+          </a:p>
+        </p:txBody>
       </p:sp>
       <p:sp>
         <p:nvSpPr>
@@ -13915,11 +14451,6 @@
               </a:rPr>
               <a:t>Multiple regression</a:t>
             </a:r>
-            <a:pPr>
-              <a:lnSpc>
-                <a:spcPct val="140000"/>
-              </a:lnSpc>
-            </a:pPr>
             <a:r>
               <a:rPr lang="en-US" sz="1350" dirty="0">
                 <a:solidFill>
@@ -14000,13 +14531,20 @@
           </a:solidFill>
           <a:ln/>
           <a:effectLst>
-            <a:outerShdw sx="100000" sy="100000" kx="0" ky="0" algn="bl" rotWithShape="0" blurRad="28575" dist="9525" dir="5400000">
+            <a:outerShdw blurRad="28575" dist="9525" dir="5400000" algn="bl" rotWithShape="0">
               <a:srgbClr val="000000">
                 <a:alpha val="10196"/>
               </a:srgbClr>
             </a:outerShdw>
           </a:effectLst>
         </p:spPr>
+        <p:txBody>
+          <a:bodyPr/>
+          <a:lstStyle/>
+          <a:p>
+            <a:endParaRPr lang="zh-CN" altLang="en-US"/>
+          </a:p>
+        </p:txBody>
       </p:sp>
       <p:sp>
         <p:nvSpPr>
@@ -14114,6 +14652,13 @@
           </a:solidFill>
           <a:ln/>
         </p:spPr>
+        <p:txBody>
+          <a:bodyPr/>
+          <a:lstStyle/>
+          <a:p>
+            <a:endParaRPr lang="zh-CN" altLang="en-US"/>
+          </a:p>
+        </p:txBody>
       </p:sp>
       <p:sp>
         <p:nvSpPr>
@@ -14303,6 +14848,13 @@
           </a:solidFill>
           <a:ln/>
         </p:spPr>
+        <p:txBody>
+          <a:bodyPr/>
+          <a:lstStyle/>
+          <a:p>
+            <a:endParaRPr lang="zh-CN" altLang="en-US"/>
+          </a:p>
+        </p:txBody>
       </p:sp>
       <p:sp>
         <p:nvSpPr>
@@ -14367,6 +14919,13 @@
           </a:solidFill>
           <a:ln/>
         </p:spPr>
+        <p:txBody>
+          <a:bodyPr/>
+          <a:lstStyle/>
+          <a:p>
+            <a:endParaRPr lang="zh-CN" altLang="en-US"/>
+          </a:p>
+        </p:txBody>
       </p:sp>
       <p:sp>
         <p:nvSpPr>
@@ -14515,6 +15074,13 @@
           </a:solidFill>
           <a:ln/>
         </p:spPr>
+        <p:txBody>
+          <a:bodyPr/>
+          <a:lstStyle/>
+          <a:p>
+            <a:endParaRPr lang="zh-CN" altLang="en-US"/>
+          </a:p>
+        </p:txBody>
       </p:sp>
       <p:sp>
         <p:nvSpPr>
@@ -14579,6 +15145,13 @@
           </a:solidFill>
           <a:ln/>
         </p:spPr>
+        <p:txBody>
+          <a:bodyPr/>
+          <a:lstStyle/>
+          <a:p>
+            <a:endParaRPr lang="zh-CN" altLang="en-US"/>
+          </a:p>
+        </p:txBody>
       </p:sp>
       <p:sp>
         <p:nvSpPr>
@@ -14768,6 +15341,13 @@
           </a:solidFill>
           <a:ln/>
         </p:spPr>
+        <p:txBody>
+          <a:bodyPr/>
+          <a:lstStyle/>
+          <a:p>
+            <a:endParaRPr lang="zh-CN" altLang="en-US"/>
+          </a:p>
+        </p:txBody>
       </p:sp>
       <p:sp>
         <p:nvSpPr>
@@ -14832,6 +15412,13 @@
           </a:solidFill>
           <a:ln/>
         </p:spPr>
+        <p:txBody>
+          <a:bodyPr/>
+          <a:lstStyle/>
+          <a:p>
+            <a:endParaRPr lang="zh-CN" altLang="en-US"/>
+          </a:p>
+        </p:txBody>
       </p:sp>
       <p:sp>
         <p:nvSpPr>
@@ -14980,6 +15567,13 @@
           </a:solidFill>
           <a:ln/>
         </p:spPr>
+        <p:txBody>
+          <a:bodyPr/>
+          <a:lstStyle/>
+          <a:p>
+            <a:endParaRPr lang="zh-CN" altLang="en-US"/>
+          </a:p>
+        </p:txBody>
       </p:sp>
       <p:sp>
         <p:nvSpPr>
@@ -15044,6 +15638,13 @@
           </a:solidFill>
           <a:ln/>
         </p:spPr>
+        <p:txBody>
+          <a:bodyPr/>
+          <a:lstStyle/>
+          <a:p>
+            <a:endParaRPr lang="zh-CN" altLang="en-US"/>
+          </a:p>
+        </p:txBody>
       </p:sp>
       <p:sp>
         <p:nvSpPr>
@@ -15233,6 +15834,13 @@
           </a:solidFill>
           <a:ln/>
         </p:spPr>
+        <p:txBody>
+          <a:bodyPr/>
+          <a:lstStyle/>
+          <a:p>
+            <a:endParaRPr lang="zh-CN" altLang="en-US"/>
+          </a:p>
+        </p:txBody>
       </p:sp>
       <p:sp>
         <p:nvSpPr>
@@ -15297,6 +15905,13 @@
           </a:solidFill>
           <a:ln/>
         </p:spPr>
+        <p:txBody>
+          <a:bodyPr/>
+          <a:lstStyle/>
+          <a:p>
+            <a:endParaRPr lang="zh-CN" altLang="en-US"/>
+          </a:p>
+        </p:txBody>
       </p:sp>
       <p:sp>
         <p:nvSpPr>
@@ -15445,6 +16060,13 @@
           </a:solidFill>
           <a:ln/>
         </p:spPr>
+        <p:txBody>
+          <a:bodyPr/>
+          <a:lstStyle/>
+          <a:p>
+            <a:endParaRPr lang="zh-CN" altLang="en-US"/>
+          </a:p>
+        </p:txBody>
       </p:sp>
       <p:sp>
         <p:nvSpPr>
@@ -15509,6 +16131,13 @@
           </a:solidFill>
           <a:ln/>
         </p:spPr>
+        <p:txBody>
+          <a:bodyPr/>
+          <a:lstStyle/>
+          <a:p>
+            <a:endParaRPr lang="zh-CN" altLang="en-US"/>
+          </a:p>
+        </p:txBody>
       </p:sp>
       <p:sp>
         <p:nvSpPr>
@@ -15555,6 +16184,13 @@
           </a:solidFill>
           <a:ln/>
         </p:spPr>
+        <p:txBody>
+          <a:bodyPr/>
+          <a:lstStyle/>
+          <a:p>
+            <a:endParaRPr lang="zh-CN" altLang="en-US"/>
+          </a:p>
+        </p:txBody>
       </p:sp>
       <p:sp>
         <p:nvSpPr>
@@ -15703,6 +16339,13 @@
           </a:solidFill>
           <a:ln/>
         </p:spPr>
+        <p:txBody>
+          <a:bodyPr/>
+          <a:lstStyle/>
+          <a:p>
+            <a:endParaRPr lang="zh-CN" altLang="en-US"/>
+          </a:p>
+        </p:txBody>
       </p:sp>
       <p:sp>
         <p:nvSpPr>
@@ -15757,6 +16400,13 @@
           </a:solidFill>
           <a:ln/>
         </p:spPr>
+        <p:txBody>
+          <a:bodyPr/>
+          <a:lstStyle/>
+          <a:p>
+            <a:endParaRPr lang="zh-CN" altLang="en-US"/>
+          </a:p>
+        </p:txBody>
       </p:sp>
       <p:sp>
         <p:nvSpPr>
@@ -15882,6 +16532,13 @@
           </a:solidFill>
           <a:ln/>
         </p:spPr>
+        <p:txBody>
+          <a:bodyPr/>
+          <a:lstStyle/>
+          <a:p>
+            <a:endParaRPr lang="zh-CN" altLang="en-US"/>
+          </a:p>
+        </p:txBody>
       </p:sp>
       <p:sp>
         <p:nvSpPr>
@@ -15920,11 +16577,6 @@
               </a:rPr>
               <a:t>Core Insight:</a:t>
             </a:r>
-            <a:pPr>
-              <a:lnSpc>
-                <a:spcPct val="140000"/>
-              </a:lnSpc>
-            </a:pPr>
             <a:r>
               <a:rPr lang="en-US" sz="1350" dirty="0">
                 <a:solidFill>
@@ -15936,11 +16588,6 @@
               </a:rPr>
               <a:t> Regression suggested that student productivity is better understood as the result of </a:t>
             </a:r>
-            <a:pPr>
-              <a:lnSpc>
-                <a:spcPct val="140000"/>
-              </a:lnSpc>
-            </a:pPr>
             <a:r>
               <a:rPr lang="en-US" sz="1350" b="1" dirty="0">
                 <a:solidFill>
@@ -15952,11 +16599,6 @@
               </a:rPr>
               <a:t>multiple interacting factors</a:t>
             </a:r>
-            <a:pPr>
-              <a:lnSpc>
-                <a:spcPct val="140000"/>
-              </a:lnSpc>
-            </a:pPr>
             <a:r>
               <a:rPr lang="en-US" sz="1350" dirty="0">
                 <a:solidFill>
@@ -15979,7 +16621,6 @@
   </p:clrMapOvr>
   <p:transition>
     <p:fade/>
-    <p:spd val="med"/>
   </p:transition>
 </p:sld>
 </file>
@@ -15992,6 +16633,7 @@
         <a:solidFill>
           <a:srgbClr val="F7F5F3"/>
         </a:solidFill>
+        <a:effectLst/>
       </p:bgPr>
     </p:bg>
     <p:spTree>
@@ -16071,6 +16713,13 @@
           </a:solidFill>
           <a:ln/>
         </p:spPr>
+        <p:txBody>
+          <a:bodyPr/>
+          <a:lstStyle/>
+          <a:p>
+            <a:endParaRPr lang="zh-CN" altLang="en-US"/>
+          </a:p>
+        </p:txBody>
       </p:sp>
       <p:sp>
         <p:nvSpPr>
@@ -16217,13 +16866,20 @@
           </a:solidFill>
           <a:ln/>
           <a:effectLst>
-            <a:outerShdw sx="100000" sy="100000" kx="0" ky="0" algn="bl" rotWithShape="0" blurRad="23813" dist="7938" dir="5400000">
+            <a:outerShdw blurRad="23813" dist="7938" dir="5400000" algn="bl" rotWithShape="0">
               <a:srgbClr val="000000">
                 <a:alpha val="10196"/>
               </a:srgbClr>
             </a:outerShdw>
           </a:effectLst>
         </p:spPr>
+        <p:txBody>
+          <a:bodyPr/>
+          <a:lstStyle/>
+          <a:p>
+            <a:endParaRPr lang="zh-CN" altLang="en-US"/>
+          </a:p>
+        </p:txBody>
       </p:sp>
       <p:sp>
         <p:nvSpPr>
@@ -16278,6 +16934,13 @@
           </a:solidFill>
           <a:ln/>
         </p:spPr>
+        <p:txBody>
+          <a:bodyPr/>
+          <a:lstStyle/>
+          <a:p>
+            <a:endParaRPr lang="zh-CN" altLang="en-US"/>
+          </a:p>
+        </p:txBody>
       </p:sp>
       <p:sp>
         <p:nvSpPr>
@@ -16424,6 +17087,13 @@
           </a:solidFill>
           <a:ln/>
         </p:spPr>
+        <p:txBody>
+          <a:bodyPr/>
+          <a:lstStyle/>
+          <a:p>
+            <a:endParaRPr lang="zh-CN" altLang="en-US"/>
+          </a:p>
+        </p:txBody>
       </p:sp>
       <p:sp>
         <p:nvSpPr>
@@ -16529,6 +17199,13 @@
           </a:solidFill>
           <a:ln/>
         </p:spPr>
+        <p:txBody>
+          <a:bodyPr/>
+          <a:lstStyle/>
+          <a:p>
+            <a:endParaRPr lang="zh-CN" altLang="en-US"/>
+          </a:p>
+        </p:txBody>
       </p:sp>
       <p:sp>
         <p:nvSpPr>
@@ -16569,11 +17246,6 @@
               </a:rPr>
               <a:t>Regression tells us </a:t>
             </a:r>
-            <a:pPr>
-              <a:lnSpc>
-                <a:spcPct val="140000"/>
-              </a:lnSpc>
-            </a:pPr>
             <a:r>
               <a:rPr lang="en-US" sz="1000" b="1" dirty="0">
                 <a:solidFill>
@@ -16654,6 +17326,13 @@
           </a:solidFill>
           <a:ln/>
         </p:spPr>
+        <p:txBody>
+          <a:bodyPr/>
+          <a:lstStyle/>
+          <a:p>
+            <a:endParaRPr lang="zh-CN" altLang="en-US"/>
+          </a:p>
+        </p:txBody>
       </p:sp>
       <p:sp>
         <p:nvSpPr>
@@ -16694,11 +17373,6 @@
               </a:rPr>
               <a:t>Classification asks whether students can be </a:t>
             </a:r>
-            <a:pPr>
-              <a:lnSpc>
-                <a:spcPct val="140000"/>
-              </a:lnSpc>
-            </a:pPr>
             <a:r>
               <a:rPr lang="en-US" sz="1000" b="1" dirty="0">
                 <a:solidFill>
@@ -16779,6 +17453,13 @@
           </a:solidFill>
           <a:ln/>
         </p:spPr>
+        <p:txBody>
+          <a:bodyPr/>
+          <a:lstStyle/>
+          <a:p>
+            <a:endParaRPr lang="zh-CN" altLang="en-US"/>
+          </a:p>
+        </p:txBody>
       </p:sp>
       <p:sp>
         <p:nvSpPr>
@@ -16819,11 +17500,6 @@
               </a:rPr>
               <a:t>We converted productivity into a </a:t>
             </a:r>
-            <a:pPr>
-              <a:lnSpc>
-                <a:spcPct val="140000"/>
-              </a:lnSpc>
-            </a:pPr>
             <a:r>
               <a:rPr lang="en-US" sz="1000" b="1" dirty="0">
                 <a:solidFill>
@@ -16904,13 +17580,20 @@
           </a:solidFill>
           <a:ln/>
           <a:effectLst>
-            <a:outerShdw sx="100000" sy="100000" kx="0" ky="0" algn="bl" rotWithShape="0" blurRad="23813" dist="7938" dir="5400000">
+            <a:outerShdw blurRad="23813" dist="7938" dir="5400000" algn="bl" rotWithShape="0">
               <a:srgbClr val="000000">
                 <a:alpha val="10196"/>
               </a:srgbClr>
             </a:outerShdw>
           </a:effectLst>
         </p:spPr>
+        <p:txBody>
+          <a:bodyPr/>
+          <a:lstStyle/>
+          <a:p>
+            <a:endParaRPr lang="zh-CN" altLang="en-US"/>
+          </a:p>
+        </p:txBody>
       </p:sp>
       <p:sp>
         <p:nvSpPr>
@@ -16965,6 +17648,13 @@
           </a:solidFill>
           <a:ln/>
         </p:spPr>
+        <p:txBody>
+          <a:bodyPr/>
+          <a:lstStyle/>
+          <a:p>
+            <a:endParaRPr lang="zh-CN" altLang="en-US"/>
+          </a:p>
+        </p:txBody>
       </p:sp>
       <p:sp>
         <p:nvSpPr>
@@ -17090,6 +17780,13 @@
           </a:solidFill>
           <a:ln/>
         </p:spPr>
+        <p:txBody>
+          <a:bodyPr/>
+          <a:lstStyle/>
+          <a:p>
+            <a:endParaRPr lang="zh-CN" altLang="en-US"/>
+          </a:p>
+        </p:txBody>
       </p:sp>
       <p:sp>
         <p:nvSpPr>
@@ -17195,6 +17892,13 @@
           </a:solidFill>
           <a:ln/>
         </p:spPr>
+        <p:txBody>
+          <a:bodyPr/>
+          <a:lstStyle/>
+          <a:p>
+            <a:endParaRPr lang="zh-CN" altLang="en-US"/>
+          </a:p>
+        </p:txBody>
       </p:sp>
       <p:sp>
         <p:nvSpPr>
@@ -17235,11 +17939,6 @@
               </a:rPr>
               <a:t>Simple logistic regression:</a:t>
             </a:r>
-            <a:pPr>
-              <a:lnSpc>
-                <a:spcPct val="140000"/>
-              </a:lnSpc>
-            </a:pPr>
             <a:r>
               <a:rPr lang="en-US" sz="1000" dirty="0">
                 <a:solidFill>
@@ -17320,6 +18019,13 @@
           </a:solidFill>
           <a:ln/>
         </p:spPr>
+        <p:txBody>
+          <a:bodyPr/>
+          <a:lstStyle/>
+          <a:p>
+            <a:endParaRPr lang="zh-CN" altLang="en-US"/>
+          </a:p>
+        </p:txBody>
       </p:sp>
       <p:sp>
         <p:nvSpPr>
@@ -17360,11 +18066,6 @@
               </a:rPr>
               <a:t>Multiple logistic regression:</a:t>
             </a:r>
-            <a:pPr>
-              <a:lnSpc>
-                <a:spcPct val="140000"/>
-              </a:lnSpc>
-            </a:pPr>
             <a:r>
               <a:rPr lang="en-US" sz="1000" dirty="0">
                 <a:solidFill>
@@ -17445,6 +18146,13 @@
           </a:solidFill>
           <a:ln/>
         </p:spPr>
+        <p:txBody>
+          <a:bodyPr/>
+          <a:lstStyle/>
+          <a:p>
+            <a:endParaRPr lang="zh-CN" altLang="en-US"/>
+          </a:p>
+        </p:txBody>
       </p:sp>
       <p:sp>
         <p:nvSpPr>
@@ -17485,11 +18193,6 @@
               </a:rPr>
               <a:t>Compared performance using </a:t>
             </a:r>
-            <a:pPr>
-              <a:lnSpc>
-                <a:spcPct val="140000"/>
-              </a:lnSpc>
-            </a:pPr>
             <a:r>
               <a:rPr lang="en-US" sz="1000" b="1" dirty="0">
                 <a:solidFill>
@@ -17570,13 +18273,20 @@
           </a:solidFill>
           <a:ln/>
           <a:effectLst>
-            <a:outerShdw sx="100000" sy="100000" kx="0" ky="0" algn="bl" rotWithShape="0" blurRad="23813" dist="7938" dir="5400000">
+            <a:outerShdw blurRad="23813" dist="7938" dir="5400000" algn="bl" rotWithShape="0">
               <a:srgbClr val="000000">
                 <a:alpha val="10196"/>
               </a:srgbClr>
             </a:outerShdw>
           </a:effectLst>
         </p:spPr>
+        <p:txBody>
+          <a:bodyPr/>
+          <a:lstStyle/>
+          <a:p>
+            <a:endParaRPr lang="zh-CN" altLang="en-US"/>
+          </a:p>
+        </p:txBody>
       </p:sp>
       <p:sp>
         <p:nvSpPr>
@@ -17631,6 +18341,13 @@
           </a:solidFill>
           <a:ln/>
         </p:spPr>
+        <p:txBody>
+          <a:bodyPr/>
+          <a:lstStyle/>
+          <a:p>
+            <a:endParaRPr lang="zh-CN" altLang="en-US"/>
+          </a:p>
+        </p:txBody>
       </p:sp>
       <p:sp>
         <p:nvSpPr>
@@ -17795,6 +18512,13 @@
           </a:solidFill>
           <a:ln/>
         </p:spPr>
+        <p:txBody>
+          <a:bodyPr/>
+          <a:lstStyle/>
+          <a:p>
+            <a:endParaRPr lang="zh-CN" altLang="en-US"/>
+          </a:p>
+        </p:txBody>
       </p:sp>
       <p:sp>
         <p:nvSpPr>
@@ -17900,6 +18624,13 @@
           </a:solidFill>
           <a:ln/>
         </p:spPr>
+        <p:txBody>
+          <a:bodyPr/>
+          <a:lstStyle/>
+          <a:p>
+            <a:endParaRPr lang="zh-CN" altLang="en-US"/>
+          </a:p>
+        </p:txBody>
       </p:sp>
       <p:sp>
         <p:nvSpPr>
@@ -17940,11 +18671,6 @@
               </a:rPr>
               <a:t>A single predictor had </a:t>
             </a:r>
-            <a:pPr>
-              <a:lnSpc>
-                <a:spcPct val="140000"/>
-              </a:lnSpc>
-            </a:pPr>
             <a:r>
               <a:rPr lang="en-US" sz="1000" b="1" dirty="0">
                 <a:solidFill>
@@ -18025,6 +18751,13 @@
           </a:solidFill>
           <a:ln/>
         </p:spPr>
+        <p:txBody>
+          <a:bodyPr/>
+          <a:lstStyle/>
+          <a:p>
+            <a:endParaRPr lang="zh-CN" altLang="en-US"/>
+          </a:p>
+        </p:txBody>
       </p:sp>
       <p:sp>
         <p:nvSpPr>
@@ -18065,11 +18798,6 @@
               </a:rPr>
               <a:t>Multiple predictors improved</a:t>
             </a:r>
-            <a:pPr>
-              <a:lnSpc>
-                <a:spcPct val="140000"/>
-              </a:lnSpc>
-            </a:pPr>
             <a:r>
               <a:rPr lang="en-US" sz="1000" dirty="0">
                 <a:solidFill>
@@ -18150,6 +18878,13 @@
           </a:solidFill>
           <a:ln/>
         </p:spPr>
+        <p:txBody>
+          <a:bodyPr/>
+          <a:lstStyle/>
+          <a:p>
+            <a:endParaRPr lang="zh-CN" altLang="en-US"/>
+          </a:p>
+        </p:txBody>
       </p:sp>
       <p:sp>
         <p:nvSpPr>
@@ -18190,11 +18925,6 @@
               </a:rPr>
               <a:t>But behaviour alone still did </a:t>
             </a:r>
-            <a:pPr>
-              <a:lnSpc>
-                <a:spcPct val="140000"/>
-              </a:lnSpc>
-            </a:pPr>
             <a:r>
               <a:rPr lang="en-US" sz="1000" b="1" dirty="0">
                 <a:solidFill>
@@ -18208,11 +18938,6 @@
               </a:rPr>
               <a:t>not perfectly separate</a:t>
             </a:r>
-            <a:pPr>
-              <a:lnSpc>
-                <a:spcPct val="140000"/>
-              </a:lnSpc>
-            </a:pPr>
             <a:r>
               <a:rPr lang="en-US" sz="1000" dirty="0">
                 <a:solidFill>
@@ -18293,13 +19018,20 @@
           </a:solidFill>
           <a:ln/>
           <a:effectLst>
-            <a:outerShdw sx="100000" sy="100000" kx="0" ky="0" algn="bl" rotWithShape="0" blurRad="23813" dist="7938" dir="5400000">
+            <a:outerShdw blurRad="23813" dist="7938" dir="5400000" algn="bl" rotWithShape="0">
               <a:srgbClr val="000000">
                 <a:alpha val="10196"/>
               </a:srgbClr>
             </a:outerShdw>
           </a:effectLst>
         </p:spPr>
+        <p:txBody>
+          <a:bodyPr/>
+          <a:lstStyle/>
+          <a:p>
+            <a:endParaRPr lang="zh-CN" altLang="en-US"/>
+          </a:p>
+        </p:txBody>
       </p:sp>
       <p:sp>
         <p:nvSpPr>
@@ -18407,6 +19139,13 @@
           </a:solidFill>
           <a:ln/>
         </p:spPr>
+        <p:txBody>
+          <a:bodyPr/>
+          <a:lstStyle/>
+          <a:p>
+            <a:endParaRPr lang="zh-CN" altLang="en-US"/>
+          </a:p>
+        </p:txBody>
       </p:sp>
       <p:sp>
         <p:nvSpPr>
@@ -18473,6 +19212,13 @@
           </a:solidFill>
           <a:ln/>
         </p:spPr>
+        <p:txBody>
+          <a:bodyPr/>
+          <a:lstStyle/>
+          <a:p>
+            <a:endParaRPr lang="zh-CN" altLang="en-US"/>
+          </a:p>
+        </p:txBody>
       </p:sp>
       <p:sp>
         <p:nvSpPr>
@@ -18621,6 +19367,13 @@
           </a:solidFill>
           <a:ln/>
         </p:spPr>
+        <p:txBody>
+          <a:bodyPr/>
+          <a:lstStyle/>
+          <a:p>
+            <a:endParaRPr lang="zh-CN" altLang="en-US"/>
+          </a:p>
+        </p:txBody>
       </p:sp>
       <p:sp>
         <p:nvSpPr>
@@ -18769,6 +19522,13 @@
           </a:solidFill>
           <a:ln/>
         </p:spPr>
+        <p:txBody>
+          <a:bodyPr/>
+          <a:lstStyle/>
+          <a:p>
+            <a:endParaRPr lang="zh-CN" altLang="en-US"/>
+          </a:p>
+        </p:txBody>
       </p:sp>
       <p:sp>
         <p:nvSpPr>
@@ -18917,6 +19677,13 @@
           </a:solidFill>
           <a:ln/>
         </p:spPr>
+        <p:txBody>
+          <a:bodyPr/>
+          <a:lstStyle/>
+          <a:p>
+            <a:endParaRPr lang="zh-CN" altLang="en-US"/>
+          </a:p>
+        </p:txBody>
       </p:sp>
       <p:sp>
         <p:nvSpPr>
@@ -19104,13 +19871,20 @@
           </a:solidFill>
           <a:ln/>
           <a:effectLst>
-            <a:outerShdw sx="100000" sy="100000" kx="0" ky="0" algn="bl" rotWithShape="0" blurRad="23813" dist="7938" dir="5400000">
+            <a:outerShdw blurRad="23813" dist="7938" dir="5400000" algn="bl" rotWithShape="0">
               <a:srgbClr val="000000">
                 <a:alpha val="10196"/>
               </a:srgbClr>
             </a:outerShdw>
           </a:effectLst>
         </p:spPr>
+        <p:txBody>
+          <a:bodyPr/>
+          <a:lstStyle/>
+          <a:p>
+            <a:endParaRPr lang="zh-CN" altLang="en-US"/>
+          </a:p>
+        </p:txBody>
       </p:sp>
       <p:sp>
         <p:nvSpPr>
@@ -19218,6 +19992,13 @@
           </a:solidFill>
           <a:ln/>
         </p:spPr>
+        <p:txBody>
+          <a:bodyPr/>
+          <a:lstStyle/>
+          <a:p>
+            <a:endParaRPr lang="zh-CN" altLang="en-US"/>
+          </a:p>
+        </p:txBody>
       </p:sp>
       <p:sp>
         <p:nvSpPr>
@@ -19346,6 +20127,13 @@
           </a:solidFill>
           <a:ln/>
         </p:spPr>
+        <p:txBody>
+          <a:bodyPr/>
+          <a:lstStyle/>
+          <a:p>
+            <a:endParaRPr lang="zh-CN" altLang="en-US"/>
+          </a:p>
+        </p:txBody>
       </p:sp>
       <p:sp>
         <p:nvSpPr>
@@ -19537,6 +20325,13 @@
           </a:solidFill>
           <a:ln/>
         </p:spPr>
+        <p:txBody>
+          <a:bodyPr/>
+          <a:lstStyle/>
+          <a:p>
+            <a:endParaRPr lang="zh-CN" altLang="en-US"/>
+          </a:p>
+        </p:txBody>
       </p:sp>
       <p:sp>
         <p:nvSpPr>
@@ -19685,6 +20480,13 @@
           </a:solidFill>
           <a:ln/>
         </p:spPr>
+        <p:txBody>
+          <a:bodyPr/>
+          <a:lstStyle/>
+          <a:p>
+            <a:endParaRPr lang="zh-CN" altLang="en-US"/>
+          </a:p>
+        </p:txBody>
       </p:sp>
       <p:sp>
         <p:nvSpPr>
@@ -19833,6 +20635,13 @@
           </a:solidFill>
           <a:ln/>
         </p:spPr>
+        <p:txBody>
+          <a:bodyPr/>
+          <a:lstStyle/>
+          <a:p>
+            <a:endParaRPr lang="zh-CN" altLang="en-US"/>
+          </a:p>
+        </p:txBody>
       </p:sp>
       <p:sp>
         <p:nvSpPr>
@@ -19887,6 +20696,13 @@
           </a:solidFill>
           <a:ln/>
         </p:spPr>
+        <p:txBody>
+          <a:bodyPr/>
+          <a:lstStyle/>
+          <a:p>
+            <a:endParaRPr lang="zh-CN" altLang="en-US"/>
+          </a:p>
+        </p:txBody>
       </p:sp>
       <p:sp>
         <p:nvSpPr>
@@ -20023,6 +20839,13 @@
           </a:solidFill>
           <a:ln/>
         </p:spPr>
+        <p:txBody>
+          <a:bodyPr/>
+          <a:lstStyle/>
+          <a:p>
+            <a:endParaRPr lang="zh-CN" altLang="en-US"/>
+          </a:p>
+        </p:txBody>
       </p:sp>
       <p:sp>
         <p:nvSpPr>
@@ -20061,11 +20884,6 @@
               </a:rPr>
               <a:t>Core Insight:</a:t>
             </a:r>
-            <a:pPr>
-              <a:lnSpc>
-                <a:spcPct val="140000"/>
-              </a:lnSpc>
-            </a:pPr>
             <a:r>
               <a:rPr lang="en-US" sz="1000" dirty="0">
                 <a:solidFill>
@@ -20077,11 +20895,6 @@
               </a:rPr>
               <a:t> Classification gave us a second perspective on productivity, but also showed that the distinction between high and low productivity is </a:t>
             </a:r>
-            <a:pPr>
-              <a:lnSpc>
-                <a:spcPct val="140000"/>
-              </a:lnSpc>
-            </a:pPr>
             <a:r>
               <a:rPr lang="en-US" sz="1000" b="1" dirty="0">
                 <a:solidFill>
@@ -20093,11 +20906,6 @@
               </a:rPr>
               <a:t>not completely explained</a:t>
             </a:r>
-            <a:pPr>
-              <a:lnSpc>
-                <a:spcPct val="140000"/>
-              </a:lnSpc>
-            </a:pPr>
             <a:r>
               <a:rPr lang="en-US" sz="1000" dirty="0">
                 <a:solidFill>
@@ -20120,7 +20928,6 @@
   </p:clrMapOvr>
   <p:transition>
     <p:fade/>
-    <p:spd val="med"/>
   </p:transition>
 </p:sld>
 </file>
@@ -20133,6 +20940,7 @@
         <a:solidFill>
           <a:srgbClr val="F7F5F3"/>
         </a:solidFill>
+        <a:effectLst/>
       </p:bgPr>
     </p:bg>
     <p:spTree>
@@ -20151,17 +20959,17 @@
       </p:grpSpPr>
       <p:pic>
         <p:nvPicPr>
-          <p:cNvPr id="2" name="Image 0" descr="https://kimi-web-img.moonshot.cn/img/img.freepik.com/7b963585cd434c230a1d0320543b2a5eac78a64c.jpg">    </p:cNvPr>
+          <p:cNvPr id="2" name="Image 0" descr="https://kimi-web-img.moonshot.cn/img/img.freepik.com/7b963585cd434c230a1d0320543b2a5eac78a64c.jpg"/>
           <p:cNvPicPr>
             <a:picLocks noChangeAspect="1"/>
           </p:cNvPicPr>
           <p:nvPr/>
         </p:nvPicPr>
         <p:blipFill>
-          <a:blip r:embed="rId1">
+          <a:blip r:embed="rId3">
             <a:alphaModFix amt="20000"/>
           </a:blip>
-          <a:srcRect l="0" r="0" t="681" b="681"/>
+          <a:srcRect t="681" b="681"/>
           <a:stretch/>
         </p:blipFill>
         <p:spPr>
@@ -20221,6 +21029,13 @@
           </a:solidFill>
           <a:ln/>
         </p:spPr>
+        <p:txBody>
+          <a:bodyPr/>
+          <a:lstStyle/>
+          <a:p>
+            <a:endParaRPr lang="zh-CN" altLang="en-US"/>
+          </a:p>
+        </p:txBody>
       </p:sp>
       <p:sp>
         <p:nvSpPr>
@@ -20285,6 +21100,13 @@
           </a:solidFill>
           <a:ln/>
         </p:spPr>
+        <p:txBody>
+          <a:bodyPr/>
+          <a:lstStyle/>
+          <a:p>
+            <a:endParaRPr lang="zh-CN" altLang="en-US"/>
+          </a:p>
+        </p:txBody>
       </p:sp>
       <p:sp>
         <p:nvSpPr>
@@ -20433,13 +21255,20 @@
           </a:solidFill>
           <a:ln/>
           <a:effectLst>
-            <a:outerShdw sx="100000" sy="100000" kx="0" ky="0" algn="bl" rotWithShape="0" blurRad="28575" dist="9525" dir="5400000">
+            <a:outerShdw blurRad="28575" dist="9525" dir="5400000" algn="bl" rotWithShape="0">
               <a:srgbClr val="000000">
                 <a:alpha val="10196"/>
               </a:srgbClr>
             </a:outerShdw>
           </a:effectLst>
         </p:spPr>
+        <p:txBody>
+          <a:bodyPr/>
+          <a:lstStyle/>
+          <a:p>
+            <a:endParaRPr lang="zh-CN" altLang="en-US"/>
+          </a:p>
+        </p:txBody>
       </p:sp>
       <p:sp>
         <p:nvSpPr>
@@ -20494,6 +21323,13 @@
           </a:solidFill>
           <a:ln/>
         </p:spPr>
+        <p:txBody>
+          <a:bodyPr/>
+          <a:lstStyle/>
+          <a:p>
+            <a:endParaRPr lang="zh-CN" altLang="en-US"/>
+          </a:p>
+        </p:txBody>
       </p:sp>
       <p:sp>
         <p:nvSpPr>
@@ -20629,6 +21465,13 @@
           </a:solidFill>
           <a:ln/>
         </p:spPr>
+        <p:txBody>
+          <a:bodyPr/>
+          <a:lstStyle/>
+          <a:p>
+            <a:endParaRPr lang="zh-CN" altLang="en-US"/>
+          </a:p>
+        </p:txBody>
       </p:sp>
       <p:sp>
         <p:nvSpPr>
@@ -20734,6 +21577,13 @@
           </a:solidFill>
           <a:ln/>
         </p:spPr>
+        <p:txBody>
+          <a:bodyPr/>
+          <a:lstStyle/>
+          <a:p>
+            <a:endParaRPr lang="zh-CN" altLang="en-US"/>
+          </a:p>
+        </p:txBody>
       </p:sp>
       <p:sp>
         <p:nvSpPr>
@@ -20774,11 +21624,6 @@
               </a:rPr>
               <a:t>Some visually promising variables were </a:t>
             </a:r>
-            <a:pPr>
-              <a:lnSpc>
-                <a:spcPct val="140000"/>
-              </a:lnSpc>
-            </a:pPr>
             <a:r>
               <a:rPr lang="en-US" sz="1200" b="1" dirty="0">
                 <a:solidFill>
@@ -20792,11 +21637,6 @@
               </a:rPr>
               <a:t>not significant</a:t>
             </a:r>
-            <a:pPr>
-              <a:lnSpc>
-                <a:spcPct val="140000"/>
-              </a:lnSpc>
-            </a:pPr>
             <a:r>
               <a:rPr lang="en-US" sz="1200" dirty="0">
                 <a:solidFill>
@@ -20877,6 +21717,13 @@
           </a:solidFill>
           <a:ln/>
         </p:spPr>
+        <p:txBody>
+          <a:bodyPr/>
+          <a:lstStyle/>
+          <a:p>
+            <a:endParaRPr lang="zh-CN" altLang="en-US"/>
+          </a:p>
+        </p:txBody>
       </p:sp>
       <p:sp>
         <p:nvSpPr>
@@ -20917,11 +21764,6 @@
               </a:rPr>
               <a:t>Logistic modelling initially </a:t>
             </a:r>
-            <a:pPr>
-              <a:lnSpc>
-                <a:spcPct val="140000"/>
-              </a:lnSpc>
-            </a:pPr>
             <a:r>
               <a:rPr lang="en-US" sz="1200" b="1" dirty="0">
                 <a:solidFill>
@@ -21002,6 +21844,13 @@
           </a:solidFill>
           <a:ln/>
         </p:spPr>
+        <p:txBody>
+          <a:bodyPr/>
+          <a:lstStyle/>
+          <a:p>
+            <a:endParaRPr lang="zh-CN" altLang="en-US"/>
+          </a:p>
+        </p:txBody>
       </p:sp>
       <p:sp>
         <p:nvSpPr>
@@ -21042,11 +21891,6 @@
               </a:rPr>
               <a:t>We learned that </a:t>
             </a:r>
-            <a:pPr>
-              <a:lnSpc>
-                <a:spcPct val="140000"/>
-              </a:lnSpc>
-            </a:pPr>
             <a:r>
               <a:rPr lang="en-US" sz="1200" b="1" dirty="0">
                 <a:solidFill>
@@ -21129,13 +21973,20 @@
           </a:solidFill>
           <a:ln/>
           <a:effectLst>
-            <a:outerShdw sx="100000" sy="100000" kx="0" ky="0" algn="bl" rotWithShape="0" blurRad="28575" dist="9525" dir="5400000">
+            <a:outerShdw blurRad="28575" dist="9525" dir="5400000" algn="bl" rotWithShape="0">
               <a:srgbClr val="000000">
                 <a:alpha val="10196"/>
               </a:srgbClr>
             </a:outerShdw>
           </a:effectLst>
         </p:spPr>
+        <p:txBody>
+          <a:bodyPr/>
+          <a:lstStyle/>
+          <a:p>
+            <a:endParaRPr lang="zh-CN" altLang="en-US"/>
+          </a:p>
+        </p:txBody>
       </p:sp>
       <p:sp>
         <p:nvSpPr>
@@ -21190,6 +22041,13 @@
           </a:solidFill>
           <a:ln/>
         </p:spPr>
+        <p:txBody>
+          <a:bodyPr/>
+          <a:lstStyle/>
+          <a:p>
+            <a:endParaRPr lang="zh-CN" altLang="en-US"/>
+          </a:p>
+        </p:txBody>
       </p:sp>
       <p:sp>
         <p:nvSpPr>
@@ -21286,6 +22144,13 @@
           </a:solidFill>
           <a:ln/>
         </p:spPr>
+        <p:txBody>
+          <a:bodyPr/>
+          <a:lstStyle/>
+          <a:p>
+            <a:endParaRPr lang="zh-CN" altLang="en-US"/>
+          </a:p>
+        </p:txBody>
       </p:sp>
       <p:sp>
         <p:nvSpPr>
@@ -21391,6 +22256,13 @@
           </a:solidFill>
           <a:ln/>
         </p:spPr>
+        <p:txBody>
+          <a:bodyPr/>
+          <a:lstStyle/>
+          <a:p>
+            <a:endParaRPr lang="zh-CN" altLang="en-US"/>
+          </a:p>
+        </p:txBody>
       </p:sp>
       <p:sp>
         <p:nvSpPr>
@@ -21431,11 +22303,6 @@
               </a:rPr>
               <a:t>Behavioural variables may </a:t>
             </a:r>
-            <a:pPr>
-              <a:lnSpc>
-                <a:spcPct val="140000"/>
-              </a:lnSpc>
-            </a:pPr>
             <a:r>
               <a:rPr lang="en-US" sz="1200" b="1" dirty="0">
                 <a:solidFill>
@@ -21449,11 +22316,6 @@
               </a:rPr>
               <a:t>not capture all influences</a:t>
             </a:r>
-            <a:pPr>
-              <a:lnSpc>
-                <a:spcPct val="140000"/>
-              </a:lnSpc>
-            </a:pPr>
             <a:r>
               <a:rPr lang="en-US" sz="1200" dirty="0">
                 <a:solidFill>
@@ -21534,6 +22396,13 @@
           </a:solidFill>
           <a:ln/>
         </p:spPr>
+        <p:txBody>
+          <a:bodyPr/>
+          <a:lstStyle/>
+          <a:p>
+            <a:endParaRPr lang="zh-CN" altLang="en-US"/>
+          </a:p>
+        </p:txBody>
       </p:sp>
       <p:sp>
         <p:nvSpPr>
@@ -21574,11 +22443,6 @@
               </a:rPr>
               <a:t>Binary classification </a:t>
             </a:r>
-            <a:pPr>
-              <a:lnSpc>
-                <a:spcPct val="140000"/>
-              </a:lnSpc>
-            </a:pPr>
             <a:r>
               <a:rPr lang="en-US" sz="1200" b="1" dirty="0">
                 <a:solidFill>
@@ -21592,11 +22456,6 @@
               </a:rPr>
               <a:t>loses information</a:t>
             </a:r>
-            <a:pPr>
-              <a:lnSpc>
-                <a:spcPct val="140000"/>
-              </a:lnSpc>
-            </a:pPr>
             <a:r>
               <a:rPr lang="en-US" sz="1200" dirty="0">
                 <a:solidFill>
@@ -21677,6 +22536,13 @@
           </a:solidFill>
           <a:ln/>
         </p:spPr>
+        <p:txBody>
+          <a:bodyPr/>
+          <a:lstStyle/>
+          <a:p>
+            <a:endParaRPr lang="zh-CN" altLang="en-US"/>
+          </a:p>
+        </p:txBody>
       </p:sp>
       <p:sp>
         <p:nvSpPr>
@@ -21717,11 +22583,6 @@
               </a:rPr>
               <a:t>Results show </a:t>
             </a:r>
-            <a:pPr>
-              <a:lnSpc>
-                <a:spcPct val="140000"/>
-              </a:lnSpc>
-            </a:pPr>
             <a:r>
               <a:rPr lang="en-US" sz="1200" b="1" dirty="0">
                 <a:solidFill>
@@ -21804,13 +22665,20 @@
           </a:solidFill>
           <a:ln/>
           <a:effectLst>
-            <a:outerShdw sx="100000" sy="100000" kx="0" ky="0" algn="bl" rotWithShape="0" blurRad="28575" dist="9525" dir="5400000">
+            <a:outerShdw blurRad="28575" dist="9525" dir="5400000" algn="bl" rotWithShape="0">
               <a:srgbClr val="000000">
                 <a:alpha val="10196"/>
               </a:srgbClr>
             </a:outerShdw>
           </a:effectLst>
         </p:spPr>
+        <p:txBody>
+          <a:bodyPr/>
+          <a:lstStyle/>
+          <a:p>
+            <a:endParaRPr lang="zh-CN" altLang="en-US"/>
+          </a:p>
+        </p:txBody>
       </p:sp>
       <p:sp>
         <p:nvSpPr>
@@ -21865,6 +22733,13 @@
           </a:solidFill>
           <a:ln/>
         </p:spPr>
+        <p:txBody>
+          <a:bodyPr/>
+          <a:lstStyle/>
+          <a:p>
+            <a:endParaRPr lang="zh-CN" altLang="en-US"/>
+          </a:p>
+        </p:txBody>
       </p:sp>
       <p:sp>
         <p:nvSpPr>
@@ -21963,6 +22838,13 @@
           </a:solidFill>
           <a:ln/>
         </p:spPr>
+        <p:txBody>
+          <a:bodyPr/>
+          <a:lstStyle/>
+          <a:p>
+            <a:endParaRPr lang="zh-CN" altLang="en-US"/>
+          </a:p>
+        </p:txBody>
       </p:sp>
       <p:sp>
         <p:nvSpPr>
@@ -22068,6 +22950,13 @@
           </a:solidFill>
           <a:ln/>
         </p:spPr>
+        <p:txBody>
+          <a:bodyPr/>
+          <a:lstStyle/>
+          <a:p>
+            <a:endParaRPr lang="zh-CN" altLang="en-US"/>
+          </a:p>
+        </p:txBody>
       </p:sp>
       <p:sp>
         <p:nvSpPr>
@@ -22108,11 +22997,6 @@
               </a:rPr>
               <a:t>Productivity can be </a:t>
             </a:r>
-            <a:pPr>
-              <a:lnSpc>
-                <a:spcPct val="140000"/>
-              </a:lnSpc>
-            </a:pPr>
             <a:r>
               <a:rPr lang="en-US" sz="1200" b="1" dirty="0">
                 <a:solidFill>
@@ -22126,11 +23010,6 @@
               </a:rPr>
               <a:t>partially predicted</a:t>
             </a:r>
-            <a:pPr>
-              <a:lnSpc>
-                <a:spcPct val="140000"/>
-              </a:lnSpc>
-            </a:pPr>
             <a:r>
               <a:rPr lang="en-US" sz="1200" dirty="0">
                 <a:solidFill>
@@ -22211,6 +23090,13 @@
           </a:solidFill>
           <a:ln/>
         </p:spPr>
+        <p:txBody>
+          <a:bodyPr/>
+          <a:lstStyle/>
+          <a:p>
+            <a:endParaRPr lang="zh-CN" altLang="en-US"/>
+          </a:p>
+        </p:txBody>
       </p:sp>
       <p:sp>
         <p:nvSpPr>
@@ -22251,11 +23137,6 @@
               </a:rPr>
               <a:t>Multiple factors matter more</a:t>
             </a:r>
-            <a:pPr>
-              <a:lnSpc>
-                <a:spcPct val="140000"/>
-              </a:lnSpc>
-            </a:pPr>
             <a:r>
               <a:rPr lang="en-US" sz="1200" dirty="0">
                 <a:solidFill>
@@ -22336,6 +23217,13 @@
           </a:solidFill>
           <a:ln/>
         </p:spPr>
+        <p:txBody>
+          <a:bodyPr/>
+          <a:lstStyle/>
+          <a:p>
+            <a:endParaRPr lang="zh-CN" altLang="en-US"/>
+          </a:p>
+        </p:txBody>
       </p:sp>
       <p:sp>
         <p:nvSpPr>
@@ -22376,11 +23264,6 @@
               </a:rPr>
               <a:t>Combining EDA, regression, and classification gave a </a:t>
             </a:r>
-            <a:pPr>
-              <a:lnSpc>
-                <a:spcPct val="140000"/>
-              </a:lnSpc>
-            </a:pPr>
             <a:r>
               <a:rPr lang="en-US" sz="1200" b="1" dirty="0">
                 <a:solidFill>
@@ -22463,6 +23346,13 @@
           </a:solidFill>
           <a:ln/>
         </p:spPr>
+        <p:txBody>
+          <a:bodyPr/>
+          <a:lstStyle/>
+          <a:p>
+            <a:endParaRPr lang="zh-CN" altLang="en-US"/>
+          </a:p>
+        </p:txBody>
       </p:sp>
       <p:sp>
         <p:nvSpPr>
@@ -22517,6 +23407,13 @@
           </a:solidFill>
           <a:ln/>
         </p:spPr>
+        <p:txBody>
+          <a:bodyPr/>
+          <a:lstStyle/>
+          <a:p>
+            <a:endParaRPr lang="zh-CN" altLang="en-US"/>
+          </a:p>
+        </p:txBody>
       </p:sp>
       <p:sp>
         <p:nvSpPr>
@@ -22629,6 +23526,13 @@
           </a:solidFill>
           <a:ln/>
         </p:spPr>
+        <p:txBody>
+          <a:bodyPr/>
+          <a:lstStyle/>
+          <a:p>
+            <a:endParaRPr lang="zh-CN" altLang="en-US"/>
+          </a:p>
+        </p:txBody>
       </p:sp>
       <p:sp>
         <p:nvSpPr>
@@ -22736,6 +23640,13 @@
           </a:solidFill>
           <a:ln/>
         </p:spPr>
+        <p:txBody>
+          <a:bodyPr/>
+          <a:lstStyle/>
+          <a:p>
+            <a:endParaRPr lang="zh-CN" altLang="en-US"/>
+          </a:p>
+        </p:txBody>
       </p:sp>
       <p:sp>
         <p:nvSpPr>
@@ -22862,6 +23773,13 @@
           </a:solidFill>
           <a:ln/>
         </p:spPr>
+        <p:txBody>
+          <a:bodyPr/>
+          <a:lstStyle/>
+          <a:p>
+            <a:endParaRPr lang="zh-CN" altLang="en-US"/>
+          </a:p>
+        </p:txBody>
       </p:sp>
       <p:sp>
         <p:nvSpPr>
@@ -22969,6 +23887,13 @@
           </a:solidFill>
           <a:ln/>
         </p:spPr>
+        <p:txBody>
+          <a:bodyPr/>
+          <a:lstStyle/>
+          <a:p>
+            <a:endParaRPr lang="zh-CN" altLang="en-US"/>
+          </a:p>
+        </p:txBody>
       </p:sp>
       <p:sp>
         <p:nvSpPr>
@@ -23115,6 +24040,13 @@
           </a:solidFill>
           <a:ln/>
         </p:spPr>
+        <p:txBody>
+          <a:bodyPr/>
+          <a:lstStyle/>
+          <a:p>
+            <a:endParaRPr lang="zh-CN" altLang="en-US"/>
+          </a:p>
+        </p:txBody>
       </p:sp>
       <p:sp>
         <p:nvSpPr>
@@ -23222,6 +24154,13 @@
           </a:solidFill>
           <a:ln/>
         </p:spPr>
+        <p:txBody>
+          <a:bodyPr/>
+          <a:lstStyle/>
+          <a:p>
+            <a:endParaRPr lang="zh-CN" altLang="en-US"/>
+          </a:p>
+        </p:txBody>
       </p:sp>
       <p:sp>
         <p:nvSpPr>
@@ -23347,6 +24286,13 @@
           </a:solidFill>
           <a:ln/>
         </p:spPr>
+        <p:txBody>
+          <a:bodyPr/>
+          <a:lstStyle/>
+          <a:p>
+            <a:endParaRPr lang="zh-CN" altLang="en-US"/>
+          </a:p>
+        </p:txBody>
       </p:sp>
       <p:sp>
         <p:nvSpPr>
@@ -23396,7 +24342,3709 @@
   </p:clrMapOvr>
   <p:transition>
     <p:fade/>
-    <p:spd val="med"/>
+  </p:transition>
+</p:sld>
+</file>
+
+<file path=ppt/slides/slide8.xml><?xml version="1.0" encoding="utf-8"?>
+<p:sld xmlns:a="http://schemas.openxmlformats.org/drawingml/2006/main" xmlns:r="http://schemas.openxmlformats.org/officeDocument/2006/relationships" xmlns:p="http://schemas.openxmlformats.org/presentationml/2006/main">
+  <p:cSld>
+    <p:spTree>
+      <p:nvGrpSpPr>
+        <p:cNvPr id="1" name="">
+          <a:extLst>
+            <a:ext uri="{FF2B5EF4-FFF2-40B4-BE49-F238E27FC236}">
+              <a16:creationId xmlns:a16="http://schemas.microsoft.com/office/drawing/2014/main" id="{9B7179E5-7072-9BC6-3CE8-C2F9A114AC73}"/>
+            </a:ext>
+          </a:extLst>
+        </p:cNvPr>
+        <p:cNvGrpSpPr/>
+        <p:nvPr/>
+      </p:nvGrpSpPr>
+      <p:grpSpPr>
+        <a:xfrm>
+          <a:off x="0" y="0"/>
+          <a:ext cx="0" cy="0"/>
+          <a:chOff x="0" y="0"/>
+          <a:chExt cx="0" cy="0"/>
+        </a:xfrm>
+      </p:grpSpPr>
+      <p:pic>
+        <p:nvPicPr>
+          <p:cNvPr id="2" name="Image 0" descr="https://kimi-web-img.moonshot.cn/img/img.freepik.com/7b963585cd434c230a1d0320543b2a5eac78a64c.jpg">
+            <a:extLst>
+              <a:ext uri="{FF2B5EF4-FFF2-40B4-BE49-F238E27FC236}">
+                <a16:creationId xmlns:a16="http://schemas.microsoft.com/office/drawing/2014/main" id="{443404EF-0229-C101-A60A-440BEEF50624}"/>
+              </a:ext>
+            </a:extLst>
+          </p:cNvPr>
+          <p:cNvPicPr>
+            <a:picLocks noChangeAspect="1"/>
+          </p:cNvPicPr>
+          <p:nvPr/>
+        </p:nvPicPr>
+        <p:blipFill>
+          <a:blip r:embed="rId3">
+            <a:alphaModFix amt="20000"/>
+          </a:blip>
+          <a:srcRect t="681" b="681"/>
+          <a:stretch/>
+        </p:blipFill>
+        <p:spPr>
+          <a:xfrm>
+            <a:off x="0" y="0"/>
+            <a:ext cx="12192000" cy="6858000"/>
+          </a:xfrm>
+          <a:prstGeom prst="roundRect">
+            <a:avLst>
+              <a:gd name="adj" fmla="val 0"/>
+            </a:avLst>
+          </a:prstGeom>
+        </p:spPr>
+      </p:pic>
+      <p:sp>
+        <p:nvSpPr>
+          <p:cNvPr id="3" name="Shape 0">
+            <a:extLst>
+              <a:ext uri="{FF2B5EF4-FFF2-40B4-BE49-F238E27FC236}">
+                <a16:creationId xmlns:a16="http://schemas.microsoft.com/office/drawing/2014/main" id="{AE6EC56F-59D6-6040-6186-8D11D3201A66}"/>
+              </a:ext>
+            </a:extLst>
+          </p:cNvPr>
+          <p:cNvSpPr/>
+          <p:nvPr/>
+        </p:nvSpPr>
+        <p:spPr>
+          <a:xfrm>
+            <a:off x="0" y="0"/>
+            <a:ext cx="12192000" cy="6858000"/>
+          </a:xfrm>
+          <a:custGeom>
+            <a:avLst/>
+            <a:gdLst/>
+            <a:ahLst/>
+            <a:cxnLst/>
+            <a:rect l="l" t="t" r="r" b="b"/>
+            <a:pathLst>
+              <a:path w="12192000" h="6858000">
+                <a:moveTo>
+                  <a:pt x="0" y="0"/>
+                </a:moveTo>
+                <a:lnTo>
+                  <a:pt x="12192000" y="0"/>
+                </a:lnTo>
+                <a:lnTo>
+                  <a:pt x="12192000" y="6858000"/>
+                </a:lnTo>
+                <a:lnTo>
+                  <a:pt x="0" y="6858000"/>
+                </a:lnTo>
+                <a:lnTo>
+                  <a:pt x="0" y="0"/>
+                </a:lnTo>
+                <a:close/>
+              </a:path>
+            </a:pathLst>
+          </a:custGeom>
+          <a:solidFill>
+            <a:srgbClr val="F7F5F3">
+              <a:alpha val="90196"/>
+            </a:srgbClr>
+          </a:solidFill>
+          <a:ln/>
+        </p:spPr>
+        <p:txBody>
+          <a:bodyPr/>
+          <a:lstStyle/>
+          <a:p>
+            <a:endParaRPr lang="zh-CN" altLang="en-US"/>
+          </a:p>
+        </p:txBody>
+      </p:sp>
+      <p:sp>
+        <p:nvSpPr>
+          <p:cNvPr id="4" name="Shape 1">
+            <a:extLst>
+              <a:ext uri="{FF2B5EF4-FFF2-40B4-BE49-F238E27FC236}">
+                <a16:creationId xmlns:a16="http://schemas.microsoft.com/office/drawing/2014/main" id="{90DFDDFB-0898-E23F-DB86-8DD83E95654D}"/>
+              </a:ext>
+            </a:extLst>
+          </p:cNvPr>
+          <p:cNvSpPr/>
+          <p:nvPr/>
+        </p:nvSpPr>
+        <p:spPr>
+          <a:xfrm>
+            <a:off x="381000" y="381000"/>
+            <a:ext cx="381000" cy="381000"/>
+          </a:xfrm>
+          <a:custGeom>
+            <a:avLst/>
+            <a:gdLst/>
+            <a:ahLst/>
+            <a:cxnLst/>
+            <a:rect l="l" t="t" r="r" b="b"/>
+            <a:pathLst>
+              <a:path w="381000" h="381000">
+                <a:moveTo>
+                  <a:pt x="190500" y="0"/>
+                </a:moveTo>
+                <a:lnTo>
+                  <a:pt x="190500" y="0"/>
+                </a:lnTo>
+                <a:cubicBezTo>
+                  <a:pt x="295640" y="0"/>
+                  <a:pt x="381000" y="85360"/>
+                  <a:pt x="381000" y="190500"/>
+                </a:cubicBezTo>
+                <a:lnTo>
+                  <a:pt x="381000" y="190500"/>
+                </a:lnTo>
+                <a:cubicBezTo>
+                  <a:pt x="381000" y="295640"/>
+                  <a:pt x="295640" y="381000"/>
+                  <a:pt x="190500" y="381000"/>
+                </a:cubicBezTo>
+                <a:lnTo>
+                  <a:pt x="190500" y="381000"/>
+                </a:lnTo>
+                <a:cubicBezTo>
+                  <a:pt x="85360" y="381000"/>
+                  <a:pt x="0" y="295640"/>
+                  <a:pt x="0" y="190500"/>
+                </a:cubicBezTo>
+                <a:lnTo>
+                  <a:pt x="0" y="190500"/>
+                </a:lnTo>
+                <a:cubicBezTo>
+                  <a:pt x="0" y="85360"/>
+                  <a:pt x="85360" y="0"/>
+                  <a:pt x="190500" y="0"/>
+                </a:cubicBezTo>
+                <a:close/>
+              </a:path>
+            </a:pathLst>
+          </a:custGeom>
+          <a:solidFill>
+            <a:srgbClr val="9B8E7D"/>
+          </a:solidFill>
+          <a:ln/>
+        </p:spPr>
+        <p:txBody>
+          <a:bodyPr/>
+          <a:lstStyle/>
+          <a:p>
+            <a:endParaRPr lang="zh-CN" altLang="en-US"/>
+          </a:p>
+        </p:txBody>
+      </p:sp>
+      <p:sp>
+        <p:nvSpPr>
+          <p:cNvPr id="5" name="Text 2">
+            <a:extLst>
+              <a:ext uri="{FF2B5EF4-FFF2-40B4-BE49-F238E27FC236}">
+                <a16:creationId xmlns:a16="http://schemas.microsoft.com/office/drawing/2014/main" id="{38DB7106-611B-6A94-3D0A-74CF590A6CD8}"/>
+              </a:ext>
+            </a:extLst>
+          </p:cNvPr>
+          <p:cNvSpPr/>
+          <p:nvPr/>
+        </p:nvSpPr>
+        <p:spPr>
+          <a:xfrm>
+            <a:off x="338138" y="381000"/>
+            <a:ext cx="466725" cy="381000"/>
+          </a:xfrm>
+          <a:prstGeom prst="rect">
+            <a:avLst/>
+          </a:prstGeom>
+          <a:noFill/>
+          <a:ln/>
+        </p:spPr>
+        <p:txBody>
+          <a:bodyPr wrap="square" lIns="0" tIns="0" rIns="0" bIns="0" rtlCol="0" anchor="ctr"/>
+          <a:lstStyle/>
+          <a:p>
+            <a:pPr algn="ctr">
+              <a:lnSpc>
+                <a:spcPct val="130000"/>
+              </a:lnSpc>
+            </a:pPr>
+            <a:r>
+              <a:rPr lang="en-US" sz="1350" b="1" dirty="0">
+                <a:solidFill>
+                  <a:srgbClr val="F7F5F3"/>
+                </a:solidFill>
+                <a:latin typeface="Quattrocento Sans" pitchFamily="34" charset="0"/>
+              </a:rPr>
+              <a:t>7</a:t>
+            </a:r>
+            <a:endParaRPr lang="en-US" sz="1600" dirty="0"/>
+          </a:p>
+        </p:txBody>
+      </p:sp>
+      <p:sp>
+        <p:nvSpPr>
+          <p:cNvPr id="6" name="Text 3">
+            <a:extLst>
+              <a:ext uri="{FF2B5EF4-FFF2-40B4-BE49-F238E27FC236}">
+                <a16:creationId xmlns:a16="http://schemas.microsoft.com/office/drawing/2014/main" id="{0B9B9E9E-0029-BB1B-B0ED-B961BC799727}"/>
+              </a:ext>
+            </a:extLst>
+          </p:cNvPr>
+          <p:cNvSpPr/>
+          <p:nvPr/>
+        </p:nvSpPr>
+        <p:spPr>
+          <a:xfrm>
+            <a:off x="876300" y="381000"/>
+            <a:ext cx="5762625" cy="381000"/>
+          </a:xfrm>
+          <a:prstGeom prst="rect">
+            <a:avLst/>
+          </a:prstGeom>
+          <a:noFill/>
+          <a:ln/>
+        </p:spPr>
+        <p:txBody>
+          <a:bodyPr wrap="square" lIns="0" tIns="0" rIns="0" bIns="0" rtlCol="0" anchor="ctr"/>
+          <a:lstStyle/>
+          <a:p>
+            <a:pPr>
+              <a:lnSpc>
+                <a:spcPct val="90000"/>
+              </a:lnSpc>
+            </a:pPr>
+            <a:r>
+              <a:rPr lang="en-US" altLang="zh-CN" sz="2700" b="1" dirty="0">
+                <a:solidFill>
+                  <a:srgbClr val="5C5650"/>
+                </a:solidFill>
+                <a:latin typeface="Liter" pitchFamily="34" charset="0"/>
+                <a:ea typeface="Liter" pitchFamily="34" charset="-122"/>
+                <a:cs typeface="Liter" pitchFamily="34" charset="-120"/>
+              </a:rPr>
+              <a:t>Ack</a:t>
+            </a:r>
+            <a:endParaRPr lang="en-US" sz="1600" dirty="0"/>
+          </a:p>
+        </p:txBody>
+      </p:sp>
+      <p:sp>
+        <p:nvSpPr>
+          <p:cNvPr id="7" name="Shape 4">
+            <a:extLst>
+              <a:ext uri="{FF2B5EF4-FFF2-40B4-BE49-F238E27FC236}">
+                <a16:creationId xmlns:a16="http://schemas.microsoft.com/office/drawing/2014/main" id="{77F61122-C066-2C58-18C2-95CCD6166331}"/>
+              </a:ext>
+            </a:extLst>
+          </p:cNvPr>
+          <p:cNvSpPr/>
+          <p:nvPr/>
+        </p:nvSpPr>
+        <p:spPr>
+          <a:xfrm>
+            <a:off x="400050" y="1028700"/>
+            <a:ext cx="3667125" cy="3114675"/>
+          </a:xfrm>
+          <a:custGeom>
+            <a:avLst/>
+            <a:gdLst/>
+            <a:ahLst/>
+            <a:cxnLst/>
+            <a:rect l="l" t="t" r="r" b="b"/>
+            <a:pathLst>
+              <a:path w="3667125" h="3114675">
+                <a:moveTo>
+                  <a:pt x="38100" y="0"/>
+                </a:moveTo>
+                <a:lnTo>
+                  <a:pt x="3590940" y="0"/>
+                </a:lnTo>
+                <a:cubicBezTo>
+                  <a:pt x="3633016" y="0"/>
+                  <a:pt x="3667125" y="34109"/>
+                  <a:pt x="3667125" y="76185"/>
+                </a:cubicBezTo>
+                <a:lnTo>
+                  <a:pt x="3667125" y="3038490"/>
+                </a:lnTo>
+                <a:cubicBezTo>
+                  <a:pt x="3667125" y="3080566"/>
+                  <a:pt x="3633016" y="3114675"/>
+                  <a:pt x="3590940" y="3114675"/>
+                </a:cubicBezTo>
+                <a:lnTo>
+                  <a:pt x="38100" y="3114675"/>
+                </a:lnTo>
+                <a:cubicBezTo>
+                  <a:pt x="17058" y="3114675"/>
+                  <a:pt x="0" y="3097617"/>
+                  <a:pt x="0" y="3076575"/>
+                </a:cubicBezTo>
+                <a:lnTo>
+                  <a:pt x="0" y="38100"/>
+                </a:lnTo>
+                <a:cubicBezTo>
+                  <a:pt x="0" y="17072"/>
+                  <a:pt x="17072" y="0"/>
+                  <a:pt x="38100" y="0"/>
+                </a:cubicBezTo>
+                <a:close/>
+              </a:path>
+            </a:pathLst>
+          </a:custGeom>
+          <a:solidFill>
+            <a:srgbClr val="FFFFFF">
+              <a:alpha val="80000"/>
+            </a:srgbClr>
+          </a:solidFill>
+          <a:ln/>
+          <a:effectLst>
+            <a:outerShdw blurRad="28575" dist="9525" dir="5400000" algn="bl" rotWithShape="0">
+              <a:srgbClr val="000000">
+                <a:alpha val="10196"/>
+              </a:srgbClr>
+            </a:outerShdw>
+          </a:effectLst>
+        </p:spPr>
+        <p:txBody>
+          <a:bodyPr/>
+          <a:lstStyle/>
+          <a:p>
+            <a:endParaRPr lang="zh-CN" altLang="en-US"/>
+          </a:p>
+        </p:txBody>
+      </p:sp>
+      <p:sp>
+        <p:nvSpPr>
+          <p:cNvPr id="8" name="Shape 5">
+            <a:extLst>
+              <a:ext uri="{FF2B5EF4-FFF2-40B4-BE49-F238E27FC236}">
+                <a16:creationId xmlns:a16="http://schemas.microsoft.com/office/drawing/2014/main" id="{0560717D-4FF4-342F-DF46-3C401C9B78B6}"/>
+              </a:ext>
+            </a:extLst>
+          </p:cNvPr>
+          <p:cNvSpPr/>
+          <p:nvPr/>
+        </p:nvSpPr>
+        <p:spPr>
+          <a:xfrm>
+            <a:off x="400050" y="1028700"/>
+            <a:ext cx="38100" cy="3114675"/>
+          </a:xfrm>
+          <a:custGeom>
+            <a:avLst/>
+            <a:gdLst/>
+            <a:ahLst/>
+            <a:cxnLst/>
+            <a:rect l="l" t="t" r="r" b="b"/>
+            <a:pathLst>
+              <a:path w="38100" h="3114675">
+                <a:moveTo>
+                  <a:pt x="38100" y="0"/>
+                </a:moveTo>
+                <a:lnTo>
+                  <a:pt x="38100" y="0"/>
+                </a:lnTo>
+                <a:lnTo>
+                  <a:pt x="38100" y="3114675"/>
+                </a:lnTo>
+                <a:lnTo>
+                  <a:pt x="38100" y="3114675"/>
+                </a:lnTo>
+                <a:cubicBezTo>
+                  <a:pt x="17072" y="3114675"/>
+                  <a:pt x="0" y="3097603"/>
+                  <a:pt x="0" y="3076575"/>
+                </a:cubicBezTo>
+                <a:lnTo>
+                  <a:pt x="0" y="38100"/>
+                </a:lnTo>
+                <a:cubicBezTo>
+                  <a:pt x="0" y="17072"/>
+                  <a:pt x="17072" y="0"/>
+                  <a:pt x="38100" y="0"/>
+                </a:cubicBezTo>
+                <a:close/>
+              </a:path>
+            </a:pathLst>
+          </a:custGeom>
+          <a:solidFill>
+            <a:srgbClr val="C4A99B"/>
+          </a:solidFill>
+          <a:ln/>
+        </p:spPr>
+        <p:txBody>
+          <a:bodyPr/>
+          <a:lstStyle/>
+          <a:p>
+            <a:endParaRPr lang="zh-CN" altLang="en-US"/>
+          </a:p>
+        </p:txBody>
+      </p:sp>
+      <p:sp>
+        <p:nvSpPr>
+          <p:cNvPr id="9" name="Shape 6">
+            <a:extLst>
+              <a:ext uri="{FF2B5EF4-FFF2-40B4-BE49-F238E27FC236}">
+                <a16:creationId xmlns:a16="http://schemas.microsoft.com/office/drawing/2014/main" id="{32132A77-9034-23D6-1EEF-79E9D7AD177A}"/>
+              </a:ext>
+            </a:extLst>
+          </p:cNvPr>
+          <p:cNvSpPr/>
+          <p:nvPr/>
+        </p:nvSpPr>
+        <p:spPr>
+          <a:xfrm>
+            <a:off x="633413" y="1257300"/>
+            <a:ext cx="190500" cy="190500"/>
+          </a:xfrm>
+          <a:custGeom>
+            <a:avLst/>
+            <a:gdLst/>
+            <a:ahLst/>
+            <a:cxnLst/>
+            <a:rect l="l" t="t" r="r" b="b"/>
+            <a:pathLst>
+              <a:path w="190500" h="190500">
+                <a:moveTo>
+                  <a:pt x="95250" y="0"/>
+                </a:moveTo>
+                <a:cubicBezTo>
+                  <a:pt x="100719" y="0"/>
+                  <a:pt x="105742" y="3014"/>
+                  <a:pt x="108347" y="7813"/>
+                </a:cubicBezTo>
+                <a:lnTo>
+                  <a:pt x="188714" y="156642"/>
+                </a:lnTo>
+                <a:cubicBezTo>
+                  <a:pt x="191207" y="161255"/>
+                  <a:pt x="191095" y="166836"/>
+                  <a:pt x="188416" y="171338"/>
+                </a:cubicBezTo>
+                <a:cubicBezTo>
+                  <a:pt x="185737" y="175840"/>
+                  <a:pt x="180863" y="178594"/>
+                  <a:pt x="175617" y="178594"/>
+                </a:cubicBezTo>
+                <a:lnTo>
+                  <a:pt x="14883" y="178594"/>
+                </a:lnTo>
+                <a:cubicBezTo>
+                  <a:pt x="9637" y="178594"/>
+                  <a:pt x="4800" y="175840"/>
+                  <a:pt x="2084" y="171338"/>
+                </a:cubicBezTo>
+                <a:cubicBezTo>
+                  <a:pt x="-633" y="166836"/>
+                  <a:pt x="-707" y="161255"/>
+                  <a:pt x="1786" y="156642"/>
+                </a:cubicBezTo>
+                <a:lnTo>
+                  <a:pt x="82153" y="7813"/>
+                </a:lnTo>
+                <a:cubicBezTo>
+                  <a:pt x="84758" y="3014"/>
+                  <a:pt x="89781" y="0"/>
+                  <a:pt x="95250" y="0"/>
+                </a:cubicBezTo>
+                <a:close/>
+                <a:moveTo>
+                  <a:pt x="95250" y="62508"/>
+                </a:moveTo>
+                <a:cubicBezTo>
+                  <a:pt x="90301" y="62508"/>
+                  <a:pt x="86320" y="66489"/>
+                  <a:pt x="86320" y="71438"/>
+                </a:cubicBezTo>
+                <a:lnTo>
+                  <a:pt x="86320" y="113109"/>
+                </a:lnTo>
+                <a:cubicBezTo>
+                  <a:pt x="86320" y="118058"/>
+                  <a:pt x="90301" y="122039"/>
+                  <a:pt x="95250" y="122039"/>
+                </a:cubicBezTo>
+                <a:cubicBezTo>
+                  <a:pt x="100199" y="122039"/>
+                  <a:pt x="104180" y="118058"/>
+                  <a:pt x="104180" y="113109"/>
+                </a:cubicBezTo>
+                <a:lnTo>
+                  <a:pt x="104180" y="71438"/>
+                </a:lnTo>
+                <a:cubicBezTo>
+                  <a:pt x="104180" y="66489"/>
+                  <a:pt x="100199" y="62508"/>
+                  <a:pt x="95250" y="62508"/>
+                </a:cubicBezTo>
+                <a:close/>
+                <a:moveTo>
+                  <a:pt x="105184" y="142875"/>
+                </a:moveTo>
+                <a:cubicBezTo>
+                  <a:pt x="105410" y="139188"/>
+                  <a:pt x="103571" y="135679"/>
+                  <a:pt x="100410" y="133767"/>
+                </a:cubicBezTo>
+                <a:cubicBezTo>
+                  <a:pt x="97249" y="131855"/>
+                  <a:pt x="93288" y="131855"/>
+                  <a:pt x="90127" y="133767"/>
+                </a:cubicBezTo>
+                <a:cubicBezTo>
+                  <a:pt x="86966" y="135679"/>
+                  <a:pt x="85127" y="139188"/>
+                  <a:pt x="85353" y="142875"/>
+                </a:cubicBezTo>
+                <a:cubicBezTo>
+                  <a:pt x="85127" y="146562"/>
+                  <a:pt x="86966" y="150071"/>
+                  <a:pt x="90127" y="151983"/>
+                </a:cubicBezTo>
+                <a:cubicBezTo>
+                  <a:pt x="93288" y="153895"/>
+                  <a:pt x="97249" y="153895"/>
+                  <a:pt x="100410" y="151983"/>
+                </a:cubicBezTo>
+                <a:cubicBezTo>
+                  <a:pt x="103571" y="150071"/>
+                  <a:pt x="105410" y="146562"/>
+                  <a:pt x="105184" y="142875"/>
+                </a:cubicBezTo>
+                <a:close/>
+              </a:path>
+            </a:pathLst>
+          </a:custGeom>
+          <a:solidFill>
+            <a:srgbClr val="C4A99B"/>
+          </a:solidFill>
+          <a:ln/>
+        </p:spPr>
+        <p:txBody>
+          <a:bodyPr/>
+          <a:lstStyle/>
+          <a:p>
+            <a:endParaRPr lang="zh-CN" altLang="en-US"/>
+          </a:p>
+        </p:txBody>
+      </p:sp>
+      <p:sp>
+        <p:nvSpPr>
+          <p:cNvPr id="10" name="Text 7">
+            <a:extLst>
+              <a:ext uri="{FF2B5EF4-FFF2-40B4-BE49-F238E27FC236}">
+                <a16:creationId xmlns:a16="http://schemas.microsoft.com/office/drawing/2014/main" id="{5C044A69-F178-884E-4D07-830AC86ECB0D}"/>
+              </a:ext>
+            </a:extLst>
+          </p:cNvPr>
+          <p:cNvSpPr/>
+          <p:nvPr/>
+        </p:nvSpPr>
+        <p:spPr>
+          <a:xfrm>
+            <a:off x="847725" y="1219200"/>
+            <a:ext cx="3124200" cy="266700"/>
+          </a:xfrm>
+          <a:prstGeom prst="rect">
+            <a:avLst/>
+          </a:prstGeom>
+          <a:noFill/>
+          <a:ln/>
+        </p:spPr>
+        <p:txBody>
+          <a:bodyPr wrap="square" lIns="0" tIns="0" rIns="0" bIns="0" rtlCol="0" anchor="ctr"/>
+          <a:lstStyle/>
+          <a:p>
+            <a:pPr>
+              <a:lnSpc>
+                <a:spcPct val="120000"/>
+              </a:lnSpc>
+            </a:pPr>
+            <a:r>
+              <a:rPr lang="en-US" sz="1500" b="1" dirty="0">
+                <a:solidFill>
+                  <a:srgbClr val="5C5650"/>
+                </a:solidFill>
+                <a:latin typeface="Liter" pitchFamily="34" charset="0"/>
+                <a:ea typeface="Liter" pitchFamily="34" charset="-122"/>
+                <a:cs typeface="Liter" pitchFamily="34" charset="-120"/>
+              </a:rPr>
+              <a:t>Difficulties We Faced</a:t>
+            </a:r>
+            <a:endParaRPr lang="en-US" sz="1600" dirty="0"/>
+          </a:p>
+        </p:txBody>
+      </p:sp>
+      <p:sp>
+        <p:nvSpPr>
+          <p:cNvPr id="11" name="Shape 8">
+            <a:extLst>
+              <a:ext uri="{FF2B5EF4-FFF2-40B4-BE49-F238E27FC236}">
+                <a16:creationId xmlns:a16="http://schemas.microsoft.com/office/drawing/2014/main" id="{A4AF267D-8305-3F34-7F9B-96505BEFFBF6}"/>
+              </a:ext>
+            </a:extLst>
+          </p:cNvPr>
+          <p:cNvSpPr/>
+          <p:nvPr/>
+        </p:nvSpPr>
+        <p:spPr>
+          <a:xfrm>
+            <a:off x="609600" y="1714500"/>
+            <a:ext cx="76200" cy="76200"/>
+          </a:xfrm>
+          <a:custGeom>
+            <a:avLst/>
+            <a:gdLst/>
+            <a:ahLst/>
+            <a:cxnLst/>
+            <a:rect l="l" t="t" r="r" b="b"/>
+            <a:pathLst>
+              <a:path w="76200" h="76200">
+                <a:moveTo>
+                  <a:pt x="38100" y="0"/>
+                </a:moveTo>
+                <a:lnTo>
+                  <a:pt x="38100" y="0"/>
+                </a:lnTo>
+                <a:cubicBezTo>
+                  <a:pt x="59128" y="0"/>
+                  <a:pt x="76200" y="17072"/>
+                  <a:pt x="76200" y="38100"/>
+                </a:cubicBezTo>
+                <a:lnTo>
+                  <a:pt x="76200" y="38100"/>
+                </a:lnTo>
+                <a:cubicBezTo>
+                  <a:pt x="76200" y="59128"/>
+                  <a:pt x="59128" y="76200"/>
+                  <a:pt x="38100" y="76200"/>
+                </a:cubicBezTo>
+                <a:lnTo>
+                  <a:pt x="38100" y="76200"/>
+                </a:lnTo>
+                <a:cubicBezTo>
+                  <a:pt x="17072" y="76200"/>
+                  <a:pt x="0" y="59128"/>
+                  <a:pt x="0" y="38100"/>
+                </a:cubicBezTo>
+                <a:lnTo>
+                  <a:pt x="0" y="38100"/>
+                </a:lnTo>
+                <a:cubicBezTo>
+                  <a:pt x="0" y="17072"/>
+                  <a:pt x="17072" y="0"/>
+                  <a:pt x="38100" y="0"/>
+                </a:cubicBezTo>
+                <a:close/>
+              </a:path>
+            </a:pathLst>
+          </a:custGeom>
+          <a:solidFill>
+            <a:srgbClr val="C4A99B"/>
+          </a:solidFill>
+          <a:ln/>
+        </p:spPr>
+        <p:txBody>
+          <a:bodyPr/>
+          <a:lstStyle/>
+          <a:p>
+            <a:endParaRPr lang="zh-CN" altLang="en-US"/>
+          </a:p>
+        </p:txBody>
+      </p:sp>
+      <p:sp>
+        <p:nvSpPr>
+          <p:cNvPr id="12" name="Text 9">
+            <a:extLst>
+              <a:ext uri="{FF2B5EF4-FFF2-40B4-BE49-F238E27FC236}">
+                <a16:creationId xmlns:a16="http://schemas.microsoft.com/office/drawing/2014/main" id="{8DD69A10-A80E-2BDF-98EA-8D948C841088}"/>
+              </a:ext>
+            </a:extLst>
+          </p:cNvPr>
+          <p:cNvSpPr/>
+          <p:nvPr/>
+        </p:nvSpPr>
+        <p:spPr>
+          <a:xfrm>
+            <a:off x="800100" y="1638300"/>
+            <a:ext cx="3152775" cy="495300"/>
+          </a:xfrm>
+          <a:prstGeom prst="rect">
+            <a:avLst/>
+          </a:prstGeom>
+          <a:noFill/>
+          <a:ln/>
+        </p:spPr>
+        <p:txBody>
+          <a:bodyPr wrap="square" lIns="0" tIns="0" rIns="0" bIns="0" rtlCol="0" anchor="ctr"/>
+          <a:lstStyle/>
+          <a:p>
+            <a:pPr>
+              <a:lnSpc>
+                <a:spcPct val="140000"/>
+              </a:lnSpc>
+            </a:pPr>
+            <a:r>
+              <a:rPr lang="en-US" sz="1200" dirty="0">
+                <a:solidFill>
+                  <a:srgbClr val="5C5650">
+                    <a:alpha val="80000"/>
+                  </a:srgbClr>
+                </a:solidFill>
+                <a:latin typeface="Quattrocento Sans" pitchFamily="34" charset="0"/>
+                <a:ea typeface="Quattrocento Sans" pitchFamily="34" charset="-122"/>
+                <a:cs typeface="Quattrocento Sans" pitchFamily="34" charset="-120"/>
+              </a:rPr>
+              <a:t>Some visually promising variables were </a:t>
+            </a:r>
+            <a:r>
+              <a:rPr lang="en-US" sz="1200" b="1" dirty="0">
+                <a:solidFill>
+                  <a:srgbClr val="5C5650">
+                    <a:alpha val="80000"/>
+                  </a:srgbClr>
+                </a:solidFill>
+                <a:latin typeface="Quattrocento Sans" pitchFamily="34" charset="0"/>
+                <a:ea typeface="Quattrocento Sans" pitchFamily="34" charset="-122"/>
+                <a:cs typeface="Quattrocento Sans" pitchFamily="34" charset="-120"/>
+              </a:rPr>
+              <a:t>not significant</a:t>
+            </a:r>
+            <a:r>
+              <a:rPr lang="en-US" sz="1200" dirty="0">
+                <a:solidFill>
+                  <a:srgbClr val="5C5650">
+                    <a:alpha val="80000"/>
+                  </a:srgbClr>
+                </a:solidFill>
+                <a:latin typeface="Quattrocento Sans" pitchFamily="34" charset="0"/>
+                <a:ea typeface="Quattrocento Sans" pitchFamily="34" charset="-122"/>
+                <a:cs typeface="Quattrocento Sans" pitchFamily="34" charset="-120"/>
+              </a:rPr>
+              <a:t> in final models</a:t>
+            </a:r>
+            <a:endParaRPr lang="en-US" sz="1600" dirty="0"/>
+          </a:p>
+        </p:txBody>
+      </p:sp>
+      <p:sp>
+        <p:nvSpPr>
+          <p:cNvPr id="13" name="Shape 10">
+            <a:extLst>
+              <a:ext uri="{FF2B5EF4-FFF2-40B4-BE49-F238E27FC236}">
+                <a16:creationId xmlns:a16="http://schemas.microsoft.com/office/drawing/2014/main" id="{73BDAC4C-FF65-2D12-66D7-15AAFAAE5A8C}"/>
+              </a:ext>
+            </a:extLst>
+          </p:cNvPr>
+          <p:cNvSpPr/>
+          <p:nvPr/>
+        </p:nvSpPr>
+        <p:spPr>
+          <a:xfrm>
+            <a:off x="609600" y="2362200"/>
+            <a:ext cx="76200" cy="76200"/>
+          </a:xfrm>
+          <a:custGeom>
+            <a:avLst/>
+            <a:gdLst/>
+            <a:ahLst/>
+            <a:cxnLst/>
+            <a:rect l="l" t="t" r="r" b="b"/>
+            <a:pathLst>
+              <a:path w="76200" h="76200">
+                <a:moveTo>
+                  <a:pt x="38100" y="0"/>
+                </a:moveTo>
+                <a:lnTo>
+                  <a:pt x="38100" y="0"/>
+                </a:lnTo>
+                <a:cubicBezTo>
+                  <a:pt x="59128" y="0"/>
+                  <a:pt x="76200" y="17072"/>
+                  <a:pt x="76200" y="38100"/>
+                </a:cubicBezTo>
+                <a:lnTo>
+                  <a:pt x="76200" y="38100"/>
+                </a:lnTo>
+                <a:cubicBezTo>
+                  <a:pt x="76200" y="59128"/>
+                  <a:pt x="59128" y="76200"/>
+                  <a:pt x="38100" y="76200"/>
+                </a:cubicBezTo>
+                <a:lnTo>
+                  <a:pt x="38100" y="76200"/>
+                </a:lnTo>
+                <a:cubicBezTo>
+                  <a:pt x="17072" y="76200"/>
+                  <a:pt x="0" y="59128"/>
+                  <a:pt x="0" y="38100"/>
+                </a:cubicBezTo>
+                <a:lnTo>
+                  <a:pt x="0" y="38100"/>
+                </a:lnTo>
+                <a:cubicBezTo>
+                  <a:pt x="0" y="17072"/>
+                  <a:pt x="17072" y="0"/>
+                  <a:pt x="38100" y="0"/>
+                </a:cubicBezTo>
+                <a:close/>
+              </a:path>
+            </a:pathLst>
+          </a:custGeom>
+          <a:solidFill>
+            <a:srgbClr val="C4A99B"/>
+          </a:solidFill>
+          <a:ln/>
+        </p:spPr>
+        <p:txBody>
+          <a:bodyPr/>
+          <a:lstStyle/>
+          <a:p>
+            <a:endParaRPr lang="zh-CN" altLang="en-US"/>
+          </a:p>
+        </p:txBody>
+      </p:sp>
+      <p:sp>
+        <p:nvSpPr>
+          <p:cNvPr id="14" name="Text 11">
+            <a:extLst>
+              <a:ext uri="{FF2B5EF4-FFF2-40B4-BE49-F238E27FC236}">
+                <a16:creationId xmlns:a16="http://schemas.microsoft.com/office/drawing/2014/main" id="{4CF257DB-2488-BF18-34D0-F4C6CE88CE70}"/>
+              </a:ext>
+            </a:extLst>
+          </p:cNvPr>
+          <p:cNvSpPr/>
+          <p:nvPr/>
+        </p:nvSpPr>
+        <p:spPr>
+          <a:xfrm>
+            <a:off x="800100" y="2286000"/>
+            <a:ext cx="3152775" cy="495300"/>
+          </a:xfrm>
+          <a:prstGeom prst="rect">
+            <a:avLst/>
+          </a:prstGeom>
+          <a:noFill/>
+          <a:ln/>
+        </p:spPr>
+        <p:txBody>
+          <a:bodyPr wrap="square" lIns="0" tIns="0" rIns="0" bIns="0" rtlCol="0" anchor="ctr"/>
+          <a:lstStyle/>
+          <a:p>
+            <a:pPr>
+              <a:lnSpc>
+                <a:spcPct val="140000"/>
+              </a:lnSpc>
+            </a:pPr>
+            <a:r>
+              <a:rPr lang="en-US" sz="1200" dirty="0">
+                <a:solidFill>
+                  <a:srgbClr val="5C5650">
+                    <a:alpha val="80000"/>
+                  </a:srgbClr>
+                </a:solidFill>
+                <a:latin typeface="Quattrocento Sans" pitchFamily="34" charset="0"/>
+                <a:ea typeface="Quattrocento Sans" pitchFamily="34" charset="-122"/>
+                <a:cs typeface="Quattrocento Sans" pitchFamily="34" charset="-120"/>
+              </a:rPr>
+              <a:t>Logistic modelling initially </a:t>
+            </a:r>
+            <a:r>
+              <a:rPr lang="en-US" sz="1200" b="1" dirty="0">
+                <a:solidFill>
+                  <a:srgbClr val="5C5650">
+                    <a:alpha val="80000"/>
+                  </a:srgbClr>
+                </a:solidFill>
+                <a:latin typeface="Quattrocento Sans" pitchFamily="34" charset="0"/>
+                <a:ea typeface="Quattrocento Sans" pitchFamily="34" charset="-122"/>
+                <a:cs typeface="Quattrocento Sans" pitchFamily="34" charset="-120"/>
+              </a:rPr>
+              <a:t>failed due to preprocessing order</a:t>
+            </a:r>
+            <a:endParaRPr lang="en-US" sz="1600" dirty="0"/>
+          </a:p>
+        </p:txBody>
+      </p:sp>
+      <p:sp>
+        <p:nvSpPr>
+          <p:cNvPr id="15" name="Shape 12">
+            <a:extLst>
+              <a:ext uri="{FF2B5EF4-FFF2-40B4-BE49-F238E27FC236}">
+                <a16:creationId xmlns:a16="http://schemas.microsoft.com/office/drawing/2014/main" id="{F58B0059-F40B-72C1-C25D-A9AB833FDCAE}"/>
+              </a:ext>
+            </a:extLst>
+          </p:cNvPr>
+          <p:cNvSpPr/>
+          <p:nvPr/>
+        </p:nvSpPr>
+        <p:spPr>
+          <a:xfrm>
+            <a:off x="609600" y="3009900"/>
+            <a:ext cx="76200" cy="76200"/>
+          </a:xfrm>
+          <a:custGeom>
+            <a:avLst/>
+            <a:gdLst/>
+            <a:ahLst/>
+            <a:cxnLst/>
+            <a:rect l="l" t="t" r="r" b="b"/>
+            <a:pathLst>
+              <a:path w="76200" h="76200">
+                <a:moveTo>
+                  <a:pt x="38100" y="0"/>
+                </a:moveTo>
+                <a:lnTo>
+                  <a:pt x="38100" y="0"/>
+                </a:lnTo>
+                <a:cubicBezTo>
+                  <a:pt x="59128" y="0"/>
+                  <a:pt x="76200" y="17072"/>
+                  <a:pt x="76200" y="38100"/>
+                </a:cubicBezTo>
+                <a:lnTo>
+                  <a:pt x="76200" y="38100"/>
+                </a:lnTo>
+                <a:cubicBezTo>
+                  <a:pt x="76200" y="59128"/>
+                  <a:pt x="59128" y="76200"/>
+                  <a:pt x="38100" y="76200"/>
+                </a:cubicBezTo>
+                <a:lnTo>
+                  <a:pt x="38100" y="76200"/>
+                </a:lnTo>
+                <a:cubicBezTo>
+                  <a:pt x="17072" y="76200"/>
+                  <a:pt x="0" y="59128"/>
+                  <a:pt x="0" y="38100"/>
+                </a:cubicBezTo>
+                <a:lnTo>
+                  <a:pt x="0" y="38100"/>
+                </a:lnTo>
+                <a:cubicBezTo>
+                  <a:pt x="0" y="17072"/>
+                  <a:pt x="17072" y="0"/>
+                  <a:pt x="38100" y="0"/>
+                </a:cubicBezTo>
+                <a:close/>
+              </a:path>
+            </a:pathLst>
+          </a:custGeom>
+          <a:solidFill>
+            <a:srgbClr val="C4A99B"/>
+          </a:solidFill>
+          <a:ln/>
+        </p:spPr>
+        <p:txBody>
+          <a:bodyPr/>
+          <a:lstStyle/>
+          <a:p>
+            <a:endParaRPr lang="zh-CN" altLang="en-US"/>
+          </a:p>
+        </p:txBody>
+      </p:sp>
+      <p:sp>
+        <p:nvSpPr>
+          <p:cNvPr id="16" name="Text 13">
+            <a:extLst>
+              <a:ext uri="{FF2B5EF4-FFF2-40B4-BE49-F238E27FC236}">
+                <a16:creationId xmlns:a16="http://schemas.microsoft.com/office/drawing/2014/main" id="{328CDF25-DFE6-EB8D-09F7-69A79F342F6D}"/>
+              </a:ext>
+            </a:extLst>
+          </p:cNvPr>
+          <p:cNvSpPr/>
+          <p:nvPr/>
+        </p:nvSpPr>
+        <p:spPr>
+          <a:xfrm>
+            <a:off x="800100" y="2933700"/>
+            <a:ext cx="3152775" cy="495300"/>
+          </a:xfrm>
+          <a:prstGeom prst="rect">
+            <a:avLst/>
+          </a:prstGeom>
+          <a:noFill/>
+          <a:ln/>
+        </p:spPr>
+        <p:txBody>
+          <a:bodyPr wrap="square" lIns="0" tIns="0" rIns="0" bIns="0" rtlCol="0" anchor="ctr"/>
+          <a:lstStyle/>
+          <a:p>
+            <a:pPr>
+              <a:lnSpc>
+                <a:spcPct val="140000"/>
+              </a:lnSpc>
+            </a:pPr>
+            <a:r>
+              <a:rPr lang="en-US" sz="1200" dirty="0">
+                <a:solidFill>
+                  <a:srgbClr val="5C5650">
+                    <a:alpha val="80000"/>
+                  </a:srgbClr>
+                </a:solidFill>
+                <a:latin typeface="Quattrocento Sans" pitchFamily="34" charset="0"/>
+                <a:ea typeface="Quattrocento Sans" pitchFamily="34" charset="-122"/>
+                <a:cs typeface="Quattrocento Sans" pitchFamily="34" charset="-120"/>
+              </a:rPr>
+              <a:t>We learned that </a:t>
+            </a:r>
+            <a:r>
+              <a:rPr lang="en-US" sz="1200" b="1" dirty="0">
+                <a:solidFill>
+                  <a:srgbClr val="5C5650">
+                    <a:alpha val="80000"/>
+                  </a:srgbClr>
+                </a:solidFill>
+                <a:latin typeface="Quattrocento Sans" pitchFamily="34" charset="0"/>
+                <a:ea typeface="Quattrocento Sans" pitchFamily="34" charset="-122"/>
+                <a:cs typeface="Quattrocento Sans" pitchFamily="34" charset="-120"/>
+              </a:rPr>
+              <a:t>target creation should happen before train/test split</a:t>
+            </a:r>
+            <a:endParaRPr lang="en-US" sz="1600" dirty="0"/>
+          </a:p>
+        </p:txBody>
+      </p:sp>
+      <p:sp>
+        <p:nvSpPr>
+          <p:cNvPr id="17" name="Shape 14">
+            <a:extLst>
+              <a:ext uri="{FF2B5EF4-FFF2-40B4-BE49-F238E27FC236}">
+                <a16:creationId xmlns:a16="http://schemas.microsoft.com/office/drawing/2014/main" id="{A0D84393-9257-8B1B-F283-18D9706E404A}"/>
+              </a:ext>
+            </a:extLst>
+          </p:cNvPr>
+          <p:cNvSpPr/>
+          <p:nvPr/>
+        </p:nvSpPr>
+        <p:spPr>
+          <a:xfrm>
+            <a:off x="4273451" y="1028700"/>
+            <a:ext cx="3667125" cy="3114675"/>
+          </a:xfrm>
+          <a:custGeom>
+            <a:avLst/>
+            <a:gdLst/>
+            <a:ahLst/>
+            <a:cxnLst/>
+            <a:rect l="l" t="t" r="r" b="b"/>
+            <a:pathLst>
+              <a:path w="3667125" h="3114675">
+                <a:moveTo>
+                  <a:pt x="38100" y="0"/>
+                </a:moveTo>
+                <a:lnTo>
+                  <a:pt x="3590940" y="0"/>
+                </a:lnTo>
+                <a:cubicBezTo>
+                  <a:pt x="3633016" y="0"/>
+                  <a:pt x="3667125" y="34109"/>
+                  <a:pt x="3667125" y="76185"/>
+                </a:cubicBezTo>
+                <a:lnTo>
+                  <a:pt x="3667125" y="3038490"/>
+                </a:lnTo>
+                <a:cubicBezTo>
+                  <a:pt x="3667125" y="3080566"/>
+                  <a:pt x="3633016" y="3114675"/>
+                  <a:pt x="3590940" y="3114675"/>
+                </a:cubicBezTo>
+                <a:lnTo>
+                  <a:pt x="38100" y="3114675"/>
+                </a:lnTo>
+                <a:cubicBezTo>
+                  <a:pt x="17058" y="3114675"/>
+                  <a:pt x="0" y="3097617"/>
+                  <a:pt x="0" y="3076575"/>
+                </a:cubicBezTo>
+                <a:lnTo>
+                  <a:pt x="0" y="38100"/>
+                </a:lnTo>
+                <a:cubicBezTo>
+                  <a:pt x="0" y="17072"/>
+                  <a:pt x="17072" y="0"/>
+                  <a:pt x="38100" y="0"/>
+                </a:cubicBezTo>
+                <a:close/>
+              </a:path>
+            </a:pathLst>
+          </a:custGeom>
+          <a:solidFill>
+            <a:srgbClr val="FFFFFF">
+              <a:alpha val="80000"/>
+            </a:srgbClr>
+          </a:solidFill>
+          <a:ln/>
+          <a:effectLst>
+            <a:outerShdw blurRad="28575" dist="9525" dir="5400000" algn="bl" rotWithShape="0">
+              <a:srgbClr val="000000">
+                <a:alpha val="10196"/>
+              </a:srgbClr>
+            </a:outerShdw>
+          </a:effectLst>
+        </p:spPr>
+        <p:txBody>
+          <a:bodyPr/>
+          <a:lstStyle/>
+          <a:p>
+            <a:endParaRPr lang="zh-CN" altLang="en-US"/>
+          </a:p>
+        </p:txBody>
+      </p:sp>
+      <p:sp>
+        <p:nvSpPr>
+          <p:cNvPr id="18" name="Shape 15">
+            <a:extLst>
+              <a:ext uri="{FF2B5EF4-FFF2-40B4-BE49-F238E27FC236}">
+                <a16:creationId xmlns:a16="http://schemas.microsoft.com/office/drawing/2014/main" id="{B9B3037B-D127-9C33-EDC1-AD94DF898F19}"/>
+              </a:ext>
+            </a:extLst>
+          </p:cNvPr>
+          <p:cNvSpPr/>
+          <p:nvPr/>
+        </p:nvSpPr>
+        <p:spPr>
+          <a:xfrm>
+            <a:off x="4273451" y="1028700"/>
+            <a:ext cx="38100" cy="3114675"/>
+          </a:xfrm>
+          <a:custGeom>
+            <a:avLst/>
+            <a:gdLst/>
+            <a:ahLst/>
+            <a:cxnLst/>
+            <a:rect l="l" t="t" r="r" b="b"/>
+            <a:pathLst>
+              <a:path w="38100" h="3114675">
+                <a:moveTo>
+                  <a:pt x="38100" y="0"/>
+                </a:moveTo>
+                <a:lnTo>
+                  <a:pt x="38100" y="0"/>
+                </a:lnTo>
+                <a:lnTo>
+                  <a:pt x="38100" y="3114675"/>
+                </a:lnTo>
+                <a:lnTo>
+                  <a:pt x="38100" y="3114675"/>
+                </a:lnTo>
+                <a:cubicBezTo>
+                  <a:pt x="17072" y="3114675"/>
+                  <a:pt x="0" y="3097603"/>
+                  <a:pt x="0" y="3076575"/>
+                </a:cubicBezTo>
+                <a:lnTo>
+                  <a:pt x="0" y="38100"/>
+                </a:lnTo>
+                <a:cubicBezTo>
+                  <a:pt x="0" y="17072"/>
+                  <a:pt x="17072" y="0"/>
+                  <a:pt x="38100" y="0"/>
+                </a:cubicBezTo>
+                <a:close/>
+              </a:path>
+            </a:pathLst>
+          </a:custGeom>
+          <a:solidFill>
+            <a:srgbClr val="9B8E7D"/>
+          </a:solidFill>
+          <a:ln/>
+        </p:spPr>
+        <p:txBody>
+          <a:bodyPr/>
+          <a:lstStyle/>
+          <a:p>
+            <a:endParaRPr lang="zh-CN" altLang="en-US"/>
+          </a:p>
+        </p:txBody>
+      </p:sp>
+      <p:sp>
+        <p:nvSpPr>
+          <p:cNvPr id="19" name="Shape 16">
+            <a:extLst>
+              <a:ext uri="{FF2B5EF4-FFF2-40B4-BE49-F238E27FC236}">
+                <a16:creationId xmlns:a16="http://schemas.microsoft.com/office/drawing/2014/main" id="{AAC84223-F549-50B4-5F3F-680D3EFA0584}"/>
+              </a:ext>
+            </a:extLst>
+          </p:cNvPr>
+          <p:cNvSpPr/>
+          <p:nvPr/>
+        </p:nvSpPr>
+        <p:spPr>
+          <a:xfrm>
+            <a:off x="4506813" y="1257300"/>
+            <a:ext cx="190500" cy="190500"/>
+          </a:xfrm>
+          <a:custGeom>
+            <a:avLst/>
+            <a:gdLst/>
+            <a:ahLst/>
+            <a:cxnLst/>
+            <a:rect l="l" t="t" r="r" b="b"/>
+            <a:pathLst>
+              <a:path w="190500" h="190500">
+                <a:moveTo>
+                  <a:pt x="136624" y="153479"/>
+                </a:moveTo>
+                <a:lnTo>
+                  <a:pt x="37021" y="53876"/>
+                </a:lnTo>
+                <a:cubicBezTo>
+                  <a:pt x="28687" y="65559"/>
+                  <a:pt x="23812" y="79846"/>
+                  <a:pt x="23812" y="95250"/>
+                </a:cubicBezTo>
+                <a:cubicBezTo>
+                  <a:pt x="23812" y="134689"/>
+                  <a:pt x="55811" y="166688"/>
+                  <a:pt x="95250" y="166688"/>
+                </a:cubicBezTo>
+                <a:cubicBezTo>
+                  <a:pt x="110691" y="166688"/>
+                  <a:pt x="124978" y="161813"/>
+                  <a:pt x="136624" y="153479"/>
+                </a:cubicBezTo>
+                <a:close/>
+                <a:moveTo>
+                  <a:pt x="153479" y="136624"/>
+                </a:moveTo>
+                <a:cubicBezTo>
+                  <a:pt x="161813" y="124941"/>
+                  <a:pt x="166688" y="110654"/>
+                  <a:pt x="166688" y="95250"/>
+                </a:cubicBezTo>
+                <a:cubicBezTo>
+                  <a:pt x="166688" y="55811"/>
+                  <a:pt x="134689" y="23812"/>
+                  <a:pt x="95250" y="23812"/>
+                </a:cubicBezTo>
+                <a:cubicBezTo>
+                  <a:pt x="79809" y="23812"/>
+                  <a:pt x="65522" y="28687"/>
+                  <a:pt x="53876" y="37021"/>
+                </a:cubicBezTo>
+                <a:lnTo>
+                  <a:pt x="153479" y="136624"/>
+                </a:lnTo>
+                <a:close/>
+                <a:moveTo>
+                  <a:pt x="0" y="95250"/>
+                </a:moveTo>
+                <a:cubicBezTo>
+                  <a:pt x="0" y="42680"/>
+                  <a:pt x="42680" y="0"/>
+                  <a:pt x="95250" y="0"/>
+                </a:cubicBezTo>
+                <a:cubicBezTo>
+                  <a:pt x="147820" y="0"/>
+                  <a:pt x="190500" y="42680"/>
+                  <a:pt x="190500" y="95250"/>
+                </a:cubicBezTo>
+                <a:cubicBezTo>
+                  <a:pt x="190500" y="147820"/>
+                  <a:pt x="147820" y="190500"/>
+                  <a:pt x="95250" y="190500"/>
+                </a:cubicBezTo>
+                <a:cubicBezTo>
+                  <a:pt x="42680" y="190500"/>
+                  <a:pt x="0" y="147820"/>
+                  <a:pt x="0" y="95250"/>
+                </a:cubicBezTo>
+                <a:close/>
+              </a:path>
+            </a:pathLst>
+          </a:custGeom>
+          <a:solidFill>
+            <a:srgbClr val="9B8E7D"/>
+          </a:solidFill>
+          <a:ln/>
+        </p:spPr>
+        <p:txBody>
+          <a:bodyPr/>
+          <a:lstStyle/>
+          <a:p>
+            <a:endParaRPr lang="zh-CN" altLang="en-US"/>
+          </a:p>
+        </p:txBody>
+      </p:sp>
+      <p:sp>
+        <p:nvSpPr>
+          <p:cNvPr id="20" name="Text 17">
+            <a:extLst>
+              <a:ext uri="{FF2B5EF4-FFF2-40B4-BE49-F238E27FC236}">
+                <a16:creationId xmlns:a16="http://schemas.microsoft.com/office/drawing/2014/main" id="{4D53C9BB-3E46-F13D-B12B-6A60C51D76A5}"/>
+              </a:ext>
+            </a:extLst>
+          </p:cNvPr>
+          <p:cNvSpPr/>
+          <p:nvPr/>
+        </p:nvSpPr>
+        <p:spPr>
+          <a:xfrm>
+            <a:off x="4721126" y="1219200"/>
+            <a:ext cx="3124200" cy="266700"/>
+          </a:xfrm>
+          <a:prstGeom prst="rect">
+            <a:avLst/>
+          </a:prstGeom>
+          <a:noFill/>
+          <a:ln/>
+        </p:spPr>
+        <p:txBody>
+          <a:bodyPr wrap="square" lIns="0" tIns="0" rIns="0" bIns="0" rtlCol="0" anchor="ctr"/>
+          <a:lstStyle/>
+          <a:p>
+            <a:pPr>
+              <a:lnSpc>
+                <a:spcPct val="120000"/>
+              </a:lnSpc>
+            </a:pPr>
+            <a:r>
+              <a:rPr lang="en-US" sz="1500" b="1" dirty="0">
+                <a:solidFill>
+                  <a:srgbClr val="5C5650"/>
+                </a:solidFill>
+                <a:latin typeface="Liter" pitchFamily="34" charset="0"/>
+                <a:ea typeface="Liter" pitchFamily="34" charset="-122"/>
+                <a:cs typeface="Liter" pitchFamily="34" charset="-120"/>
+              </a:rPr>
+              <a:t>Limitations</a:t>
+            </a:r>
+            <a:endParaRPr lang="en-US" sz="1600" dirty="0"/>
+          </a:p>
+        </p:txBody>
+      </p:sp>
+      <p:sp>
+        <p:nvSpPr>
+          <p:cNvPr id="21" name="Shape 18">
+            <a:extLst>
+              <a:ext uri="{FF2B5EF4-FFF2-40B4-BE49-F238E27FC236}">
+                <a16:creationId xmlns:a16="http://schemas.microsoft.com/office/drawing/2014/main" id="{7A246195-FA41-3340-6845-9CEA96F6B648}"/>
+              </a:ext>
+            </a:extLst>
+          </p:cNvPr>
+          <p:cNvSpPr/>
+          <p:nvPr/>
+        </p:nvSpPr>
+        <p:spPr>
+          <a:xfrm>
+            <a:off x="4483001" y="1714500"/>
+            <a:ext cx="76200" cy="76200"/>
+          </a:xfrm>
+          <a:custGeom>
+            <a:avLst/>
+            <a:gdLst/>
+            <a:ahLst/>
+            <a:cxnLst/>
+            <a:rect l="l" t="t" r="r" b="b"/>
+            <a:pathLst>
+              <a:path w="76200" h="76200">
+                <a:moveTo>
+                  <a:pt x="38100" y="0"/>
+                </a:moveTo>
+                <a:lnTo>
+                  <a:pt x="38100" y="0"/>
+                </a:lnTo>
+                <a:cubicBezTo>
+                  <a:pt x="59128" y="0"/>
+                  <a:pt x="76200" y="17072"/>
+                  <a:pt x="76200" y="38100"/>
+                </a:cubicBezTo>
+                <a:lnTo>
+                  <a:pt x="76200" y="38100"/>
+                </a:lnTo>
+                <a:cubicBezTo>
+                  <a:pt x="76200" y="59128"/>
+                  <a:pt x="59128" y="76200"/>
+                  <a:pt x="38100" y="76200"/>
+                </a:cubicBezTo>
+                <a:lnTo>
+                  <a:pt x="38100" y="76200"/>
+                </a:lnTo>
+                <a:cubicBezTo>
+                  <a:pt x="17072" y="76200"/>
+                  <a:pt x="0" y="59128"/>
+                  <a:pt x="0" y="38100"/>
+                </a:cubicBezTo>
+                <a:lnTo>
+                  <a:pt x="0" y="38100"/>
+                </a:lnTo>
+                <a:cubicBezTo>
+                  <a:pt x="0" y="17072"/>
+                  <a:pt x="17072" y="0"/>
+                  <a:pt x="38100" y="0"/>
+                </a:cubicBezTo>
+                <a:close/>
+              </a:path>
+            </a:pathLst>
+          </a:custGeom>
+          <a:solidFill>
+            <a:srgbClr val="9B8E7D"/>
+          </a:solidFill>
+          <a:ln/>
+        </p:spPr>
+        <p:txBody>
+          <a:bodyPr/>
+          <a:lstStyle/>
+          <a:p>
+            <a:endParaRPr lang="zh-CN" altLang="en-US"/>
+          </a:p>
+        </p:txBody>
+      </p:sp>
+      <p:sp>
+        <p:nvSpPr>
+          <p:cNvPr id="22" name="Text 19">
+            <a:extLst>
+              <a:ext uri="{FF2B5EF4-FFF2-40B4-BE49-F238E27FC236}">
+                <a16:creationId xmlns:a16="http://schemas.microsoft.com/office/drawing/2014/main" id="{B73FB2D4-074A-6857-78C3-3854B0E1B261}"/>
+              </a:ext>
+            </a:extLst>
+          </p:cNvPr>
+          <p:cNvSpPr/>
+          <p:nvPr/>
+        </p:nvSpPr>
+        <p:spPr>
+          <a:xfrm>
+            <a:off x="4673501" y="1638300"/>
+            <a:ext cx="3152775" cy="495300"/>
+          </a:xfrm>
+          <a:prstGeom prst="rect">
+            <a:avLst/>
+          </a:prstGeom>
+          <a:noFill/>
+          <a:ln/>
+        </p:spPr>
+        <p:txBody>
+          <a:bodyPr wrap="square" lIns="0" tIns="0" rIns="0" bIns="0" rtlCol="0" anchor="ctr"/>
+          <a:lstStyle/>
+          <a:p>
+            <a:pPr>
+              <a:lnSpc>
+                <a:spcPct val="140000"/>
+              </a:lnSpc>
+            </a:pPr>
+            <a:r>
+              <a:rPr lang="en-US" sz="1200" dirty="0">
+                <a:solidFill>
+                  <a:srgbClr val="5C5650">
+                    <a:alpha val="80000"/>
+                  </a:srgbClr>
+                </a:solidFill>
+                <a:latin typeface="Quattrocento Sans" pitchFamily="34" charset="0"/>
+                <a:ea typeface="Quattrocento Sans" pitchFamily="34" charset="-122"/>
+                <a:cs typeface="Quattrocento Sans" pitchFamily="34" charset="-120"/>
+              </a:rPr>
+              <a:t>Behavioural variables may </a:t>
+            </a:r>
+            <a:r>
+              <a:rPr lang="en-US" sz="1200" b="1" dirty="0">
+                <a:solidFill>
+                  <a:srgbClr val="5C5650">
+                    <a:alpha val="80000"/>
+                  </a:srgbClr>
+                </a:solidFill>
+                <a:latin typeface="Quattrocento Sans" pitchFamily="34" charset="0"/>
+                <a:ea typeface="Quattrocento Sans" pitchFamily="34" charset="-122"/>
+                <a:cs typeface="Quattrocento Sans" pitchFamily="34" charset="-120"/>
+              </a:rPr>
+              <a:t>not capture all influences</a:t>
+            </a:r>
+            <a:r>
+              <a:rPr lang="en-US" sz="1200" dirty="0">
+                <a:solidFill>
+                  <a:srgbClr val="5C5650">
+                    <a:alpha val="80000"/>
+                  </a:srgbClr>
+                </a:solidFill>
+                <a:latin typeface="Quattrocento Sans" pitchFamily="34" charset="0"/>
+                <a:ea typeface="Quattrocento Sans" pitchFamily="34" charset="-122"/>
+                <a:cs typeface="Quattrocento Sans" pitchFamily="34" charset="-120"/>
+              </a:rPr>
+              <a:t> on productivity</a:t>
+            </a:r>
+            <a:endParaRPr lang="en-US" sz="1600" dirty="0"/>
+          </a:p>
+        </p:txBody>
+      </p:sp>
+      <p:sp>
+        <p:nvSpPr>
+          <p:cNvPr id="23" name="Shape 20">
+            <a:extLst>
+              <a:ext uri="{FF2B5EF4-FFF2-40B4-BE49-F238E27FC236}">
+                <a16:creationId xmlns:a16="http://schemas.microsoft.com/office/drawing/2014/main" id="{EBBAC415-20AB-4A88-F420-FC4A8C4B2ABB}"/>
+              </a:ext>
+            </a:extLst>
+          </p:cNvPr>
+          <p:cNvSpPr/>
+          <p:nvPr/>
+        </p:nvSpPr>
+        <p:spPr>
+          <a:xfrm>
+            <a:off x="4483001" y="2362200"/>
+            <a:ext cx="76200" cy="76200"/>
+          </a:xfrm>
+          <a:custGeom>
+            <a:avLst/>
+            <a:gdLst/>
+            <a:ahLst/>
+            <a:cxnLst/>
+            <a:rect l="l" t="t" r="r" b="b"/>
+            <a:pathLst>
+              <a:path w="76200" h="76200">
+                <a:moveTo>
+                  <a:pt x="38100" y="0"/>
+                </a:moveTo>
+                <a:lnTo>
+                  <a:pt x="38100" y="0"/>
+                </a:lnTo>
+                <a:cubicBezTo>
+                  <a:pt x="59128" y="0"/>
+                  <a:pt x="76200" y="17072"/>
+                  <a:pt x="76200" y="38100"/>
+                </a:cubicBezTo>
+                <a:lnTo>
+                  <a:pt x="76200" y="38100"/>
+                </a:lnTo>
+                <a:cubicBezTo>
+                  <a:pt x="76200" y="59128"/>
+                  <a:pt x="59128" y="76200"/>
+                  <a:pt x="38100" y="76200"/>
+                </a:cubicBezTo>
+                <a:lnTo>
+                  <a:pt x="38100" y="76200"/>
+                </a:lnTo>
+                <a:cubicBezTo>
+                  <a:pt x="17072" y="76200"/>
+                  <a:pt x="0" y="59128"/>
+                  <a:pt x="0" y="38100"/>
+                </a:cubicBezTo>
+                <a:lnTo>
+                  <a:pt x="0" y="38100"/>
+                </a:lnTo>
+                <a:cubicBezTo>
+                  <a:pt x="0" y="17072"/>
+                  <a:pt x="17072" y="0"/>
+                  <a:pt x="38100" y="0"/>
+                </a:cubicBezTo>
+                <a:close/>
+              </a:path>
+            </a:pathLst>
+          </a:custGeom>
+          <a:solidFill>
+            <a:srgbClr val="9B8E7D"/>
+          </a:solidFill>
+          <a:ln/>
+        </p:spPr>
+        <p:txBody>
+          <a:bodyPr/>
+          <a:lstStyle/>
+          <a:p>
+            <a:endParaRPr lang="zh-CN" altLang="en-US"/>
+          </a:p>
+        </p:txBody>
+      </p:sp>
+      <p:sp>
+        <p:nvSpPr>
+          <p:cNvPr id="24" name="Text 21">
+            <a:extLst>
+              <a:ext uri="{FF2B5EF4-FFF2-40B4-BE49-F238E27FC236}">
+                <a16:creationId xmlns:a16="http://schemas.microsoft.com/office/drawing/2014/main" id="{1D9B5F8B-EE68-B546-F241-41673DBC691C}"/>
+              </a:ext>
+            </a:extLst>
+          </p:cNvPr>
+          <p:cNvSpPr/>
+          <p:nvPr/>
+        </p:nvSpPr>
+        <p:spPr>
+          <a:xfrm>
+            <a:off x="4673501" y="2286000"/>
+            <a:ext cx="3152775" cy="495300"/>
+          </a:xfrm>
+          <a:prstGeom prst="rect">
+            <a:avLst/>
+          </a:prstGeom>
+          <a:noFill/>
+          <a:ln/>
+        </p:spPr>
+        <p:txBody>
+          <a:bodyPr wrap="square" lIns="0" tIns="0" rIns="0" bIns="0" rtlCol="0" anchor="ctr"/>
+          <a:lstStyle/>
+          <a:p>
+            <a:pPr>
+              <a:lnSpc>
+                <a:spcPct val="140000"/>
+              </a:lnSpc>
+            </a:pPr>
+            <a:r>
+              <a:rPr lang="en-US" sz="1200" dirty="0">
+                <a:solidFill>
+                  <a:srgbClr val="5C5650">
+                    <a:alpha val="80000"/>
+                  </a:srgbClr>
+                </a:solidFill>
+                <a:latin typeface="Quattrocento Sans" pitchFamily="34" charset="0"/>
+                <a:ea typeface="Quattrocento Sans" pitchFamily="34" charset="-122"/>
+                <a:cs typeface="Quattrocento Sans" pitchFamily="34" charset="-120"/>
+              </a:rPr>
+              <a:t>Binary classification </a:t>
+            </a:r>
+            <a:r>
+              <a:rPr lang="en-US" sz="1200" b="1" dirty="0">
+                <a:solidFill>
+                  <a:srgbClr val="5C5650">
+                    <a:alpha val="80000"/>
+                  </a:srgbClr>
+                </a:solidFill>
+                <a:latin typeface="Quattrocento Sans" pitchFamily="34" charset="0"/>
+                <a:ea typeface="Quattrocento Sans" pitchFamily="34" charset="-122"/>
+                <a:cs typeface="Quattrocento Sans" pitchFamily="34" charset="-120"/>
+              </a:rPr>
+              <a:t>loses information</a:t>
+            </a:r>
+            <a:r>
+              <a:rPr lang="en-US" sz="1200" dirty="0">
+                <a:solidFill>
+                  <a:srgbClr val="5C5650">
+                    <a:alpha val="80000"/>
+                  </a:srgbClr>
+                </a:solidFill>
+                <a:latin typeface="Quattrocento Sans" pitchFamily="34" charset="0"/>
+                <a:ea typeface="Quattrocento Sans" pitchFamily="34" charset="-122"/>
+                <a:cs typeface="Quattrocento Sans" pitchFamily="34" charset="-120"/>
+              </a:rPr>
+              <a:t> from the original continuous score</a:t>
+            </a:r>
+            <a:endParaRPr lang="en-US" sz="1600" dirty="0"/>
+          </a:p>
+        </p:txBody>
+      </p:sp>
+      <p:sp>
+        <p:nvSpPr>
+          <p:cNvPr id="25" name="Shape 22">
+            <a:extLst>
+              <a:ext uri="{FF2B5EF4-FFF2-40B4-BE49-F238E27FC236}">
+                <a16:creationId xmlns:a16="http://schemas.microsoft.com/office/drawing/2014/main" id="{8C7A9CC9-C7B2-432A-984A-BC8EB56EF350}"/>
+              </a:ext>
+            </a:extLst>
+          </p:cNvPr>
+          <p:cNvSpPr/>
+          <p:nvPr/>
+        </p:nvSpPr>
+        <p:spPr>
+          <a:xfrm>
+            <a:off x="4483001" y="3009900"/>
+            <a:ext cx="76200" cy="76200"/>
+          </a:xfrm>
+          <a:custGeom>
+            <a:avLst/>
+            <a:gdLst/>
+            <a:ahLst/>
+            <a:cxnLst/>
+            <a:rect l="l" t="t" r="r" b="b"/>
+            <a:pathLst>
+              <a:path w="76200" h="76200">
+                <a:moveTo>
+                  <a:pt x="38100" y="0"/>
+                </a:moveTo>
+                <a:lnTo>
+                  <a:pt x="38100" y="0"/>
+                </a:lnTo>
+                <a:cubicBezTo>
+                  <a:pt x="59128" y="0"/>
+                  <a:pt x="76200" y="17072"/>
+                  <a:pt x="76200" y="38100"/>
+                </a:cubicBezTo>
+                <a:lnTo>
+                  <a:pt x="76200" y="38100"/>
+                </a:lnTo>
+                <a:cubicBezTo>
+                  <a:pt x="76200" y="59128"/>
+                  <a:pt x="59128" y="76200"/>
+                  <a:pt x="38100" y="76200"/>
+                </a:cubicBezTo>
+                <a:lnTo>
+                  <a:pt x="38100" y="76200"/>
+                </a:lnTo>
+                <a:cubicBezTo>
+                  <a:pt x="17072" y="76200"/>
+                  <a:pt x="0" y="59128"/>
+                  <a:pt x="0" y="38100"/>
+                </a:cubicBezTo>
+                <a:lnTo>
+                  <a:pt x="0" y="38100"/>
+                </a:lnTo>
+                <a:cubicBezTo>
+                  <a:pt x="0" y="17072"/>
+                  <a:pt x="17072" y="0"/>
+                  <a:pt x="38100" y="0"/>
+                </a:cubicBezTo>
+                <a:close/>
+              </a:path>
+            </a:pathLst>
+          </a:custGeom>
+          <a:solidFill>
+            <a:srgbClr val="9B8E7D"/>
+          </a:solidFill>
+          <a:ln/>
+        </p:spPr>
+        <p:txBody>
+          <a:bodyPr/>
+          <a:lstStyle/>
+          <a:p>
+            <a:endParaRPr lang="zh-CN" altLang="en-US"/>
+          </a:p>
+        </p:txBody>
+      </p:sp>
+      <p:sp>
+        <p:nvSpPr>
+          <p:cNvPr id="26" name="Text 23">
+            <a:extLst>
+              <a:ext uri="{FF2B5EF4-FFF2-40B4-BE49-F238E27FC236}">
+                <a16:creationId xmlns:a16="http://schemas.microsoft.com/office/drawing/2014/main" id="{F24248D9-6AF0-6E12-4EC3-B4DDC3A1DF32}"/>
+              </a:ext>
+            </a:extLst>
+          </p:cNvPr>
+          <p:cNvSpPr/>
+          <p:nvPr/>
+        </p:nvSpPr>
+        <p:spPr>
+          <a:xfrm>
+            <a:off x="4673501" y="2933700"/>
+            <a:ext cx="2705100" cy="247650"/>
+          </a:xfrm>
+          <a:prstGeom prst="rect">
+            <a:avLst/>
+          </a:prstGeom>
+          <a:noFill/>
+          <a:ln/>
+        </p:spPr>
+        <p:txBody>
+          <a:bodyPr wrap="square" lIns="0" tIns="0" rIns="0" bIns="0" rtlCol="0" anchor="ctr"/>
+          <a:lstStyle/>
+          <a:p>
+            <a:pPr>
+              <a:lnSpc>
+                <a:spcPct val="140000"/>
+              </a:lnSpc>
+            </a:pPr>
+            <a:r>
+              <a:rPr lang="en-US" sz="1200" dirty="0">
+                <a:solidFill>
+                  <a:srgbClr val="5C5650">
+                    <a:alpha val="80000"/>
+                  </a:srgbClr>
+                </a:solidFill>
+                <a:latin typeface="Quattrocento Sans" pitchFamily="34" charset="0"/>
+                <a:ea typeface="Quattrocento Sans" pitchFamily="34" charset="-122"/>
+                <a:cs typeface="Quattrocento Sans" pitchFamily="34" charset="-120"/>
+              </a:rPr>
+              <a:t>Results show </a:t>
+            </a:r>
+            <a:r>
+              <a:rPr lang="en-US" sz="1200" b="1" dirty="0">
+                <a:solidFill>
+                  <a:srgbClr val="5C5650">
+                    <a:alpha val="80000"/>
+                  </a:srgbClr>
+                </a:solidFill>
+                <a:latin typeface="Quattrocento Sans" pitchFamily="34" charset="0"/>
+                <a:ea typeface="Quattrocento Sans" pitchFamily="34" charset="-122"/>
+                <a:cs typeface="Quattrocento Sans" pitchFamily="34" charset="-120"/>
+              </a:rPr>
+              <a:t>association, not causation</a:t>
+            </a:r>
+            <a:endParaRPr lang="en-US" sz="1600" dirty="0"/>
+          </a:p>
+        </p:txBody>
+      </p:sp>
+      <p:sp>
+        <p:nvSpPr>
+          <p:cNvPr id="27" name="Shape 24">
+            <a:extLst>
+              <a:ext uri="{FF2B5EF4-FFF2-40B4-BE49-F238E27FC236}">
+                <a16:creationId xmlns:a16="http://schemas.microsoft.com/office/drawing/2014/main" id="{C031008F-A84A-E493-32BA-B2A78F97E4E7}"/>
+              </a:ext>
+            </a:extLst>
+          </p:cNvPr>
+          <p:cNvSpPr/>
+          <p:nvPr/>
+        </p:nvSpPr>
+        <p:spPr>
+          <a:xfrm>
+            <a:off x="8147000" y="1028700"/>
+            <a:ext cx="3667125" cy="3114675"/>
+          </a:xfrm>
+          <a:custGeom>
+            <a:avLst/>
+            <a:gdLst/>
+            <a:ahLst/>
+            <a:cxnLst/>
+            <a:rect l="l" t="t" r="r" b="b"/>
+            <a:pathLst>
+              <a:path w="3667125" h="3114675">
+                <a:moveTo>
+                  <a:pt x="38100" y="0"/>
+                </a:moveTo>
+                <a:lnTo>
+                  <a:pt x="3590940" y="0"/>
+                </a:lnTo>
+                <a:cubicBezTo>
+                  <a:pt x="3633016" y="0"/>
+                  <a:pt x="3667125" y="34109"/>
+                  <a:pt x="3667125" y="76185"/>
+                </a:cubicBezTo>
+                <a:lnTo>
+                  <a:pt x="3667125" y="3038490"/>
+                </a:lnTo>
+                <a:cubicBezTo>
+                  <a:pt x="3667125" y="3080566"/>
+                  <a:pt x="3633016" y="3114675"/>
+                  <a:pt x="3590940" y="3114675"/>
+                </a:cubicBezTo>
+                <a:lnTo>
+                  <a:pt x="38100" y="3114675"/>
+                </a:lnTo>
+                <a:cubicBezTo>
+                  <a:pt x="17058" y="3114675"/>
+                  <a:pt x="0" y="3097617"/>
+                  <a:pt x="0" y="3076575"/>
+                </a:cubicBezTo>
+                <a:lnTo>
+                  <a:pt x="0" y="38100"/>
+                </a:lnTo>
+                <a:cubicBezTo>
+                  <a:pt x="0" y="17072"/>
+                  <a:pt x="17072" y="0"/>
+                  <a:pt x="38100" y="0"/>
+                </a:cubicBezTo>
+                <a:close/>
+              </a:path>
+            </a:pathLst>
+          </a:custGeom>
+          <a:solidFill>
+            <a:srgbClr val="FFFFFF">
+              <a:alpha val="80000"/>
+            </a:srgbClr>
+          </a:solidFill>
+          <a:ln/>
+          <a:effectLst>
+            <a:outerShdw blurRad="28575" dist="9525" dir="5400000" algn="bl" rotWithShape="0">
+              <a:srgbClr val="000000">
+                <a:alpha val="10196"/>
+              </a:srgbClr>
+            </a:outerShdw>
+          </a:effectLst>
+        </p:spPr>
+        <p:txBody>
+          <a:bodyPr/>
+          <a:lstStyle/>
+          <a:p>
+            <a:endParaRPr lang="zh-CN" altLang="en-US"/>
+          </a:p>
+        </p:txBody>
+      </p:sp>
+      <p:sp>
+        <p:nvSpPr>
+          <p:cNvPr id="28" name="Shape 25">
+            <a:extLst>
+              <a:ext uri="{FF2B5EF4-FFF2-40B4-BE49-F238E27FC236}">
+                <a16:creationId xmlns:a16="http://schemas.microsoft.com/office/drawing/2014/main" id="{2C16B856-410D-716B-DBB5-010C6BA9CE7F}"/>
+              </a:ext>
+            </a:extLst>
+          </p:cNvPr>
+          <p:cNvSpPr/>
+          <p:nvPr/>
+        </p:nvSpPr>
+        <p:spPr>
+          <a:xfrm>
+            <a:off x="8147000" y="1028700"/>
+            <a:ext cx="38100" cy="3114675"/>
+          </a:xfrm>
+          <a:custGeom>
+            <a:avLst/>
+            <a:gdLst/>
+            <a:ahLst/>
+            <a:cxnLst/>
+            <a:rect l="l" t="t" r="r" b="b"/>
+            <a:pathLst>
+              <a:path w="38100" h="3114675">
+                <a:moveTo>
+                  <a:pt x="38100" y="0"/>
+                </a:moveTo>
+                <a:lnTo>
+                  <a:pt x="38100" y="0"/>
+                </a:lnTo>
+                <a:lnTo>
+                  <a:pt x="38100" y="3114675"/>
+                </a:lnTo>
+                <a:lnTo>
+                  <a:pt x="38100" y="3114675"/>
+                </a:lnTo>
+                <a:cubicBezTo>
+                  <a:pt x="17072" y="3114675"/>
+                  <a:pt x="0" y="3097603"/>
+                  <a:pt x="0" y="3076575"/>
+                </a:cubicBezTo>
+                <a:lnTo>
+                  <a:pt x="0" y="38100"/>
+                </a:lnTo>
+                <a:cubicBezTo>
+                  <a:pt x="0" y="17072"/>
+                  <a:pt x="17072" y="0"/>
+                  <a:pt x="38100" y="0"/>
+                </a:cubicBezTo>
+                <a:close/>
+              </a:path>
+            </a:pathLst>
+          </a:custGeom>
+          <a:solidFill>
+            <a:srgbClr val="A8B5A0"/>
+          </a:solidFill>
+          <a:ln/>
+        </p:spPr>
+        <p:txBody>
+          <a:bodyPr/>
+          <a:lstStyle/>
+          <a:p>
+            <a:endParaRPr lang="zh-CN" altLang="en-US"/>
+          </a:p>
+        </p:txBody>
+      </p:sp>
+      <p:sp>
+        <p:nvSpPr>
+          <p:cNvPr id="29" name="Shape 26">
+            <a:extLst>
+              <a:ext uri="{FF2B5EF4-FFF2-40B4-BE49-F238E27FC236}">
+                <a16:creationId xmlns:a16="http://schemas.microsoft.com/office/drawing/2014/main" id="{4FCC2B6C-5C81-84B9-4866-A8392C807FE0}"/>
+              </a:ext>
+            </a:extLst>
+          </p:cNvPr>
+          <p:cNvSpPr/>
+          <p:nvPr/>
+        </p:nvSpPr>
+        <p:spPr>
+          <a:xfrm>
+            <a:off x="8380363" y="1257300"/>
+            <a:ext cx="190500" cy="190500"/>
+          </a:xfrm>
+          <a:custGeom>
+            <a:avLst/>
+            <a:gdLst/>
+            <a:ahLst/>
+            <a:cxnLst/>
+            <a:rect l="l" t="t" r="r" b="b"/>
+            <a:pathLst>
+              <a:path w="190500" h="190500">
+                <a:moveTo>
+                  <a:pt x="95250" y="190500"/>
+                </a:moveTo>
+                <a:cubicBezTo>
+                  <a:pt x="147820" y="190500"/>
+                  <a:pt x="190500" y="147820"/>
+                  <a:pt x="190500" y="95250"/>
+                </a:cubicBezTo>
+                <a:cubicBezTo>
+                  <a:pt x="190500" y="42680"/>
+                  <a:pt x="147820" y="0"/>
+                  <a:pt x="95250" y="0"/>
+                </a:cubicBezTo>
+                <a:cubicBezTo>
+                  <a:pt x="42680" y="0"/>
+                  <a:pt x="0" y="42680"/>
+                  <a:pt x="0" y="95250"/>
+                </a:cubicBezTo>
+                <a:cubicBezTo>
+                  <a:pt x="0" y="147820"/>
+                  <a:pt x="42680" y="190500"/>
+                  <a:pt x="95250" y="190500"/>
+                </a:cubicBezTo>
+                <a:close/>
+                <a:moveTo>
+                  <a:pt x="126653" y="79139"/>
+                </a:moveTo>
+                <a:lnTo>
+                  <a:pt x="96887" y="126764"/>
+                </a:lnTo>
+                <a:cubicBezTo>
+                  <a:pt x="95324" y="129257"/>
+                  <a:pt x="92646" y="130820"/>
+                  <a:pt x="89706" y="130969"/>
+                </a:cubicBezTo>
+                <a:cubicBezTo>
+                  <a:pt x="86767" y="131118"/>
+                  <a:pt x="83939" y="129778"/>
+                  <a:pt x="82190" y="127397"/>
+                </a:cubicBezTo>
+                <a:lnTo>
+                  <a:pt x="64331" y="103584"/>
+                </a:lnTo>
+                <a:cubicBezTo>
+                  <a:pt x="61354" y="99640"/>
+                  <a:pt x="62173" y="94059"/>
+                  <a:pt x="66117" y="91083"/>
+                </a:cubicBezTo>
+                <a:cubicBezTo>
+                  <a:pt x="70061" y="88106"/>
+                  <a:pt x="75642" y="88925"/>
+                  <a:pt x="78618" y="92869"/>
+                </a:cubicBezTo>
+                <a:lnTo>
+                  <a:pt x="88664" y="106263"/>
+                </a:lnTo>
+                <a:lnTo>
+                  <a:pt x="111509" y="69689"/>
+                </a:lnTo>
+                <a:cubicBezTo>
+                  <a:pt x="114114" y="65522"/>
+                  <a:pt x="119621" y="64219"/>
+                  <a:pt x="123825" y="66861"/>
+                </a:cubicBezTo>
+                <a:cubicBezTo>
+                  <a:pt x="128029" y="69503"/>
+                  <a:pt x="129294" y="74972"/>
+                  <a:pt x="126653" y="79177"/>
+                </a:cubicBezTo>
+                <a:close/>
+              </a:path>
+            </a:pathLst>
+          </a:custGeom>
+          <a:solidFill>
+            <a:srgbClr val="A8B5A0"/>
+          </a:solidFill>
+          <a:ln/>
+        </p:spPr>
+        <p:txBody>
+          <a:bodyPr/>
+          <a:lstStyle/>
+          <a:p>
+            <a:endParaRPr lang="zh-CN" altLang="en-US"/>
+          </a:p>
+        </p:txBody>
+      </p:sp>
+      <p:sp>
+        <p:nvSpPr>
+          <p:cNvPr id="30" name="Text 27">
+            <a:extLst>
+              <a:ext uri="{FF2B5EF4-FFF2-40B4-BE49-F238E27FC236}">
+                <a16:creationId xmlns:a16="http://schemas.microsoft.com/office/drawing/2014/main" id="{B77564F9-01A6-E9C6-C4FE-4DB2CE0A9C41}"/>
+              </a:ext>
+            </a:extLst>
+          </p:cNvPr>
+          <p:cNvSpPr/>
+          <p:nvPr/>
+        </p:nvSpPr>
+        <p:spPr>
+          <a:xfrm>
+            <a:off x="8594675" y="1219200"/>
+            <a:ext cx="3124200" cy="266700"/>
+          </a:xfrm>
+          <a:prstGeom prst="rect">
+            <a:avLst/>
+          </a:prstGeom>
+          <a:noFill/>
+          <a:ln/>
+        </p:spPr>
+        <p:txBody>
+          <a:bodyPr wrap="square" lIns="0" tIns="0" rIns="0" bIns="0" rtlCol="0" anchor="ctr"/>
+          <a:lstStyle/>
+          <a:p>
+            <a:pPr>
+              <a:lnSpc>
+                <a:spcPct val="120000"/>
+              </a:lnSpc>
+            </a:pPr>
+            <a:r>
+              <a:rPr lang="en-US" sz="1500" b="1" dirty="0">
+                <a:solidFill>
+                  <a:srgbClr val="5C5650"/>
+                </a:solidFill>
+                <a:latin typeface="Liter" pitchFamily="34" charset="0"/>
+                <a:ea typeface="Liter" pitchFamily="34" charset="-122"/>
+                <a:cs typeface="Liter" pitchFamily="34" charset="-120"/>
+              </a:rPr>
+              <a:t>Final Conclusion</a:t>
+            </a:r>
+            <a:endParaRPr lang="en-US" sz="1600" dirty="0"/>
+          </a:p>
+        </p:txBody>
+      </p:sp>
+      <p:sp>
+        <p:nvSpPr>
+          <p:cNvPr id="31" name="Shape 28">
+            <a:extLst>
+              <a:ext uri="{FF2B5EF4-FFF2-40B4-BE49-F238E27FC236}">
+                <a16:creationId xmlns:a16="http://schemas.microsoft.com/office/drawing/2014/main" id="{BDE53936-B1B6-6424-A56C-1B8E91AE72B6}"/>
+              </a:ext>
+            </a:extLst>
+          </p:cNvPr>
+          <p:cNvSpPr/>
+          <p:nvPr/>
+        </p:nvSpPr>
+        <p:spPr>
+          <a:xfrm>
+            <a:off x="8356550" y="1714500"/>
+            <a:ext cx="76200" cy="76200"/>
+          </a:xfrm>
+          <a:custGeom>
+            <a:avLst/>
+            <a:gdLst/>
+            <a:ahLst/>
+            <a:cxnLst/>
+            <a:rect l="l" t="t" r="r" b="b"/>
+            <a:pathLst>
+              <a:path w="76200" h="76200">
+                <a:moveTo>
+                  <a:pt x="38100" y="0"/>
+                </a:moveTo>
+                <a:lnTo>
+                  <a:pt x="38100" y="0"/>
+                </a:lnTo>
+                <a:cubicBezTo>
+                  <a:pt x="59128" y="0"/>
+                  <a:pt x="76200" y="17072"/>
+                  <a:pt x="76200" y="38100"/>
+                </a:cubicBezTo>
+                <a:lnTo>
+                  <a:pt x="76200" y="38100"/>
+                </a:lnTo>
+                <a:cubicBezTo>
+                  <a:pt x="76200" y="59128"/>
+                  <a:pt x="59128" y="76200"/>
+                  <a:pt x="38100" y="76200"/>
+                </a:cubicBezTo>
+                <a:lnTo>
+                  <a:pt x="38100" y="76200"/>
+                </a:lnTo>
+                <a:cubicBezTo>
+                  <a:pt x="17072" y="76200"/>
+                  <a:pt x="0" y="59128"/>
+                  <a:pt x="0" y="38100"/>
+                </a:cubicBezTo>
+                <a:lnTo>
+                  <a:pt x="0" y="38100"/>
+                </a:lnTo>
+                <a:cubicBezTo>
+                  <a:pt x="0" y="17072"/>
+                  <a:pt x="17072" y="0"/>
+                  <a:pt x="38100" y="0"/>
+                </a:cubicBezTo>
+                <a:close/>
+              </a:path>
+            </a:pathLst>
+          </a:custGeom>
+          <a:solidFill>
+            <a:srgbClr val="A8B5A0"/>
+          </a:solidFill>
+          <a:ln/>
+        </p:spPr>
+        <p:txBody>
+          <a:bodyPr/>
+          <a:lstStyle/>
+          <a:p>
+            <a:endParaRPr lang="zh-CN" altLang="en-US"/>
+          </a:p>
+        </p:txBody>
+      </p:sp>
+      <p:sp>
+        <p:nvSpPr>
+          <p:cNvPr id="32" name="Text 29">
+            <a:extLst>
+              <a:ext uri="{FF2B5EF4-FFF2-40B4-BE49-F238E27FC236}">
+                <a16:creationId xmlns:a16="http://schemas.microsoft.com/office/drawing/2014/main" id="{5B985D57-B5F5-578A-B0A0-71570D6C61CA}"/>
+              </a:ext>
+            </a:extLst>
+          </p:cNvPr>
+          <p:cNvSpPr/>
+          <p:nvPr/>
+        </p:nvSpPr>
+        <p:spPr>
+          <a:xfrm>
+            <a:off x="8547050" y="1638300"/>
+            <a:ext cx="3152775" cy="495300"/>
+          </a:xfrm>
+          <a:prstGeom prst="rect">
+            <a:avLst/>
+          </a:prstGeom>
+          <a:noFill/>
+          <a:ln/>
+        </p:spPr>
+        <p:txBody>
+          <a:bodyPr wrap="square" lIns="0" tIns="0" rIns="0" bIns="0" rtlCol="0" anchor="ctr"/>
+          <a:lstStyle/>
+          <a:p>
+            <a:pPr>
+              <a:lnSpc>
+                <a:spcPct val="140000"/>
+              </a:lnSpc>
+            </a:pPr>
+            <a:r>
+              <a:rPr lang="en-US" sz="1200" dirty="0">
+                <a:solidFill>
+                  <a:srgbClr val="5C5650">
+                    <a:alpha val="80000"/>
+                  </a:srgbClr>
+                </a:solidFill>
+                <a:latin typeface="Quattrocento Sans" pitchFamily="34" charset="0"/>
+                <a:ea typeface="Quattrocento Sans" pitchFamily="34" charset="-122"/>
+                <a:cs typeface="Quattrocento Sans" pitchFamily="34" charset="-120"/>
+              </a:rPr>
+              <a:t>Productivity can be </a:t>
+            </a:r>
+            <a:r>
+              <a:rPr lang="en-US" sz="1200" b="1" dirty="0">
+                <a:solidFill>
+                  <a:srgbClr val="5C5650">
+                    <a:alpha val="80000"/>
+                  </a:srgbClr>
+                </a:solidFill>
+                <a:latin typeface="Quattrocento Sans" pitchFamily="34" charset="0"/>
+                <a:ea typeface="Quattrocento Sans" pitchFamily="34" charset="-122"/>
+                <a:cs typeface="Quattrocento Sans" pitchFamily="34" charset="-120"/>
+              </a:rPr>
+              <a:t>partially predicted</a:t>
+            </a:r>
+            <a:r>
+              <a:rPr lang="en-US" sz="1200" dirty="0">
+                <a:solidFill>
+                  <a:srgbClr val="5C5650">
+                    <a:alpha val="80000"/>
+                  </a:srgbClr>
+                </a:solidFill>
+                <a:latin typeface="Quattrocento Sans" pitchFamily="34" charset="0"/>
+                <a:ea typeface="Quattrocento Sans" pitchFamily="34" charset="-122"/>
+                <a:cs typeface="Quattrocento Sans" pitchFamily="34" charset="-120"/>
+              </a:rPr>
+              <a:t> from behavioural factors</a:t>
+            </a:r>
+            <a:endParaRPr lang="en-US" sz="1600" dirty="0"/>
+          </a:p>
+        </p:txBody>
+      </p:sp>
+      <p:sp>
+        <p:nvSpPr>
+          <p:cNvPr id="33" name="Shape 30">
+            <a:extLst>
+              <a:ext uri="{FF2B5EF4-FFF2-40B4-BE49-F238E27FC236}">
+                <a16:creationId xmlns:a16="http://schemas.microsoft.com/office/drawing/2014/main" id="{B52570BC-F901-8E3E-6F96-FA626DF932B8}"/>
+              </a:ext>
+            </a:extLst>
+          </p:cNvPr>
+          <p:cNvSpPr/>
+          <p:nvPr/>
+        </p:nvSpPr>
+        <p:spPr>
+          <a:xfrm>
+            <a:off x="8356550" y="2362200"/>
+            <a:ext cx="76200" cy="76200"/>
+          </a:xfrm>
+          <a:custGeom>
+            <a:avLst/>
+            <a:gdLst/>
+            <a:ahLst/>
+            <a:cxnLst/>
+            <a:rect l="l" t="t" r="r" b="b"/>
+            <a:pathLst>
+              <a:path w="76200" h="76200">
+                <a:moveTo>
+                  <a:pt x="38100" y="0"/>
+                </a:moveTo>
+                <a:lnTo>
+                  <a:pt x="38100" y="0"/>
+                </a:lnTo>
+                <a:cubicBezTo>
+                  <a:pt x="59128" y="0"/>
+                  <a:pt x="76200" y="17072"/>
+                  <a:pt x="76200" y="38100"/>
+                </a:cubicBezTo>
+                <a:lnTo>
+                  <a:pt x="76200" y="38100"/>
+                </a:lnTo>
+                <a:cubicBezTo>
+                  <a:pt x="76200" y="59128"/>
+                  <a:pt x="59128" y="76200"/>
+                  <a:pt x="38100" y="76200"/>
+                </a:cubicBezTo>
+                <a:lnTo>
+                  <a:pt x="38100" y="76200"/>
+                </a:lnTo>
+                <a:cubicBezTo>
+                  <a:pt x="17072" y="76200"/>
+                  <a:pt x="0" y="59128"/>
+                  <a:pt x="0" y="38100"/>
+                </a:cubicBezTo>
+                <a:lnTo>
+                  <a:pt x="0" y="38100"/>
+                </a:lnTo>
+                <a:cubicBezTo>
+                  <a:pt x="0" y="17072"/>
+                  <a:pt x="17072" y="0"/>
+                  <a:pt x="38100" y="0"/>
+                </a:cubicBezTo>
+                <a:close/>
+              </a:path>
+            </a:pathLst>
+          </a:custGeom>
+          <a:solidFill>
+            <a:srgbClr val="A8B5A0"/>
+          </a:solidFill>
+          <a:ln/>
+        </p:spPr>
+        <p:txBody>
+          <a:bodyPr/>
+          <a:lstStyle/>
+          <a:p>
+            <a:endParaRPr lang="zh-CN" altLang="en-US"/>
+          </a:p>
+        </p:txBody>
+      </p:sp>
+      <p:sp>
+        <p:nvSpPr>
+          <p:cNvPr id="34" name="Text 31">
+            <a:extLst>
+              <a:ext uri="{FF2B5EF4-FFF2-40B4-BE49-F238E27FC236}">
+                <a16:creationId xmlns:a16="http://schemas.microsoft.com/office/drawing/2014/main" id="{87A14009-12D6-261C-CEED-43CB7E13BE38}"/>
+              </a:ext>
+            </a:extLst>
+          </p:cNvPr>
+          <p:cNvSpPr/>
+          <p:nvPr/>
+        </p:nvSpPr>
+        <p:spPr>
+          <a:xfrm>
+            <a:off x="8547050" y="2286000"/>
+            <a:ext cx="3152775" cy="495300"/>
+          </a:xfrm>
+          <a:prstGeom prst="rect">
+            <a:avLst/>
+          </a:prstGeom>
+          <a:noFill/>
+          <a:ln/>
+        </p:spPr>
+        <p:txBody>
+          <a:bodyPr wrap="square" lIns="0" tIns="0" rIns="0" bIns="0" rtlCol="0" anchor="ctr"/>
+          <a:lstStyle/>
+          <a:p>
+            <a:pPr>
+              <a:lnSpc>
+                <a:spcPct val="140000"/>
+              </a:lnSpc>
+            </a:pPr>
+            <a:r>
+              <a:rPr lang="en-US" sz="1200" b="1" dirty="0">
+                <a:solidFill>
+                  <a:srgbClr val="5C5650">
+                    <a:alpha val="80000"/>
+                  </a:srgbClr>
+                </a:solidFill>
+                <a:latin typeface="Quattrocento Sans" pitchFamily="34" charset="0"/>
+                <a:ea typeface="Quattrocento Sans" pitchFamily="34" charset="-122"/>
+                <a:cs typeface="Quattrocento Sans" pitchFamily="34" charset="-120"/>
+              </a:rPr>
+              <a:t>Multiple factors matter more</a:t>
+            </a:r>
+            <a:r>
+              <a:rPr lang="en-US" sz="1200" dirty="0">
+                <a:solidFill>
+                  <a:srgbClr val="5C5650">
+                    <a:alpha val="80000"/>
+                  </a:srgbClr>
+                </a:solidFill>
+                <a:latin typeface="Quattrocento Sans" pitchFamily="34" charset="0"/>
+                <a:ea typeface="Quattrocento Sans" pitchFamily="34" charset="-122"/>
+                <a:cs typeface="Quattrocento Sans" pitchFamily="34" charset="-120"/>
+              </a:rPr>
+              <a:t> than any single habit alone</a:t>
+            </a:r>
+            <a:endParaRPr lang="en-US" sz="1600" dirty="0"/>
+          </a:p>
+        </p:txBody>
+      </p:sp>
+      <p:sp>
+        <p:nvSpPr>
+          <p:cNvPr id="35" name="Shape 32">
+            <a:extLst>
+              <a:ext uri="{FF2B5EF4-FFF2-40B4-BE49-F238E27FC236}">
+                <a16:creationId xmlns:a16="http://schemas.microsoft.com/office/drawing/2014/main" id="{9FBE60F9-1E93-5207-700E-8A019AFF79E3}"/>
+              </a:ext>
+            </a:extLst>
+          </p:cNvPr>
+          <p:cNvSpPr/>
+          <p:nvPr/>
+        </p:nvSpPr>
+        <p:spPr>
+          <a:xfrm>
+            <a:off x="8356550" y="3009900"/>
+            <a:ext cx="76200" cy="76200"/>
+          </a:xfrm>
+          <a:custGeom>
+            <a:avLst/>
+            <a:gdLst/>
+            <a:ahLst/>
+            <a:cxnLst/>
+            <a:rect l="l" t="t" r="r" b="b"/>
+            <a:pathLst>
+              <a:path w="76200" h="76200">
+                <a:moveTo>
+                  <a:pt x="38100" y="0"/>
+                </a:moveTo>
+                <a:lnTo>
+                  <a:pt x="38100" y="0"/>
+                </a:lnTo>
+                <a:cubicBezTo>
+                  <a:pt x="59128" y="0"/>
+                  <a:pt x="76200" y="17072"/>
+                  <a:pt x="76200" y="38100"/>
+                </a:cubicBezTo>
+                <a:lnTo>
+                  <a:pt x="76200" y="38100"/>
+                </a:lnTo>
+                <a:cubicBezTo>
+                  <a:pt x="76200" y="59128"/>
+                  <a:pt x="59128" y="76200"/>
+                  <a:pt x="38100" y="76200"/>
+                </a:cubicBezTo>
+                <a:lnTo>
+                  <a:pt x="38100" y="76200"/>
+                </a:lnTo>
+                <a:cubicBezTo>
+                  <a:pt x="17072" y="76200"/>
+                  <a:pt x="0" y="59128"/>
+                  <a:pt x="0" y="38100"/>
+                </a:cubicBezTo>
+                <a:lnTo>
+                  <a:pt x="0" y="38100"/>
+                </a:lnTo>
+                <a:cubicBezTo>
+                  <a:pt x="0" y="17072"/>
+                  <a:pt x="17072" y="0"/>
+                  <a:pt x="38100" y="0"/>
+                </a:cubicBezTo>
+                <a:close/>
+              </a:path>
+            </a:pathLst>
+          </a:custGeom>
+          <a:solidFill>
+            <a:srgbClr val="A8B5A0"/>
+          </a:solidFill>
+          <a:ln/>
+        </p:spPr>
+        <p:txBody>
+          <a:bodyPr/>
+          <a:lstStyle/>
+          <a:p>
+            <a:endParaRPr lang="zh-CN" altLang="en-US"/>
+          </a:p>
+        </p:txBody>
+      </p:sp>
+      <p:sp>
+        <p:nvSpPr>
+          <p:cNvPr id="36" name="Text 33">
+            <a:extLst>
+              <a:ext uri="{FF2B5EF4-FFF2-40B4-BE49-F238E27FC236}">
+                <a16:creationId xmlns:a16="http://schemas.microsoft.com/office/drawing/2014/main" id="{311A953E-2F33-17C6-9363-FF9E0139517D}"/>
+              </a:ext>
+            </a:extLst>
+          </p:cNvPr>
+          <p:cNvSpPr/>
+          <p:nvPr/>
+        </p:nvSpPr>
+        <p:spPr>
+          <a:xfrm>
+            <a:off x="8547050" y="2933700"/>
+            <a:ext cx="3152775" cy="495300"/>
+          </a:xfrm>
+          <a:prstGeom prst="rect">
+            <a:avLst/>
+          </a:prstGeom>
+          <a:noFill/>
+          <a:ln/>
+        </p:spPr>
+        <p:txBody>
+          <a:bodyPr wrap="square" lIns="0" tIns="0" rIns="0" bIns="0" rtlCol="0" anchor="ctr"/>
+          <a:lstStyle/>
+          <a:p>
+            <a:pPr>
+              <a:lnSpc>
+                <a:spcPct val="140000"/>
+              </a:lnSpc>
+            </a:pPr>
+            <a:r>
+              <a:rPr lang="en-US" sz="1200" dirty="0">
+                <a:solidFill>
+                  <a:srgbClr val="5C5650">
+                    <a:alpha val="80000"/>
+                  </a:srgbClr>
+                </a:solidFill>
+                <a:latin typeface="Quattrocento Sans" pitchFamily="34" charset="0"/>
+                <a:ea typeface="Quattrocento Sans" pitchFamily="34" charset="-122"/>
+                <a:cs typeface="Quattrocento Sans" pitchFamily="34" charset="-120"/>
+              </a:rPr>
+              <a:t>Combining EDA, regression, and classification gave a </a:t>
+            </a:r>
+            <a:r>
+              <a:rPr lang="en-US" sz="1200" b="1" dirty="0">
+                <a:solidFill>
+                  <a:srgbClr val="5C5650">
+                    <a:alpha val="80000"/>
+                  </a:srgbClr>
+                </a:solidFill>
+                <a:latin typeface="Quattrocento Sans" pitchFamily="34" charset="0"/>
+                <a:ea typeface="Quattrocento Sans" pitchFamily="34" charset="-122"/>
+                <a:cs typeface="Quattrocento Sans" pitchFamily="34" charset="-120"/>
+              </a:rPr>
+              <a:t>fuller understanding</a:t>
+            </a:r>
+            <a:endParaRPr lang="en-US" sz="1600" dirty="0"/>
+          </a:p>
+        </p:txBody>
+      </p:sp>
+      <p:sp>
+        <p:nvSpPr>
+          <p:cNvPr id="37" name="Shape 34">
+            <a:extLst>
+              <a:ext uri="{FF2B5EF4-FFF2-40B4-BE49-F238E27FC236}">
+                <a16:creationId xmlns:a16="http://schemas.microsoft.com/office/drawing/2014/main" id="{B6CD1604-1BDC-0E75-5CE0-D76D88B5D32B}"/>
+              </a:ext>
+            </a:extLst>
+          </p:cNvPr>
+          <p:cNvSpPr/>
+          <p:nvPr/>
+        </p:nvSpPr>
+        <p:spPr>
+          <a:xfrm>
+            <a:off x="400050" y="4333875"/>
+            <a:ext cx="11410950" cy="1076325"/>
+          </a:xfrm>
+          <a:custGeom>
+            <a:avLst/>
+            <a:gdLst/>
+            <a:ahLst/>
+            <a:cxnLst/>
+            <a:rect l="l" t="t" r="r" b="b"/>
+            <a:pathLst>
+              <a:path w="11410950" h="1076325">
+                <a:moveTo>
+                  <a:pt x="38100" y="0"/>
+                </a:moveTo>
+                <a:lnTo>
+                  <a:pt x="11334746" y="0"/>
+                </a:lnTo>
+                <a:cubicBezTo>
+                  <a:pt x="11376832" y="0"/>
+                  <a:pt x="11410950" y="34118"/>
+                  <a:pt x="11410950" y="76204"/>
+                </a:cubicBezTo>
+                <a:lnTo>
+                  <a:pt x="11410950" y="1000121"/>
+                </a:lnTo>
+                <a:cubicBezTo>
+                  <a:pt x="11410950" y="1042207"/>
+                  <a:pt x="11376832" y="1076325"/>
+                  <a:pt x="11334746" y="1076325"/>
+                </a:cubicBezTo>
+                <a:lnTo>
+                  <a:pt x="38100" y="1076325"/>
+                </a:lnTo>
+                <a:cubicBezTo>
+                  <a:pt x="17072" y="1076325"/>
+                  <a:pt x="0" y="1059253"/>
+                  <a:pt x="0" y="1038225"/>
+                </a:cubicBezTo>
+                <a:lnTo>
+                  <a:pt x="0" y="38100"/>
+                </a:lnTo>
+                <a:cubicBezTo>
+                  <a:pt x="0" y="17072"/>
+                  <a:pt x="17072" y="0"/>
+                  <a:pt x="38100" y="0"/>
+                </a:cubicBezTo>
+                <a:close/>
+              </a:path>
+            </a:pathLst>
+          </a:custGeom>
+          <a:solidFill>
+            <a:srgbClr val="9B8E7D">
+              <a:alpha val="14902"/>
+            </a:srgbClr>
+          </a:solidFill>
+          <a:ln/>
+        </p:spPr>
+        <p:txBody>
+          <a:bodyPr/>
+          <a:lstStyle/>
+          <a:p>
+            <a:endParaRPr lang="zh-CN" altLang="en-US"/>
+          </a:p>
+        </p:txBody>
+      </p:sp>
+      <p:sp>
+        <p:nvSpPr>
+          <p:cNvPr id="38" name="Shape 35">
+            <a:extLst>
+              <a:ext uri="{FF2B5EF4-FFF2-40B4-BE49-F238E27FC236}">
+                <a16:creationId xmlns:a16="http://schemas.microsoft.com/office/drawing/2014/main" id="{EFF2160B-C24E-E1B5-BB26-5372B9218452}"/>
+              </a:ext>
+            </a:extLst>
+          </p:cNvPr>
+          <p:cNvSpPr/>
+          <p:nvPr/>
+        </p:nvSpPr>
+        <p:spPr>
+          <a:xfrm>
+            <a:off x="400050" y="4333875"/>
+            <a:ext cx="38100" cy="1076325"/>
+          </a:xfrm>
+          <a:custGeom>
+            <a:avLst/>
+            <a:gdLst/>
+            <a:ahLst/>
+            <a:cxnLst/>
+            <a:rect l="l" t="t" r="r" b="b"/>
+            <a:pathLst>
+              <a:path w="38100" h="1076325">
+                <a:moveTo>
+                  <a:pt x="38100" y="0"/>
+                </a:moveTo>
+                <a:lnTo>
+                  <a:pt x="38100" y="0"/>
+                </a:lnTo>
+                <a:lnTo>
+                  <a:pt x="38100" y="1076325"/>
+                </a:lnTo>
+                <a:lnTo>
+                  <a:pt x="38100" y="1076325"/>
+                </a:lnTo>
+                <a:cubicBezTo>
+                  <a:pt x="17072" y="1076325"/>
+                  <a:pt x="0" y="1059253"/>
+                  <a:pt x="0" y="1038225"/>
+                </a:cubicBezTo>
+                <a:lnTo>
+                  <a:pt x="0" y="38100"/>
+                </a:lnTo>
+                <a:cubicBezTo>
+                  <a:pt x="0" y="17072"/>
+                  <a:pt x="17072" y="0"/>
+                  <a:pt x="38100" y="0"/>
+                </a:cubicBezTo>
+                <a:close/>
+              </a:path>
+            </a:pathLst>
+          </a:custGeom>
+          <a:solidFill>
+            <a:srgbClr val="9B8E7D"/>
+          </a:solidFill>
+          <a:ln/>
+        </p:spPr>
+        <p:txBody>
+          <a:bodyPr/>
+          <a:lstStyle/>
+          <a:p>
+            <a:endParaRPr lang="zh-CN" altLang="en-US"/>
+          </a:p>
+        </p:txBody>
+      </p:sp>
+      <p:sp>
+        <p:nvSpPr>
+          <p:cNvPr id="39" name="Shape 36">
+            <a:extLst>
+              <a:ext uri="{FF2B5EF4-FFF2-40B4-BE49-F238E27FC236}">
+                <a16:creationId xmlns:a16="http://schemas.microsoft.com/office/drawing/2014/main" id="{94F4DD9A-FCF8-6679-4548-1AC32FFACBC7}"/>
+              </a:ext>
+            </a:extLst>
+          </p:cNvPr>
+          <p:cNvSpPr/>
+          <p:nvPr/>
+        </p:nvSpPr>
+        <p:spPr>
+          <a:xfrm>
+            <a:off x="702469" y="4600575"/>
+            <a:ext cx="214313" cy="190500"/>
+          </a:xfrm>
+          <a:custGeom>
+            <a:avLst/>
+            <a:gdLst/>
+            <a:ahLst/>
+            <a:cxnLst/>
+            <a:rect l="l" t="t" r="r" b="b"/>
+            <a:pathLst>
+              <a:path w="214313" h="190500">
+                <a:moveTo>
+                  <a:pt x="115156" y="-7032"/>
+                </a:moveTo>
+                <a:cubicBezTo>
+                  <a:pt x="113630" y="-10009"/>
+                  <a:pt x="110542" y="-11906"/>
+                  <a:pt x="107193" y="-11906"/>
+                </a:cubicBezTo>
+                <a:cubicBezTo>
+                  <a:pt x="103845" y="-11906"/>
+                  <a:pt x="100757" y="-10009"/>
+                  <a:pt x="99231" y="-7032"/>
+                </a:cubicBezTo>
+                <a:lnTo>
+                  <a:pt x="71847" y="46620"/>
+                </a:lnTo>
+                <a:lnTo>
+                  <a:pt x="12353" y="56071"/>
+                </a:lnTo>
+                <a:cubicBezTo>
+                  <a:pt x="9041" y="56592"/>
+                  <a:pt x="6288" y="58936"/>
+                  <a:pt x="5246" y="62136"/>
+                </a:cubicBezTo>
+                <a:cubicBezTo>
+                  <a:pt x="4204" y="65336"/>
+                  <a:pt x="5060" y="68833"/>
+                  <a:pt x="7404" y="71214"/>
+                </a:cubicBezTo>
+                <a:lnTo>
+                  <a:pt x="49969" y="113816"/>
+                </a:lnTo>
+                <a:lnTo>
+                  <a:pt x="40593" y="173310"/>
+                </a:lnTo>
+                <a:cubicBezTo>
+                  <a:pt x="40072" y="176622"/>
+                  <a:pt x="41449" y="179970"/>
+                  <a:pt x="44165" y="181942"/>
+                </a:cubicBezTo>
+                <a:cubicBezTo>
+                  <a:pt x="46881" y="183914"/>
+                  <a:pt x="50453" y="184212"/>
+                  <a:pt x="53467" y="182687"/>
+                </a:cubicBezTo>
+                <a:lnTo>
+                  <a:pt x="107193" y="155377"/>
+                </a:lnTo>
+                <a:lnTo>
+                  <a:pt x="160883" y="182687"/>
+                </a:lnTo>
+                <a:cubicBezTo>
+                  <a:pt x="163860" y="184212"/>
+                  <a:pt x="167469" y="183914"/>
+                  <a:pt x="170185" y="181942"/>
+                </a:cubicBezTo>
+                <a:cubicBezTo>
+                  <a:pt x="172901" y="179970"/>
+                  <a:pt x="174278" y="176659"/>
+                  <a:pt x="173757" y="173310"/>
+                </a:cubicBezTo>
+                <a:lnTo>
+                  <a:pt x="164343" y="113816"/>
+                </a:lnTo>
+                <a:lnTo>
+                  <a:pt x="206908" y="71214"/>
+                </a:lnTo>
+                <a:cubicBezTo>
+                  <a:pt x="209290" y="68833"/>
+                  <a:pt x="210108" y="65336"/>
+                  <a:pt x="209066" y="62136"/>
+                </a:cubicBezTo>
+                <a:cubicBezTo>
+                  <a:pt x="208025" y="58936"/>
+                  <a:pt x="205308" y="56592"/>
+                  <a:pt x="201960" y="56071"/>
+                </a:cubicBezTo>
+                <a:lnTo>
+                  <a:pt x="142503" y="46620"/>
+                </a:lnTo>
+                <a:lnTo>
+                  <a:pt x="115156" y="-7032"/>
+                </a:lnTo>
+                <a:close/>
+              </a:path>
+            </a:pathLst>
+          </a:custGeom>
+          <a:solidFill>
+            <a:srgbClr val="9B8E7D"/>
+          </a:solidFill>
+          <a:ln/>
+        </p:spPr>
+        <p:txBody>
+          <a:bodyPr/>
+          <a:lstStyle/>
+          <a:p>
+            <a:endParaRPr lang="zh-CN" altLang="en-US"/>
+          </a:p>
+        </p:txBody>
+      </p:sp>
+      <p:sp>
+        <p:nvSpPr>
+          <p:cNvPr id="40" name="Text 37">
+            <a:extLst>
+              <a:ext uri="{FF2B5EF4-FFF2-40B4-BE49-F238E27FC236}">
+                <a16:creationId xmlns:a16="http://schemas.microsoft.com/office/drawing/2014/main" id="{36C1BE36-E431-854F-5CD9-B35A4F1709A7}"/>
+              </a:ext>
+            </a:extLst>
+          </p:cNvPr>
+          <p:cNvSpPr/>
+          <p:nvPr/>
+        </p:nvSpPr>
+        <p:spPr>
+          <a:xfrm>
+            <a:off x="923925" y="4562475"/>
+            <a:ext cx="10706100" cy="619125"/>
+          </a:xfrm>
+          <a:prstGeom prst="rect">
+            <a:avLst/>
+          </a:prstGeom>
+          <a:noFill/>
+          <a:ln/>
+        </p:spPr>
+        <p:txBody>
+          <a:bodyPr wrap="square" lIns="0" tIns="0" rIns="0" bIns="0" rtlCol="0" anchor="ctr"/>
+          <a:lstStyle/>
+          <a:p>
+            <a:pPr algn="ctr">
+              <a:lnSpc>
+                <a:spcPct val="140000"/>
+              </a:lnSpc>
+            </a:pPr>
+            <a:r>
+              <a:rPr lang="en-US" sz="1500" b="1" dirty="0">
+                <a:solidFill>
+                  <a:srgbClr val="5C5650"/>
+                </a:solidFill>
+                <a:latin typeface="Quattrocento Sans" pitchFamily="34" charset="0"/>
+                <a:ea typeface="Quattrocento Sans" pitchFamily="34" charset="-122"/>
+                <a:cs typeface="Quattrocento Sans" pitchFamily="34" charset="-120"/>
+              </a:rPr>
+              <a:t>Overall, student productivity appears to be influenced by multiple interacting behaviours, and modelling it from only one factor would oversimplify the problem.</a:t>
+            </a:r>
+            <a:endParaRPr lang="en-US" sz="1600" dirty="0"/>
+          </a:p>
+        </p:txBody>
+      </p:sp>
+      <p:sp>
+        <p:nvSpPr>
+          <p:cNvPr id="41" name="Shape 38">
+            <a:extLst>
+              <a:ext uri="{FF2B5EF4-FFF2-40B4-BE49-F238E27FC236}">
+                <a16:creationId xmlns:a16="http://schemas.microsoft.com/office/drawing/2014/main" id="{58FB7157-8A79-F490-A99F-8239A6294E81}"/>
+              </a:ext>
+            </a:extLst>
+          </p:cNvPr>
+          <p:cNvSpPr/>
+          <p:nvPr/>
+        </p:nvSpPr>
+        <p:spPr>
+          <a:xfrm>
+            <a:off x="4748213" y="5562600"/>
+            <a:ext cx="609600" cy="609600"/>
+          </a:xfrm>
+          <a:custGeom>
+            <a:avLst/>
+            <a:gdLst/>
+            <a:ahLst/>
+            <a:cxnLst/>
+            <a:rect l="l" t="t" r="r" b="b"/>
+            <a:pathLst>
+              <a:path w="609600" h="609600">
+                <a:moveTo>
+                  <a:pt x="304800" y="0"/>
+                </a:moveTo>
+                <a:lnTo>
+                  <a:pt x="304800" y="0"/>
+                </a:lnTo>
+                <a:cubicBezTo>
+                  <a:pt x="473024" y="0"/>
+                  <a:pt x="609600" y="136576"/>
+                  <a:pt x="609600" y="304800"/>
+                </a:cubicBezTo>
+                <a:lnTo>
+                  <a:pt x="609600" y="304800"/>
+                </a:lnTo>
+                <a:cubicBezTo>
+                  <a:pt x="609600" y="473024"/>
+                  <a:pt x="473024" y="609600"/>
+                  <a:pt x="304800" y="609600"/>
+                </a:cubicBezTo>
+                <a:lnTo>
+                  <a:pt x="304800" y="609600"/>
+                </a:lnTo>
+                <a:cubicBezTo>
+                  <a:pt x="136576" y="609600"/>
+                  <a:pt x="0" y="473024"/>
+                  <a:pt x="0" y="304800"/>
+                </a:cubicBezTo>
+                <a:lnTo>
+                  <a:pt x="0" y="304800"/>
+                </a:lnTo>
+                <a:cubicBezTo>
+                  <a:pt x="0" y="136576"/>
+                  <a:pt x="136576" y="0"/>
+                  <a:pt x="304800" y="0"/>
+                </a:cubicBezTo>
+                <a:close/>
+              </a:path>
+            </a:pathLst>
+          </a:custGeom>
+          <a:solidFill>
+            <a:srgbClr val="A8B5A0">
+              <a:alpha val="20000"/>
+            </a:srgbClr>
+          </a:solidFill>
+          <a:ln/>
+        </p:spPr>
+        <p:txBody>
+          <a:bodyPr/>
+          <a:lstStyle/>
+          <a:p>
+            <a:endParaRPr lang="zh-CN" altLang="en-US"/>
+          </a:p>
+        </p:txBody>
+      </p:sp>
+      <p:sp>
+        <p:nvSpPr>
+          <p:cNvPr id="42" name="Shape 39">
+            <a:extLst>
+              <a:ext uri="{FF2B5EF4-FFF2-40B4-BE49-F238E27FC236}">
+                <a16:creationId xmlns:a16="http://schemas.microsoft.com/office/drawing/2014/main" id="{E26CC94D-2E6C-96E6-555E-7677473A88A9}"/>
+              </a:ext>
+            </a:extLst>
+          </p:cNvPr>
+          <p:cNvSpPr/>
+          <p:nvPr/>
+        </p:nvSpPr>
+        <p:spPr>
+          <a:xfrm>
+            <a:off x="4912519" y="5724525"/>
+            <a:ext cx="285750" cy="285750"/>
+          </a:xfrm>
+          <a:custGeom>
+            <a:avLst/>
+            <a:gdLst/>
+            <a:ahLst/>
+            <a:cxnLst/>
+            <a:rect l="l" t="t" r="r" b="b"/>
+            <a:pathLst>
+              <a:path w="285750" h="285750">
+                <a:moveTo>
+                  <a:pt x="35719" y="35719"/>
+                </a:moveTo>
+                <a:cubicBezTo>
+                  <a:pt x="35719" y="25840"/>
+                  <a:pt x="27738" y="17859"/>
+                  <a:pt x="17859" y="17859"/>
+                </a:cubicBezTo>
+                <a:cubicBezTo>
+                  <a:pt x="7981" y="17859"/>
+                  <a:pt x="0" y="25840"/>
+                  <a:pt x="0" y="35719"/>
+                </a:cubicBezTo>
+                <a:lnTo>
+                  <a:pt x="0" y="223242"/>
+                </a:lnTo>
+                <a:cubicBezTo>
+                  <a:pt x="0" y="247910"/>
+                  <a:pt x="19980" y="267891"/>
+                  <a:pt x="44648" y="267891"/>
+                </a:cubicBezTo>
+                <a:lnTo>
+                  <a:pt x="267891" y="267891"/>
+                </a:lnTo>
+                <a:cubicBezTo>
+                  <a:pt x="277769" y="267891"/>
+                  <a:pt x="285750" y="259910"/>
+                  <a:pt x="285750" y="250031"/>
+                </a:cubicBezTo>
+                <a:cubicBezTo>
+                  <a:pt x="285750" y="240153"/>
+                  <a:pt x="277769" y="232172"/>
+                  <a:pt x="267891" y="232172"/>
+                </a:cubicBezTo>
+                <a:lnTo>
+                  <a:pt x="44648" y="232172"/>
+                </a:lnTo>
+                <a:cubicBezTo>
+                  <a:pt x="39737" y="232172"/>
+                  <a:pt x="35719" y="228154"/>
+                  <a:pt x="35719" y="223242"/>
+                </a:cubicBezTo>
+                <a:lnTo>
+                  <a:pt x="35719" y="35719"/>
+                </a:lnTo>
+                <a:close/>
+                <a:moveTo>
+                  <a:pt x="262644" y="84051"/>
+                </a:moveTo>
+                <a:cubicBezTo>
+                  <a:pt x="269621" y="77074"/>
+                  <a:pt x="269621" y="65745"/>
+                  <a:pt x="262644" y="58769"/>
+                </a:cubicBezTo>
+                <a:cubicBezTo>
+                  <a:pt x="255668" y="51792"/>
+                  <a:pt x="244339" y="51792"/>
+                  <a:pt x="237362" y="58769"/>
+                </a:cubicBezTo>
+                <a:lnTo>
+                  <a:pt x="178594" y="117593"/>
+                </a:lnTo>
+                <a:lnTo>
+                  <a:pt x="146558" y="85613"/>
+                </a:lnTo>
+                <a:cubicBezTo>
+                  <a:pt x="139582" y="78637"/>
+                  <a:pt x="128253" y="78637"/>
+                  <a:pt x="121276" y="85613"/>
+                </a:cubicBezTo>
+                <a:lnTo>
+                  <a:pt x="67698" y="139192"/>
+                </a:lnTo>
+                <a:cubicBezTo>
+                  <a:pt x="60722" y="146168"/>
+                  <a:pt x="60722" y="157497"/>
+                  <a:pt x="67698" y="164474"/>
+                </a:cubicBezTo>
+                <a:cubicBezTo>
+                  <a:pt x="74675" y="171450"/>
+                  <a:pt x="86004" y="171450"/>
+                  <a:pt x="92980" y="164474"/>
+                </a:cubicBezTo>
+                <a:lnTo>
+                  <a:pt x="133945" y="123509"/>
+                </a:lnTo>
+                <a:lnTo>
+                  <a:pt x="165981" y="155544"/>
+                </a:lnTo>
+                <a:cubicBezTo>
+                  <a:pt x="172957" y="162520"/>
+                  <a:pt x="184286" y="162520"/>
+                  <a:pt x="191263" y="155544"/>
+                </a:cubicBezTo>
+                <a:lnTo>
+                  <a:pt x="262700" y="84106"/>
+                </a:lnTo>
+                <a:close/>
+              </a:path>
+            </a:pathLst>
+          </a:custGeom>
+          <a:solidFill>
+            <a:srgbClr val="A8B5A0"/>
+          </a:solidFill>
+          <a:ln/>
+        </p:spPr>
+        <p:txBody>
+          <a:bodyPr/>
+          <a:lstStyle/>
+          <a:p>
+            <a:endParaRPr lang="zh-CN" altLang="en-US"/>
+          </a:p>
+        </p:txBody>
+      </p:sp>
+      <p:sp>
+        <p:nvSpPr>
+          <p:cNvPr id="43" name="Text 40">
+            <a:extLst>
+              <a:ext uri="{FF2B5EF4-FFF2-40B4-BE49-F238E27FC236}">
+                <a16:creationId xmlns:a16="http://schemas.microsoft.com/office/drawing/2014/main" id="{0C784C4E-60D7-6934-64AC-31D7FCA1713E}"/>
+              </a:ext>
+            </a:extLst>
+          </p:cNvPr>
+          <p:cNvSpPr/>
+          <p:nvPr/>
+        </p:nvSpPr>
+        <p:spPr>
+          <a:xfrm>
+            <a:off x="4652963" y="6248400"/>
+            <a:ext cx="800100" cy="228600"/>
+          </a:xfrm>
+          <a:prstGeom prst="rect">
+            <a:avLst/>
+          </a:prstGeom>
+          <a:noFill/>
+          <a:ln/>
+        </p:spPr>
+        <p:txBody>
+          <a:bodyPr wrap="square" lIns="0" tIns="0" rIns="0" bIns="0" rtlCol="0" anchor="ctr"/>
+          <a:lstStyle/>
+          <a:p>
+            <a:pPr algn="ctr">
+              <a:lnSpc>
+                <a:spcPct val="130000"/>
+              </a:lnSpc>
+            </a:pPr>
+            <a:r>
+              <a:rPr lang="en-US" sz="1200" b="1" dirty="0">
+                <a:solidFill>
+                  <a:srgbClr val="5C5650"/>
+                </a:solidFill>
+                <a:latin typeface="Quattrocento Sans" pitchFamily="34" charset="0"/>
+                <a:ea typeface="Quattrocento Sans" pitchFamily="34" charset="-122"/>
+                <a:cs typeface="Quattrocento Sans" pitchFamily="34" charset="-120"/>
+              </a:rPr>
+              <a:t>Regression</a:t>
+            </a:r>
+            <a:endParaRPr lang="en-US" sz="1600" dirty="0"/>
+          </a:p>
+        </p:txBody>
+      </p:sp>
+      <p:sp>
+        <p:nvSpPr>
+          <p:cNvPr id="44" name="Shape 41">
+            <a:extLst>
+              <a:ext uri="{FF2B5EF4-FFF2-40B4-BE49-F238E27FC236}">
+                <a16:creationId xmlns:a16="http://schemas.microsoft.com/office/drawing/2014/main" id="{E1AAC175-F917-2153-9E2B-AEF86CFBE4DB}"/>
+              </a:ext>
+            </a:extLst>
+          </p:cNvPr>
+          <p:cNvSpPr/>
+          <p:nvPr/>
+        </p:nvSpPr>
+        <p:spPr>
+          <a:xfrm>
+            <a:off x="5848350" y="5562600"/>
+            <a:ext cx="609600" cy="609600"/>
+          </a:xfrm>
+          <a:custGeom>
+            <a:avLst/>
+            <a:gdLst/>
+            <a:ahLst/>
+            <a:cxnLst/>
+            <a:rect l="l" t="t" r="r" b="b"/>
+            <a:pathLst>
+              <a:path w="609600" h="609600">
+                <a:moveTo>
+                  <a:pt x="304800" y="0"/>
+                </a:moveTo>
+                <a:lnTo>
+                  <a:pt x="304800" y="0"/>
+                </a:lnTo>
+                <a:cubicBezTo>
+                  <a:pt x="473024" y="0"/>
+                  <a:pt x="609600" y="136576"/>
+                  <a:pt x="609600" y="304800"/>
+                </a:cubicBezTo>
+                <a:lnTo>
+                  <a:pt x="609600" y="304800"/>
+                </a:lnTo>
+                <a:cubicBezTo>
+                  <a:pt x="609600" y="473024"/>
+                  <a:pt x="473024" y="609600"/>
+                  <a:pt x="304800" y="609600"/>
+                </a:cubicBezTo>
+                <a:lnTo>
+                  <a:pt x="304800" y="609600"/>
+                </a:lnTo>
+                <a:cubicBezTo>
+                  <a:pt x="136576" y="609600"/>
+                  <a:pt x="0" y="473024"/>
+                  <a:pt x="0" y="304800"/>
+                </a:cubicBezTo>
+                <a:lnTo>
+                  <a:pt x="0" y="304800"/>
+                </a:lnTo>
+                <a:cubicBezTo>
+                  <a:pt x="0" y="136576"/>
+                  <a:pt x="136576" y="0"/>
+                  <a:pt x="304800" y="0"/>
+                </a:cubicBezTo>
+                <a:close/>
+              </a:path>
+            </a:pathLst>
+          </a:custGeom>
+          <a:solidFill>
+            <a:srgbClr val="9B8E7D">
+              <a:alpha val="20000"/>
+            </a:srgbClr>
+          </a:solidFill>
+          <a:ln/>
+        </p:spPr>
+        <p:txBody>
+          <a:bodyPr/>
+          <a:lstStyle/>
+          <a:p>
+            <a:endParaRPr lang="zh-CN" altLang="en-US"/>
+          </a:p>
+        </p:txBody>
+      </p:sp>
+      <p:sp>
+        <p:nvSpPr>
+          <p:cNvPr id="45" name="Shape 42">
+            <a:extLst>
+              <a:ext uri="{FF2B5EF4-FFF2-40B4-BE49-F238E27FC236}">
+                <a16:creationId xmlns:a16="http://schemas.microsoft.com/office/drawing/2014/main" id="{D880C841-E7EC-3FF0-EF69-915013EA7556}"/>
+              </a:ext>
+            </a:extLst>
+          </p:cNvPr>
+          <p:cNvSpPr/>
+          <p:nvPr/>
+        </p:nvSpPr>
+        <p:spPr>
+          <a:xfrm>
+            <a:off x="6012656" y="5724525"/>
+            <a:ext cx="285750" cy="285750"/>
+          </a:xfrm>
+          <a:custGeom>
+            <a:avLst/>
+            <a:gdLst/>
+            <a:ahLst/>
+            <a:cxnLst/>
+            <a:rect l="l" t="t" r="r" b="b"/>
+            <a:pathLst>
+              <a:path w="285750" h="285750">
+                <a:moveTo>
+                  <a:pt x="0" y="44648"/>
+                </a:moveTo>
+                <a:cubicBezTo>
+                  <a:pt x="0" y="29859"/>
+                  <a:pt x="11999" y="17859"/>
+                  <a:pt x="26789" y="17859"/>
+                </a:cubicBezTo>
+                <a:lnTo>
+                  <a:pt x="80367" y="17859"/>
+                </a:lnTo>
+                <a:cubicBezTo>
+                  <a:pt x="95157" y="17859"/>
+                  <a:pt x="107156" y="29859"/>
+                  <a:pt x="107156" y="44648"/>
+                </a:cubicBezTo>
+                <a:lnTo>
+                  <a:pt x="107156" y="53578"/>
+                </a:lnTo>
+                <a:lnTo>
+                  <a:pt x="178594" y="53578"/>
+                </a:lnTo>
+                <a:lnTo>
+                  <a:pt x="178594" y="44648"/>
+                </a:lnTo>
+                <a:cubicBezTo>
+                  <a:pt x="178594" y="29859"/>
+                  <a:pt x="190593" y="17859"/>
+                  <a:pt x="205383" y="17859"/>
+                </a:cubicBezTo>
+                <a:lnTo>
+                  <a:pt x="258961" y="17859"/>
+                </a:lnTo>
+                <a:cubicBezTo>
+                  <a:pt x="273751" y="17859"/>
+                  <a:pt x="285750" y="29859"/>
+                  <a:pt x="285750" y="44648"/>
+                </a:cubicBezTo>
+                <a:lnTo>
+                  <a:pt x="285750" y="98227"/>
+                </a:lnTo>
+                <a:cubicBezTo>
+                  <a:pt x="285750" y="113016"/>
+                  <a:pt x="273751" y="125016"/>
+                  <a:pt x="258961" y="125016"/>
+                </a:cubicBezTo>
+                <a:lnTo>
+                  <a:pt x="205383" y="125016"/>
+                </a:lnTo>
+                <a:cubicBezTo>
+                  <a:pt x="190593" y="125016"/>
+                  <a:pt x="178594" y="113016"/>
+                  <a:pt x="178594" y="98227"/>
+                </a:cubicBezTo>
+                <a:lnTo>
+                  <a:pt x="178594" y="89297"/>
+                </a:lnTo>
+                <a:lnTo>
+                  <a:pt x="107156" y="89297"/>
+                </a:lnTo>
+                <a:lnTo>
+                  <a:pt x="107156" y="98227"/>
+                </a:lnTo>
+                <a:cubicBezTo>
+                  <a:pt x="107156" y="102301"/>
+                  <a:pt x="106207" y="106207"/>
+                  <a:pt x="104589" y="109668"/>
+                </a:cubicBezTo>
+                <a:lnTo>
+                  <a:pt x="142875" y="160734"/>
+                </a:lnTo>
+                <a:lnTo>
+                  <a:pt x="187523" y="160734"/>
+                </a:lnTo>
+                <a:cubicBezTo>
+                  <a:pt x="202313" y="160734"/>
+                  <a:pt x="214313" y="172734"/>
+                  <a:pt x="214313" y="187523"/>
+                </a:cubicBezTo>
+                <a:lnTo>
+                  <a:pt x="214313" y="241102"/>
+                </a:lnTo>
+                <a:cubicBezTo>
+                  <a:pt x="214313" y="255891"/>
+                  <a:pt x="202313" y="267891"/>
+                  <a:pt x="187523" y="267891"/>
+                </a:cubicBezTo>
+                <a:lnTo>
+                  <a:pt x="133945" y="267891"/>
+                </a:lnTo>
+                <a:cubicBezTo>
+                  <a:pt x="119156" y="267891"/>
+                  <a:pt x="107156" y="255891"/>
+                  <a:pt x="107156" y="241102"/>
+                </a:cubicBezTo>
+                <a:lnTo>
+                  <a:pt x="107156" y="187523"/>
+                </a:lnTo>
+                <a:cubicBezTo>
+                  <a:pt x="107156" y="183449"/>
+                  <a:pt x="108105" y="179543"/>
+                  <a:pt x="109724" y="176082"/>
+                </a:cubicBezTo>
+                <a:lnTo>
+                  <a:pt x="71438" y="125016"/>
+                </a:lnTo>
+                <a:lnTo>
+                  <a:pt x="26789" y="125016"/>
+                </a:lnTo>
+                <a:cubicBezTo>
+                  <a:pt x="11999" y="125016"/>
+                  <a:pt x="0" y="113016"/>
+                  <a:pt x="0" y="98227"/>
+                </a:cubicBezTo>
+                <a:lnTo>
+                  <a:pt x="0" y="44648"/>
+                </a:lnTo>
+                <a:close/>
+              </a:path>
+            </a:pathLst>
+          </a:custGeom>
+          <a:solidFill>
+            <a:srgbClr val="9B8E7D"/>
+          </a:solidFill>
+          <a:ln/>
+        </p:spPr>
+        <p:txBody>
+          <a:bodyPr/>
+          <a:lstStyle/>
+          <a:p>
+            <a:endParaRPr lang="zh-CN" altLang="en-US"/>
+          </a:p>
+        </p:txBody>
+      </p:sp>
+      <p:sp>
+        <p:nvSpPr>
+          <p:cNvPr id="46" name="Text 43">
+            <a:extLst>
+              <a:ext uri="{FF2B5EF4-FFF2-40B4-BE49-F238E27FC236}">
+                <a16:creationId xmlns:a16="http://schemas.microsoft.com/office/drawing/2014/main" id="{CB49D783-13F2-B3B3-25FE-D02A57253B4E}"/>
+              </a:ext>
+            </a:extLst>
+          </p:cNvPr>
+          <p:cNvSpPr/>
+          <p:nvPr/>
+        </p:nvSpPr>
+        <p:spPr>
+          <a:xfrm>
+            <a:off x="5681663" y="6248400"/>
+            <a:ext cx="942975" cy="228600"/>
+          </a:xfrm>
+          <a:prstGeom prst="rect">
+            <a:avLst/>
+          </a:prstGeom>
+          <a:noFill/>
+          <a:ln/>
+        </p:spPr>
+        <p:txBody>
+          <a:bodyPr wrap="square" lIns="0" tIns="0" rIns="0" bIns="0" rtlCol="0" anchor="ctr"/>
+          <a:lstStyle/>
+          <a:p>
+            <a:pPr algn="ctr">
+              <a:lnSpc>
+                <a:spcPct val="130000"/>
+              </a:lnSpc>
+            </a:pPr>
+            <a:r>
+              <a:rPr lang="en-US" sz="1200" b="1" dirty="0">
+                <a:solidFill>
+                  <a:srgbClr val="5C5650"/>
+                </a:solidFill>
+                <a:latin typeface="Quattrocento Sans" pitchFamily="34" charset="0"/>
+                <a:ea typeface="Quattrocento Sans" pitchFamily="34" charset="-122"/>
+                <a:cs typeface="Quattrocento Sans" pitchFamily="34" charset="-120"/>
+              </a:rPr>
+              <a:t>Classification</a:t>
+            </a:r>
+            <a:endParaRPr lang="en-US" sz="1600" dirty="0"/>
+          </a:p>
+        </p:txBody>
+      </p:sp>
+      <p:sp>
+        <p:nvSpPr>
+          <p:cNvPr id="47" name="Shape 44">
+            <a:extLst>
+              <a:ext uri="{FF2B5EF4-FFF2-40B4-BE49-F238E27FC236}">
+                <a16:creationId xmlns:a16="http://schemas.microsoft.com/office/drawing/2014/main" id="{BE429446-0BF6-4621-3B69-B98656ECAD86}"/>
+              </a:ext>
+            </a:extLst>
+          </p:cNvPr>
+          <p:cNvSpPr/>
+          <p:nvPr/>
+        </p:nvSpPr>
+        <p:spPr>
+          <a:xfrm>
+            <a:off x="6891338" y="5562600"/>
+            <a:ext cx="609600" cy="609600"/>
+          </a:xfrm>
+          <a:custGeom>
+            <a:avLst/>
+            <a:gdLst/>
+            <a:ahLst/>
+            <a:cxnLst/>
+            <a:rect l="l" t="t" r="r" b="b"/>
+            <a:pathLst>
+              <a:path w="609600" h="609600">
+                <a:moveTo>
+                  <a:pt x="304800" y="0"/>
+                </a:moveTo>
+                <a:lnTo>
+                  <a:pt x="304800" y="0"/>
+                </a:lnTo>
+                <a:cubicBezTo>
+                  <a:pt x="473024" y="0"/>
+                  <a:pt x="609600" y="136576"/>
+                  <a:pt x="609600" y="304800"/>
+                </a:cubicBezTo>
+                <a:lnTo>
+                  <a:pt x="609600" y="304800"/>
+                </a:lnTo>
+                <a:cubicBezTo>
+                  <a:pt x="609600" y="473024"/>
+                  <a:pt x="473024" y="609600"/>
+                  <a:pt x="304800" y="609600"/>
+                </a:cubicBezTo>
+                <a:lnTo>
+                  <a:pt x="304800" y="609600"/>
+                </a:lnTo>
+                <a:cubicBezTo>
+                  <a:pt x="136576" y="609600"/>
+                  <a:pt x="0" y="473024"/>
+                  <a:pt x="0" y="304800"/>
+                </a:cubicBezTo>
+                <a:lnTo>
+                  <a:pt x="0" y="304800"/>
+                </a:lnTo>
+                <a:cubicBezTo>
+                  <a:pt x="0" y="136576"/>
+                  <a:pt x="136576" y="0"/>
+                  <a:pt x="304800" y="0"/>
+                </a:cubicBezTo>
+                <a:close/>
+              </a:path>
+            </a:pathLst>
+          </a:custGeom>
+          <a:solidFill>
+            <a:srgbClr val="C4A99B">
+              <a:alpha val="20000"/>
+            </a:srgbClr>
+          </a:solidFill>
+          <a:ln/>
+        </p:spPr>
+        <p:txBody>
+          <a:bodyPr/>
+          <a:lstStyle/>
+          <a:p>
+            <a:endParaRPr lang="zh-CN" altLang="en-US"/>
+          </a:p>
+        </p:txBody>
+      </p:sp>
+      <p:sp>
+        <p:nvSpPr>
+          <p:cNvPr id="48" name="Shape 45">
+            <a:extLst>
+              <a:ext uri="{FF2B5EF4-FFF2-40B4-BE49-F238E27FC236}">
+                <a16:creationId xmlns:a16="http://schemas.microsoft.com/office/drawing/2014/main" id="{08B3051A-CB69-7609-1A9C-6374ECBCCD27}"/>
+              </a:ext>
+            </a:extLst>
+          </p:cNvPr>
+          <p:cNvSpPr/>
+          <p:nvPr/>
+        </p:nvSpPr>
+        <p:spPr>
+          <a:xfrm>
+            <a:off x="7091363" y="5724525"/>
+            <a:ext cx="214313" cy="285750"/>
+          </a:xfrm>
+          <a:custGeom>
+            <a:avLst/>
+            <a:gdLst/>
+            <a:ahLst/>
+            <a:cxnLst/>
+            <a:rect l="l" t="t" r="r" b="b"/>
+            <a:pathLst>
+              <a:path w="214313" h="285750">
+                <a:moveTo>
+                  <a:pt x="163469" y="214313"/>
+                </a:moveTo>
+                <a:cubicBezTo>
+                  <a:pt x="167543" y="201867"/>
+                  <a:pt x="175692" y="190593"/>
+                  <a:pt x="184900" y="180882"/>
+                </a:cubicBezTo>
+                <a:cubicBezTo>
+                  <a:pt x="203150" y="161683"/>
+                  <a:pt x="214312" y="135731"/>
+                  <a:pt x="214312" y="107156"/>
+                </a:cubicBezTo>
+                <a:cubicBezTo>
+                  <a:pt x="214312" y="47997"/>
+                  <a:pt x="166315" y="0"/>
+                  <a:pt x="107156" y="0"/>
+                </a:cubicBezTo>
+                <a:cubicBezTo>
+                  <a:pt x="47997" y="0"/>
+                  <a:pt x="0" y="47997"/>
+                  <a:pt x="0" y="107156"/>
+                </a:cubicBezTo>
+                <a:cubicBezTo>
+                  <a:pt x="0" y="135731"/>
+                  <a:pt x="11162" y="161683"/>
+                  <a:pt x="29412" y="180882"/>
+                </a:cubicBezTo>
+                <a:cubicBezTo>
+                  <a:pt x="38621" y="190593"/>
+                  <a:pt x="46825" y="201867"/>
+                  <a:pt x="50843" y="214313"/>
+                </a:cubicBezTo>
+                <a:lnTo>
+                  <a:pt x="163413" y="214313"/>
+                </a:lnTo>
+                <a:close/>
+                <a:moveTo>
+                  <a:pt x="160734" y="241102"/>
+                </a:moveTo>
+                <a:lnTo>
+                  <a:pt x="53578" y="241102"/>
+                </a:lnTo>
+                <a:lnTo>
+                  <a:pt x="53578" y="250031"/>
+                </a:lnTo>
+                <a:cubicBezTo>
+                  <a:pt x="53578" y="274700"/>
+                  <a:pt x="73558" y="294680"/>
+                  <a:pt x="98227" y="294680"/>
+                </a:cubicBezTo>
+                <a:lnTo>
+                  <a:pt x="116086" y="294680"/>
+                </a:lnTo>
+                <a:cubicBezTo>
+                  <a:pt x="140754" y="294680"/>
+                  <a:pt x="160734" y="274700"/>
+                  <a:pt x="160734" y="250031"/>
+                </a:cubicBezTo>
+                <a:lnTo>
+                  <a:pt x="160734" y="241102"/>
+                </a:lnTo>
+                <a:close/>
+                <a:moveTo>
+                  <a:pt x="102691" y="62508"/>
+                </a:moveTo>
+                <a:cubicBezTo>
+                  <a:pt x="80479" y="62508"/>
+                  <a:pt x="62508" y="80479"/>
+                  <a:pt x="62508" y="102691"/>
+                </a:cubicBezTo>
+                <a:cubicBezTo>
+                  <a:pt x="62508" y="110114"/>
+                  <a:pt x="56536" y="116086"/>
+                  <a:pt x="49113" y="116086"/>
+                </a:cubicBezTo>
+                <a:cubicBezTo>
+                  <a:pt x="41690" y="116086"/>
+                  <a:pt x="35719" y="110114"/>
+                  <a:pt x="35719" y="102691"/>
+                </a:cubicBezTo>
+                <a:cubicBezTo>
+                  <a:pt x="35719" y="65689"/>
+                  <a:pt x="65689" y="35719"/>
+                  <a:pt x="102691" y="35719"/>
+                </a:cubicBezTo>
+                <a:cubicBezTo>
+                  <a:pt x="110114" y="35719"/>
+                  <a:pt x="116086" y="41690"/>
+                  <a:pt x="116086" y="49113"/>
+                </a:cubicBezTo>
+                <a:cubicBezTo>
+                  <a:pt x="116086" y="56536"/>
+                  <a:pt x="110114" y="62508"/>
+                  <a:pt x="102691" y="62508"/>
+                </a:cubicBezTo>
+                <a:close/>
+              </a:path>
+            </a:pathLst>
+          </a:custGeom>
+          <a:solidFill>
+            <a:srgbClr val="C4A99B"/>
+          </a:solidFill>
+          <a:ln/>
+        </p:spPr>
+        <p:txBody>
+          <a:bodyPr/>
+          <a:lstStyle/>
+          <a:p>
+            <a:endParaRPr lang="zh-CN" altLang="en-US"/>
+          </a:p>
+        </p:txBody>
+      </p:sp>
+      <p:sp>
+        <p:nvSpPr>
+          <p:cNvPr id="49" name="Text 46">
+            <a:extLst>
+              <a:ext uri="{FF2B5EF4-FFF2-40B4-BE49-F238E27FC236}">
+                <a16:creationId xmlns:a16="http://schemas.microsoft.com/office/drawing/2014/main" id="{D2262A1D-3A54-D4C7-30FB-0C26D55AC8BC}"/>
+              </a:ext>
+            </a:extLst>
+          </p:cNvPr>
+          <p:cNvSpPr/>
+          <p:nvPr/>
+        </p:nvSpPr>
+        <p:spPr>
+          <a:xfrm>
+            <a:off x="6853238" y="6248400"/>
+            <a:ext cx="685800" cy="228600"/>
+          </a:xfrm>
+          <a:prstGeom prst="rect">
+            <a:avLst/>
+          </a:prstGeom>
+          <a:noFill/>
+          <a:ln/>
+        </p:spPr>
+        <p:txBody>
+          <a:bodyPr wrap="square" lIns="0" tIns="0" rIns="0" bIns="0" rtlCol="0" anchor="ctr"/>
+          <a:lstStyle/>
+          <a:p>
+            <a:pPr algn="ctr">
+              <a:lnSpc>
+                <a:spcPct val="130000"/>
+              </a:lnSpc>
+            </a:pPr>
+            <a:r>
+              <a:rPr lang="en-US" sz="1200" b="1" dirty="0">
+                <a:solidFill>
+                  <a:srgbClr val="5C5650"/>
+                </a:solidFill>
+                <a:latin typeface="Quattrocento Sans" pitchFamily="34" charset="0"/>
+                <a:ea typeface="Quattrocento Sans" pitchFamily="34" charset="-122"/>
+                <a:cs typeface="Quattrocento Sans" pitchFamily="34" charset="-120"/>
+              </a:rPr>
+              <a:t>Insights</a:t>
+            </a:r>
+            <a:endParaRPr lang="en-US" sz="1600" dirty="0"/>
+          </a:p>
+        </p:txBody>
+      </p:sp>
+    </p:spTree>
+    <p:extLst>
+      <p:ext uri="{BB962C8B-B14F-4D97-AF65-F5344CB8AC3E}">
+        <p14:creationId xmlns:p14="http://schemas.microsoft.com/office/powerpoint/2010/main" val="1686453837"/>
+      </p:ext>
+    </p:extLst>
+  </p:cSld>
+  <p:clrMapOvr>
+    <a:masterClrMapping/>
+  </p:clrMapOvr>
+  <p:transition>
+    <p:fade/>
   </p:transition>
 </p:sld>
 </file>
@@ -23409,31 +28057,31 @@
         <a:srgbClr val="000000"/>
       </a:dk1>
       <a:lt1>
-        <a:srgbClr val="ffffff"/>
+        <a:srgbClr val="FFFFFF"/>
       </a:lt1>
       <a:dk2>
         <a:srgbClr val="333333"/>
       </a:dk2>
       <a:lt2>
-        <a:srgbClr val="eeeeee"/>
+        <a:srgbClr val="EEEEEE"/>
       </a:lt2>
       <a:accent1>
-        <a:srgbClr val="8daac2"/>
+        <a:srgbClr val="8DAAC2"/>
       </a:accent1>
       <a:accent2>
-        <a:srgbClr val="ed7d31"/>
+        <a:srgbClr val="ED7D31"/>
       </a:accent2>
       <a:accent3>
-        <a:srgbClr val="a5a5a5"/>
+        <a:srgbClr val="A5A5A5"/>
       </a:accent3>
       <a:accent4>
-        <a:srgbClr val="ffc000"/>
+        <a:srgbClr val="FFC000"/>
       </a:accent4>
       <a:accent5>
-        <a:srgbClr val="4472c4"/>
+        <a:srgbClr val="4472C4"/>
       </a:accent5>
       <a:accent6>
-        <a:srgbClr val="70ad47"/>
+        <a:srgbClr val="70AD47"/>
       </a:accent6>
       <a:hlink>
         <a:srgbClr val="0563C1"/>
@@ -23694,4 +28342,319 @@
     </a:ext>
   </a:extLst>
 </a:theme>
+</file>
+
+<file path=ppt/theme/theme2.xml><?xml version="1.0" encoding="utf-8"?>
+<a:theme xmlns:a="http://schemas.openxmlformats.org/drawingml/2006/main" name="Office 主题​​">
+  <a:themeElements>
+    <a:clrScheme name="Office">
+      <a:dk1>
+        <a:sysClr val="windowText" lastClr="000000"/>
+      </a:dk1>
+      <a:lt1>
+        <a:sysClr val="window" lastClr="FFFFFF"/>
+      </a:lt1>
+      <a:dk2>
+        <a:srgbClr val="0E2841"/>
+      </a:dk2>
+      <a:lt2>
+        <a:srgbClr val="E8E8E8"/>
+      </a:lt2>
+      <a:accent1>
+        <a:srgbClr val="156082"/>
+      </a:accent1>
+      <a:accent2>
+        <a:srgbClr val="E97132"/>
+      </a:accent2>
+      <a:accent3>
+        <a:srgbClr val="196B24"/>
+      </a:accent3>
+      <a:accent4>
+        <a:srgbClr val="0F9ED5"/>
+      </a:accent4>
+      <a:accent5>
+        <a:srgbClr val="A02B93"/>
+      </a:accent5>
+      <a:accent6>
+        <a:srgbClr val="4EA72E"/>
+      </a:accent6>
+      <a:hlink>
+        <a:srgbClr val="467886"/>
+      </a:hlink>
+      <a:folHlink>
+        <a:srgbClr val="96607D"/>
+      </a:folHlink>
+    </a:clrScheme>
+    <a:fontScheme name="Office">
+      <a:majorFont>
+        <a:latin typeface="等线 Light" panose="02110004020202020204"/>
+        <a:ea typeface=""/>
+        <a:cs typeface=""/>
+        <a:font script="Jpan" typeface="游ゴシック Light"/>
+        <a:font script="Hang" typeface="맑은 고딕"/>
+        <a:font script="Hans" typeface="等线 Light"/>
+        <a:font script="Hant" typeface="新細明體"/>
+        <a:font script="Arab" typeface="Times New Roman"/>
+        <a:font script="Hebr" typeface="Times New Roman"/>
+        <a:font script="Thai" typeface="Angsana New"/>
+        <a:font script="Ethi" typeface="Nyala"/>
+        <a:font script="Beng" typeface="Vrinda"/>
+        <a:font script="Gujr" typeface="Shruti"/>
+        <a:font script="Khmr" typeface="MoolBoran"/>
+        <a:font script="Knda" typeface="Tunga"/>
+        <a:font script="Guru" typeface="Raavi"/>
+        <a:font script="Cans" typeface="Euphemia"/>
+        <a:font script="Cher" typeface="Plantagenet Cherokee"/>
+        <a:font script="Yiii" typeface="Microsoft Yi Baiti"/>
+        <a:font script="Tibt" typeface="Microsoft Himalaya"/>
+        <a:font script="Thaa" typeface="MV Boli"/>
+        <a:font script="Deva" typeface="Mangal"/>
+        <a:font script="Telu" typeface="Gautami"/>
+        <a:font script="Taml" typeface="Latha"/>
+        <a:font script="Syrc" typeface="Estrangelo Edessa"/>
+        <a:font script="Orya" typeface="Kalinga"/>
+        <a:font script="Mlym" typeface="Kartika"/>
+        <a:font script="Laoo" typeface="DokChampa"/>
+        <a:font script="Sinh" typeface="Iskoola Pota"/>
+        <a:font script="Mong" typeface="Mongolian Baiti"/>
+        <a:font script="Viet" typeface="Times New Roman"/>
+        <a:font script="Uigh" typeface="Microsoft Uighur"/>
+        <a:font script="Geor" typeface="Sylfaen"/>
+        <a:font script="Armn" typeface="Arial"/>
+        <a:font script="Bugi" typeface="Leelawadee UI"/>
+        <a:font script="Bopo" typeface="Microsoft JhengHei"/>
+        <a:font script="Java" typeface="Javanese Text"/>
+        <a:font script="Lisu" typeface="Segoe UI"/>
+        <a:font script="Mymr" typeface="Myanmar Text"/>
+        <a:font script="Nkoo" typeface="Ebrima"/>
+        <a:font script="Olck" typeface="Nirmala UI"/>
+        <a:font script="Osma" typeface="Ebrima"/>
+        <a:font script="Phag" typeface="Phagspa"/>
+        <a:font script="Syrn" typeface="Estrangelo Edessa"/>
+        <a:font script="Syrj" typeface="Estrangelo Edessa"/>
+        <a:font script="Syre" typeface="Estrangelo Edessa"/>
+        <a:font script="Sora" typeface="Nirmala UI"/>
+        <a:font script="Tale" typeface="Microsoft Tai Le"/>
+        <a:font script="Talu" typeface="Microsoft New Tai Lue"/>
+        <a:font script="Tfng" typeface="Ebrima"/>
+      </a:majorFont>
+      <a:minorFont>
+        <a:latin typeface="等线" panose="02110004020202020204"/>
+        <a:ea typeface=""/>
+        <a:cs typeface=""/>
+        <a:font script="Jpan" typeface="游ゴシック"/>
+        <a:font script="Hang" typeface="맑은 고딕"/>
+        <a:font script="Hans" typeface="等线"/>
+        <a:font script="Hant" typeface="新細明體"/>
+        <a:font script="Arab" typeface="Arial"/>
+        <a:font script="Hebr" typeface="Arial"/>
+        <a:font script="Thai" typeface="Cordia New"/>
+        <a:font script="Ethi" typeface="Nyala"/>
+        <a:font script="Beng" typeface="Vrinda"/>
+        <a:font script="Gujr" typeface="Shruti"/>
+        <a:font script="Khmr" typeface="DaunPenh"/>
+        <a:font script="Knda" typeface="Tunga"/>
+        <a:font script="Guru" typeface="Raavi"/>
+        <a:font script="Cans" typeface="Euphemia"/>
+        <a:font script="Cher" typeface="Plantagenet Cherokee"/>
+        <a:font script="Yiii" typeface="Microsoft Yi Baiti"/>
+        <a:font script="Tibt" typeface="Microsoft Himalaya"/>
+        <a:font script="Thaa" typeface="MV Boli"/>
+        <a:font script="Deva" typeface="Mangal"/>
+        <a:font script="Telu" typeface="Gautami"/>
+        <a:font script="Taml" typeface="Latha"/>
+        <a:font script="Syrc" typeface="Estrangelo Edessa"/>
+        <a:font script="Orya" typeface="Kalinga"/>
+        <a:font script="Mlym" typeface="Kartika"/>
+        <a:font script="Laoo" typeface="DokChampa"/>
+        <a:font script="Sinh" typeface="Iskoola Pota"/>
+        <a:font script="Mong" typeface="Mongolian Baiti"/>
+        <a:font script="Viet" typeface="Arial"/>
+        <a:font script="Uigh" typeface="Microsoft Uighur"/>
+        <a:font script="Geor" typeface="Sylfaen"/>
+        <a:font script="Armn" typeface="Arial"/>
+        <a:font script="Bugi" typeface="Leelawadee UI"/>
+        <a:font script="Bopo" typeface="Microsoft JhengHei"/>
+        <a:font script="Java" typeface="Javanese Text"/>
+        <a:font script="Lisu" typeface="Segoe UI"/>
+        <a:font script="Mymr" typeface="Myanmar Text"/>
+        <a:font script="Nkoo" typeface="Ebrima"/>
+        <a:font script="Olck" typeface="Nirmala UI"/>
+        <a:font script="Osma" typeface="Ebrima"/>
+        <a:font script="Phag" typeface="Phagspa"/>
+        <a:font script="Syrn" typeface="Estrangelo Edessa"/>
+        <a:font script="Syrj" typeface="Estrangelo Edessa"/>
+        <a:font script="Syre" typeface="Estrangelo Edessa"/>
+        <a:font script="Sora" typeface="Nirmala UI"/>
+        <a:font script="Tale" typeface="Microsoft Tai Le"/>
+        <a:font script="Talu" typeface="Microsoft New Tai Lue"/>
+        <a:font script="Tfng" typeface="Ebrima"/>
+      </a:minorFont>
+    </a:fontScheme>
+    <a:fmtScheme name="Office">
+      <a:fillStyleLst>
+        <a:solidFill>
+          <a:schemeClr val="phClr"/>
+        </a:solidFill>
+        <a:gradFill rotWithShape="1">
+          <a:gsLst>
+            <a:gs pos="0">
+              <a:schemeClr val="phClr">
+                <a:lumMod val="110000"/>
+                <a:satMod val="105000"/>
+                <a:tint val="67000"/>
+              </a:schemeClr>
+            </a:gs>
+            <a:gs pos="50000">
+              <a:schemeClr val="phClr">
+                <a:lumMod val="105000"/>
+                <a:satMod val="103000"/>
+                <a:tint val="73000"/>
+              </a:schemeClr>
+            </a:gs>
+            <a:gs pos="100000">
+              <a:schemeClr val="phClr">
+                <a:lumMod val="105000"/>
+                <a:satMod val="109000"/>
+                <a:tint val="81000"/>
+              </a:schemeClr>
+            </a:gs>
+          </a:gsLst>
+          <a:lin ang="5400000" scaled="0"/>
+        </a:gradFill>
+        <a:gradFill rotWithShape="1">
+          <a:gsLst>
+            <a:gs pos="0">
+              <a:schemeClr val="phClr">
+                <a:satMod val="103000"/>
+                <a:lumMod val="102000"/>
+                <a:tint val="94000"/>
+              </a:schemeClr>
+            </a:gs>
+            <a:gs pos="50000">
+              <a:schemeClr val="phClr">
+                <a:satMod val="110000"/>
+                <a:lumMod val="100000"/>
+                <a:shade val="100000"/>
+              </a:schemeClr>
+            </a:gs>
+            <a:gs pos="100000">
+              <a:schemeClr val="phClr">
+                <a:lumMod val="99000"/>
+                <a:satMod val="120000"/>
+                <a:shade val="78000"/>
+              </a:schemeClr>
+            </a:gs>
+          </a:gsLst>
+          <a:lin ang="5400000" scaled="0"/>
+        </a:gradFill>
+      </a:fillStyleLst>
+      <a:lnStyleLst>
+        <a:ln w="12700" cap="flat" cmpd="sng" algn="ctr">
+          <a:solidFill>
+            <a:schemeClr val="phClr"/>
+          </a:solidFill>
+          <a:prstDash val="solid"/>
+          <a:miter lim="800000"/>
+        </a:ln>
+        <a:ln w="19050" cap="flat" cmpd="sng" algn="ctr">
+          <a:solidFill>
+            <a:schemeClr val="phClr"/>
+          </a:solidFill>
+          <a:prstDash val="solid"/>
+          <a:miter lim="800000"/>
+        </a:ln>
+        <a:ln w="25400" cap="flat" cmpd="sng" algn="ctr">
+          <a:solidFill>
+            <a:schemeClr val="phClr"/>
+          </a:solidFill>
+          <a:prstDash val="solid"/>
+          <a:miter lim="800000"/>
+        </a:ln>
+      </a:lnStyleLst>
+      <a:effectStyleLst>
+        <a:effectStyle>
+          <a:effectLst/>
+        </a:effectStyle>
+        <a:effectStyle>
+          <a:effectLst/>
+        </a:effectStyle>
+        <a:effectStyle>
+          <a:effectLst>
+            <a:outerShdw blurRad="57150" dist="19050" dir="5400000" algn="ctr" rotWithShape="0">
+              <a:srgbClr val="000000">
+                <a:alpha val="63000"/>
+              </a:srgbClr>
+            </a:outerShdw>
+          </a:effectLst>
+        </a:effectStyle>
+      </a:effectStyleLst>
+      <a:bgFillStyleLst>
+        <a:solidFill>
+          <a:schemeClr val="phClr"/>
+        </a:solidFill>
+        <a:solidFill>
+          <a:schemeClr val="phClr">
+            <a:tint val="95000"/>
+            <a:satMod val="170000"/>
+          </a:schemeClr>
+        </a:solidFill>
+        <a:gradFill rotWithShape="1">
+          <a:gsLst>
+            <a:gs pos="0">
+              <a:schemeClr val="phClr">
+                <a:tint val="93000"/>
+                <a:satMod val="150000"/>
+                <a:shade val="98000"/>
+                <a:lumMod val="102000"/>
+              </a:schemeClr>
+            </a:gs>
+            <a:gs pos="50000">
+              <a:schemeClr val="phClr">
+                <a:tint val="98000"/>
+                <a:satMod val="130000"/>
+                <a:shade val="90000"/>
+                <a:lumMod val="103000"/>
+              </a:schemeClr>
+            </a:gs>
+            <a:gs pos="100000">
+              <a:schemeClr val="phClr">
+                <a:shade val="63000"/>
+                <a:satMod val="120000"/>
+              </a:schemeClr>
+            </a:gs>
+          </a:gsLst>
+          <a:lin ang="5400000" scaled="0"/>
+        </a:gradFill>
+      </a:bgFillStyleLst>
+    </a:fmtScheme>
+  </a:themeElements>
+  <a:objectDefaults>
+    <a:lnDef>
+      <a:spPr/>
+      <a:bodyPr/>
+      <a:lstStyle/>
+      <a:style>
+        <a:lnRef idx="2">
+          <a:schemeClr val="accent1"/>
+        </a:lnRef>
+        <a:fillRef idx="0">
+          <a:schemeClr val="accent1"/>
+        </a:fillRef>
+        <a:effectRef idx="1">
+          <a:schemeClr val="accent1"/>
+        </a:effectRef>
+        <a:fontRef idx="minor">
+          <a:schemeClr val="tx1"/>
+        </a:fontRef>
+      </a:style>
+    </a:lnDef>
+  </a:objectDefaults>
+  <a:extraClrSchemeLst/>
+  <a:extLst>
+    <a:ext uri="{05A4C25C-085E-4340-85A3-A5531E510DB2}">
+      <thm15:themeFamily xmlns:thm15="http://schemas.microsoft.com/office/thememl/2012/main" name="Office Theme" id="{2E142A2C-CD16-42D6-873A-C26D2A0506FA}" vid="{1BDDFF52-6CD6-40A5-AB3C-68EB2F1E4D0A}"/>
+    </a:ext>
+  </a:extLst>
+</a:theme>
 </file>